--- a/projetos/gestao-ia-planilhas/produto/kit-advogados/entrega/29-modelo-carteira-para-o-contador-8-slides.pptx
+++ b/projetos/gestao-ia-planilhas/produto/kit-advogados/entrega/29-modelo-carteira-para-o-contador-8-slides.pptx
@@ -135,7 +135,7 @@
               <c:strCache>
                 <c:ptCount val="1"/>
                 <c:pt idx="0">
-                  <c:v>Recebido em setembro (R$)</c:v>
+                  <c:v>Recebido em agosto (R$)</c:v>
                 </c:pt>
               </c:strCache>
             </c:strRef>
@@ -173,15 +173,15 @@
           </c:dLbls>
           <c:cat>
             <c:multiLvlStrRef>
-              <c:f>Sheet1!$A$2:$A$6</c:f>
+              <c:f>Sheet1!$A$2:$A$7</c:f>
               <c:multiLvlStrCache>
-                <c:ptCount val="5"/>
+                <c:ptCount val="6"/>
                 <c:lvl>
                   <c:pt idx="0">
-                    <c:v>Consultoria e pareceres</c:v>
+                    <c:v>Outras entradas</c:v>
                   </c:pt>
                   <c:pt idx="1">
-                    <c:v>Honorários mistos (parte fixa)</c:v>
+                    <c:v>Reembolso de custas</c:v>
                   </c:pt>
                   <c:pt idx="2">
                     <c:v>Honorários de êxito</c:v>
@@ -190,6 +190,9 @@
                     <c:v>Honorários por hora</c:v>
                   </c:pt>
                   <c:pt idx="4">
+                    <c:v>Consultoria e pareceres</c:v>
+                  </c:pt>
+                  <c:pt idx="5">
                     <c:v>Honorários fixos</c:v>
                   </c:pt>
                 </c:lvl>
@@ -198,24 +201,27 @@
           </c:cat>
           <c:val>
             <c:numRef>
-              <c:f>Sheet1!$B$2:$B$6</c:f>
+              <c:f>Sheet1!$B$2:$B$7</c:f>
               <c:numCache>
                 <c:formatCode>General</c:formatCode>
-                <c:ptCount val="5"/>
+                <c:ptCount val="6"/>
                 <c:pt idx="0">
-                  <c:v>2600</c:v>
+                  <c:v>0</c:v>
                 </c:pt>
                 <c:pt idx="1">
-                  <c:v>4400</c:v>
+                  <c:v>310</c:v>
                 </c:pt>
                 <c:pt idx="2">
-                  <c:v>4000</c:v>
+                  <c:v>0</c:v>
                 </c:pt>
                 <c:pt idx="3">
-                  <c:v>9600</c:v>
+                  <c:v>0</c:v>
                 </c:pt>
                 <c:pt idx="4">
-                  <c:v>8800</c:v>
+                  <c:v>11290</c:v>
+                </c:pt>
+                <c:pt idx="5">
+                  <c:v>15300</c:v>
                 </c:pt>
               </c:numCache>
             </c:numRef>
@@ -296,7 +302,7 @@
         <c:axId val="2094734552"/>
         <c:scaling>
           <c:orientation val="minMax"/>
-          <c:max val="12000"/>
+          <c:max val="18000"/>
           <c:min val="0"/>
         </c:scaling>
         <c:delete val="0"/>
@@ -763,7 +769,7 @@
           <a:p>
             <a:r>
               <a:rPr lang="en-US" dirty="0"/>
-              <a:t>Modelo do Kit de Gestão para Advogados: troque os textos e mantenha a estrutura. Capa. Reunião de 30 minutos: os números vêm prontos das planilhas 09 (Caixa), 10 (Provisão), 11 (Pró-labore), 13 (Carteira) e 14 (Inadimplência); o contador recebe os arquivos do slide 8 antes da reunião. O roteiro da reunião está no bônus do kit.</a:t>
+              <a:t>Kit de Gestão para Advogados · modelo v1.0 · set/2026 · Modelo do Kit de Gestão para Advogados (v1.0, set/2026): troque os textos e mantenha a estrutura. O símbolo do canto está no slide mestre (Exibir &gt; Slide mestre): apague lá uma vez e some de todos. Capa. Reunião de 30 minutos: os números vêm prontos das planilhas 09 (Caixa, Config = Agosto), 10 (Provisão), 11 (Pró-labore), 13 (Carteira) e 14 (Parcelas); o contador recebe os arquivos do slide 8 dois dias antes. O roteiro da reunião está no bônus 24. Só totais: nenhum nome de cliente nem número de processo.</a:t>
             </a:r>
             <a:endParaRPr lang="en-US" dirty="0"/>
           </a:p>
@@ -851,7 +857,7 @@
           <a:p>
             <a:r>
               <a:rPr lang="en-US" dirty="0"/>
-              <a:t>Receita por modalidade. Barras horizontais, uma série. Clique no gráfico &gt; Editar dados. O contador precisa saber o que é honorário, o que é consultoria e o que é reembolso, porque o tratamento é diferente.</a:t>
+              <a:t>Kit de Gestão para Advogados · modelo v1.0 · set/2026 · Receita por categoria. Barras horizontais, uma série, com as categorias da aba Config do Caixa (09). Clique no gráfico &gt; Editar dados. O contador precisa saber o que é honorário, o que é consultoria e o que é reembolso, porque o tratamento é diferente.</a:t>
             </a:r>
             <a:endParaRPr lang="en-US" dirty="0"/>
           </a:p>
@@ -939,7 +945,7 @@
           <a:p>
             <a:r>
               <a:rPr lang="en-US" dirty="0"/>
-              <a:t>Saídas por categoria. As linhas são as mesmas da aba Config do Caixa (09): se mudar uma categoria lá, mude aqui. Pró-labore separado das demais, sempre.</a:t>
+              <a:t>Kit de Gestão para Advogados · modelo v1.0 · set/2026 · Saídas por categoria. As linhas são as mesmas da aba Config do Caixa (09): se mudar uma categoria lá, mude aqui. Pró-labore separado das demais, sempre. A tabela lista o caixa (pago); a DRE (18) troca a guia paga pela provisão de 8 % e tira a despesa pessoal.</a:t>
             </a:r>
             <a:endParaRPr lang="en-US" dirty="0"/>
           </a:p>
@@ -1027,7 +1033,7 @@
           <a:p>
             <a:r>
               <a:rPr lang="en-US" dirty="0"/>
-              <a:t>Provisões. A alíquota de 6% é do exemplo: o contador confirma a de cada mês (dúvida 1). Sem funcionário CLT no exemplo; se houver, acrescente 13º, férias e encargos como linha própria.</a:t>
+              <a:t>Kit de Gestão para Advogados · modelo v1.0 · set/2026 · Provisões. A alíquota de 8 % é do exemplo: o contador confirma a de cada mês (dúvida 1). Sem funcionário CLT no exemplo; se houver, acrescente 13º, férias e encargos como linha própria. As reservas de fim de ano e de janeiro são decisões de gestão, não obrigações: pergunte ao contador o melhor formato (dúvida 7).</a:t>
             </a:r>
             <a:endParaRPr lang="en-US" dirty="0"/>
           </a:p>
@@ -1115,7 +1121,7 @@
           <a:p>
             <a:r>
               <a:rPr lang="en-US" dirty="0"/>
-              <a:t>Recebíveis. O contador não cobra ninguém, mas precisa da posição para o balanço e para responder às dúvidas 3 e 6. Se houver parcela a dar baixa, traga o número.</a:t>
+              <a:t>Kit de Gestão para Advogados · modelo v1.0 · set/2026 · Recebíveis. O contador não cobra ninguém, mas precisa da posição para o balanço e para responder às dúvidas 3 e 6. Se houver parcela a dar baixa, traga o número. Nomes de clientes e números de processo ficam na planilha 14, no escritório.</a:t>
             </a:r>
             <a:endParaRPr lang="en-US" dirty="0"/>
           </a:p>
@@ -1203,7 +1209,7 @@
           <a:p>
             <a:r>
               <a:rPr lang="en-US" dirty="0"/>
-              <a:t>Pró-labore. Pró-labore é custo fixo; distribuição de lucro é outra coisa e tem tratamento diferente: é exatamente o que se pergunta ao contador.</a:t>
+              <a:t>Kit de Gestão para Advogados · modelo v1.0 · set/2026 · Pró-labore. Pró-labore é custo fixo; distribuição de lucro é outra coisa e tem tratamento diferente: é exatamente o que se pergunta ao contador (dúvida 2). Os totais vêm da aba Painel da 11 ("No ano, até o mês do painel, por sócio").</a:t>
             </a:r>
             <a:endParaRPr lang="en-US" dirty="0"/>
           </a:p>
@@ -1291,7 +1297,7 @@
           <a:p>
             <a:r>
               <a:rPr lang="en-US" dirty="0"/>
-              <a:t>Dúvidas. Lista numerada para o contador responder por escrito. Perguntas de gestão e contabilidade; nada de consulta jurídica aqui. Guarde as respostas na aba Config das planilhas citadas.</a:t>
+              <a:t>Kit de Gestão para Advogados · modelo v1.0 · set/2026 · Dúvidas. Lista numerada para o contador responder por escrito. Perguntas de gestão e contabilidade; nada de consulta jurídica aqui. Guarde as respostas na aba Config das planilhas citadas.</a:t>
             </a:r>
             <a:endParaRPr lang="en-US" dirty="0"/>
           </a:p>
@@ -1379,7 +1385,7 @@
           <a:p>
             <a:r>
               <a:rPr lang="en-US" dirty="0"/>
-              <a:t>Anexos. Diga exatamente que arquivo e que aba o contador recebe. Envie três dias antes da reunião e termine com a data da próxima.</a:t>
+              <a:t>Kit de Gestão para Advogados · modelo v1.0 · set/2026 · Anexos. Diga exatamente que arquivo e que aba o contador recebe. Nunca a lista de parcelas ou de casos: só totais. Envie dois dias antes da reunião e termine com a data da próxima.</a:t>
             </a:r>
             <a:endParaRPr lang="en-US" dirty="0"/>
           </a:p>
@@ -1451,6 +1457,286 @@
 </p:sldLayout>
 </file>
 
+<file path=ppt/slideLayouts/slideLayout2.xml><?xml version="1.0" encoding="utf-8"?>
+<p:sldLayout xmlns:a="http://schemas.openxmlformats.org/drawingml/2006/main" xmlns:r="http://schemas.openxmlformats.org/officeDocument/2006/relationships" xmlns:p="http://schemas.openxmlformats.org/presentationml/2006/main" preserve="1">
+  <p:cSld name="CLARO">
+    <p:bg>
+      <p:bgPr>
+        <a:solidFill>
+          <a:srgbClr val="FFFFFF"/>
+        </a:solidFill>
+      </p:bgPr>
+    </p:bg>
+    <p:spTree>
+      <p:nvGrpSpPr>
+        <p:cNvPr id="1" name=""/>
+        <p:cNvGrpSpPr/>
+        <p:nvPr/>
+      </p:nvGrpSpPr>
+      <p:grpSpPr>
+        <a:xfrm>
+          <a:off x="0" y="0"/>
+          <a:ext cx="0" cy="0"/>
+          <a:chOff x="0" y="0"/>
+          <a:chExt cx="0" cy="0"/>
+        </a:xfrm>
+      </p:grpSpPr>
+      <p:sp>
+        <p:nvSpPr>
+          <p:cNvPr id="2" name="Shape 0"/>
+          <p:cNvSpPr/>
+          <p:nvPr/>
+        </p:nvSpPr>
+        <p:spPr>
+          <a:xfrm>
+            <a:off x="8321040" y="4846320"/>
+            <a:ext cx="192024" cy="64008"/>
+          </a:xfrm>
+          <a:prstGeom prst="rect">
+            <a:avLst>
+              <a:gd name="adj" fmla="val 42857"/>
+            </a:avLst>
+          </a:prstGeom>
+          <a:solidFill>
+            <a:srgbClr val="7A5AA8"/>
+          </a:solidFill>
+          <a:ln w="12700">
+            <a:solidFill>
+              <a:srgbClr val="7A5AA8"/>
+            </a:solidFill>
+            <a:prstDash val="solid"/>
+          </a:ln>
+        </p:spPr>
+      </p:sp>
+      <p:sp>
+        <p:nvSpPr>
+          <p:cNvPr id="3" name="Shape 1"/>
+          <p:cNvSpPr/>
+          <p:nvPr/>
+        </p:nvSpPr>
+        <p:spPr>
+          <a:xfrm>
+            <a:off x="8366760" y="4764024"/>
+            <a:ext cx="192024" cy="64008"/>
+          </a:xfrm>
+          <a:prstGeom prst="rect">
+            <a:avLst>
+              <a:gd name="adj" fmla="val 42857"/>
+            </a:avLst>
+          </a:prstGeom>
+          <a:solidFill>
+            <a:srgbClr val="3B1F5E"/>
+          </a:solidFill>
+          <a:ln w="12700">
+            <a:solidFill>
+              <a:srgbClr val="3B1F5E"/>
+            </a:solidFill>
+            <a:prstDash val="solid"/>
+          </a:ln>
+        </p:spPr>
+      </p:sp>
+      <p:sp>
+        <p:nvSpPr>
+          <p:cNvPr id="4" name="Shape 2"/>
+          <p:cNvSpPr/>
+          <p:nvPr/>
+        </p:nvSpPr>
+        <p:spPr>
+          <a:xfrm>
+            <a:off x="8412480" y="4681728"/>
+            <a:ext cx="192024" cy="64008"/>
+          </a:xfrm>
+          <a:prstGeom prst="rect">
+            <a:avLst>
+              <a:gd name="adj" fmla="val 42857"/>
+            </a:avLst>
+          </a:prstGeom>
+          <a:solidFill>
+            <a:srgbClr val="3B1F5E"/>
+          </a:solidFill>
+          <a:ln w="12700">
+            <a:solidFill>
+              <a:srgbClr val="3B1F5E"/>
+            </a:solidFill>
+            <a:prstDash val="solid"/>
+          </a:ln>
+        </p:spPr>
+      </p:sp>
+      <p:sp>
+        <p:nvSpPr>
+          <p:cNvPr id="5" name="Shape 3"/>
+          <p:cNvSpPr/>
+          <p:nvPr/>
+        </p:nvSpPr>
+        <p:spPr>
+          <a:xfrm>
+            <a:off x="8604504" y="4864608"/>
+            <a:ext cx="59436" cy="59436"/>
+          </a:xfrm>
+          <a:prstGeom prst="rect">
+            <a:avLst>
+              <a:gd name="adj" fmla="val 50000"/>
+            </a:avLst>
+          </a:prstGeom>
+          <a:solidFill>
+            <a:srgbClr val="FFC83D"/>
+          </a:solidFill>
+          <a:ln w="12700">
+            <a:solidFill>
+              <a:srgbClr val="FFC83D"/>
+            </a:solidFill>
+            <a:prstDash val="solid"/>
+          </a:ln>
+        </p:spPr>
+      </p:sp>
+    </p:spTree>
+  </p:cSld>
+  <p:clrMapOvr>
+    <a:masterClrMapping/>
+  </p:clrMapOvr>
+</p:sldLayout>
+</file>
+
+<file path=ppt/slideLayouts/slideLayout3.xml><?xml version="1.0" encoding="utf-8"?>
+<p:sldLayout xmlns:a="http://schemas.openxmlformats.org/drawingml/2006/main" xmlns:r="http://schemas.openxmlformats.org/officeDocument/2006/relationships" xmlns:p="http://schemas.openxmlformats.org/presentationml/2006/main" preserve="1">
+  <p:cSld name="ESCURO">
+    <p:bg>
+      <p:bgPr>
+        <a:solidFill>
+          <a:srgbClr val="3B1F5E"/>
+        </a:solidFill>
+      </p:bgPr>
+    </p:bg>
+    <p:spTree>
+      <p:nvGrpSpPr>
+        <p:cNvPr id="1" name=""/>
+        <p:cNvGrpSpPr/>
+        <p:nvPr/>
+      </p:nvGrpSpPr>
+      <p:grpSpPr>
+        <a:xfrm>
+          <a:off x="0" y="0"/>
+          <a:ext cx="0" cy="0"/>
+          <a:chOff x="0" y="0"/>
+          <a:chExt cx="0" cy="0"/>
+        </a:xfrm>
+      </p:grpSpPr>
+      <p:sp>
+        <p:nvSpPr>
+          <p:cNvPr id="2" name="Shape 0"/>
+          <p:cNvSpPr/>
+          <p:nvPr/>
+        </p:nvSpPr>
+        <p:spPr>
+          <a:xfrm>
+            <a:off x="8321040" y="4846320"/>
+            <a:ext cx="192024" cy="64008"/>
+          </a:xfrm>
+          <a:prstGeom prst="rect">
+            <a:avLst>
+              <a:gd name="adj" fmla="val 42857"/>
+            </a:avLst>
+          </a:prstGeom>
+          <a:solidFill>
+            <a:srgbClr val="B89BE0"/>
+          </a:solidFill>
+          <a:ln w="12700">
+            <a:solidFill>
+              <a:srgbClr val="B89BE0"/>
+            </a:solidFill>
+            <a:prstDash val="solid"/>
+          </a:ln>
+        </p:spPr>
+      </p:sp>
+      <p:sp>
+        <p:nvSpPr>
+          <p:cNvPr id="3" name="Shape 1"/>
+          <p:cNvSpPr/>
+          <p:nvPr/>
+        </p:nvSpPr>
+        <p:spPr>
+          <a:xfrm>
+            <a:off x="8366760" y="4764024"/>
+            <a:ext cx="192024" cy="64008"/>
+          </a:xfrm>
+          <a:prstGeom prst="rect">
+            <a:avLst>
+              <a:gd name="adj" fmla="val 42857"/>
+            </a:avLst>
+          </a:prstGeom>
+          <a:solidFill>
+            <a:srgbClr val="FFFFFF"/>
+          </a:solidFill>
+          <a:ln w="12700">
+            <a:solidFill>
+              <a:srgbClr val="FFFFFF"/>
+            </a:solidFill>
+            <a:prstDash val="solid"/>
+          </a:ln>
+        </p:spPr>
+      </p:sp>
+      <p:sp>
+        <p:nvSpPr>
+          <p:cNvPr id="4" name="Shape 2"/>
+          <p:cNvSpPr/>
+          <p:nvPr/>
+        </p:nvSpPr>
+        <p:spPr>
+          <a:xfrm>
+            <a:off x="8412480" y="4681728"/>
+            <a:ext cx="192024" cy="64008"/>
+          </a:xfrm>
+          <a:prstGeom prst="rect">
+            <a:avLst>
+              <a:gd name="adj" fmla="val 42857"/>
+            </a:avLst>
+          </a:prstGeom>
+          <a:solidFill>
+            <a:srgbClr val="FFFFFF"/>
+          </a:solidFill>
+          <a:ln w="12700">
+            <a:solidFill>
+              <a:srgbClr val="FFFFFF"/>
+            </a:solidFill>
+            <a:prstDash val="solid"/>
+          </a:ln>
+        </p:spPr>
+      </p:sp>
+      <p:sp>
+        <p:nvSpPr>
+          <p:cNvPr id="5" name="Shape 3"/>
+          <p:cNvSpPr/>
+          <p:nvPr/>
+        </p:nvSpPr>
+        <p:spPr>
+          <a:xfrm>
+            <a:off x="8604504" y="4864608"/>
+            <a:ext cx="59436" cy="59436"/>
+          </a:xfrm>
+          <a:prstGeom prst="rect">
+            <a:avLst>
+              <a:gd name="adj" fmla="val 50000"/>
+            </a:avLst>
+          </a:prstGeom>
+          <a:solidFill>
+            <a:srgbClr val="FFC83D"/>
+          </a:solidFill>
+          <a:ln w="12700">
+            <a:solidFill>
+              <a:srgbClr val="FFC83D"/>
+            </a:solidFill>
+            <a:prstDash val="solid"/>
+          </a:ln>
+        </p:spPr>
+      </p:sp>
+    </p:spTree>
+  </p:cSld>
+  <p:clrMapOvr>
+    <a:masterClrMapping/>
+  </p:clrMapOvr>
+</p:sldLayout>
+</file>
+
 <file path=ppt/slideMasters/slideMaster1.xml><?xml version="1.0" encoding="utf-8"?>
 <p:sldMaster xmlns:a="http://schemas.openxmlformats.org/drawingml/2006/main" xmlns:r="http://schemas.openxmlformats.org/officeDocument/2006/relationships" xmlns:p="http://schemas.openxmlformats.org/presentationml/2006/main">
   <p:cSld>
@@ -1473,6 +1759,8 @@
   <p:clrMap bg1="lt1" tx1="dk1" bg2="lt2" tx2="dk2" accent1="accent1" accent2="accent2" accent3="accent3" accent4="accent4" accent5="accent5" accent6="accent6" hlink="hlink" folHlink="folHlink"/>
   <p:sldLayoutIdLst>
     <p:sldLayoutId id="2147483649" r:id="rId1"/>
+    <p:sldLayoutId id="2147483650" r:id="rId2"/>
+    <p:sldLayoutId id="2147483651" r:id="rId3"/>
   </p:sldLayoutIdLst>
   <p:hf sldNum="0" hdr="0" ftr="0" dt="0"/>
   <p:txStyles>
@@ -1731,13 +2019,6 @@
 <file path=ppt/slides/slide1.xml><?xml version="1.0" encoding="utf-8"?>
 <p:sld xmlns:a="http://schemas.openxmlformats.org/drawingml/2006/main" xmlns:r="http://schemas.openxmlformats.org/officeDocument/2006/relationships" xmlns:p="http://schemas.openxmlformats.org/presentationml/2006/main">
   <p:cSld name="Slide 1">
-    <p:bg>
-      <p:bgPr>
-        <a:solidFill>
-          <a:srgbClr val="3B1F5E"/>
-        </a:solidFill>
-      </p:bgPr>
-    </p:bg>
     <p:spTree>
       <p:nvGrpSpPr>
         <p:cNvPr id="1" name=""/>
@@ -1754,113 +2035,7 @@
       </p:grpSpPr>
       <p:sp>
         <p:nvSpPr>
-          <p:cNvPr id="2" name="Shape 0"/>
-          <p:cNvSpPr/>
-          <p:nvPr/>
-        </p:nvSpPr>
-        <p:spPr>
-          <a:xfrm>
-            <a:off x="457200" y="822960"/>
-            <a:ext cx="384048" cy="128016"/>
-          </a:xfrm>
-          <a:prstGeom prst="roundRect">
-            <a:avLst>
-              <a:gd name="adj" fmla="val 42857"/>
-            </a:avLst>
-          </a:prstGeom>
-          <a:solidFill>
-            <a:srgbClr val="B89BE0"/>
-          </a:solidFill>
-          <a:ln w="12700">
-            <a:solidFill>
-              <a:srgbClr val="B89BE0"/>
-            </a:solidFill>
-            <a:prstDash val="solid"/>
-          </a:ln>
-        </p:spPr>
-      </p:sp>
-      <p:sp>
-        <p:nvSpPr>
-          <p:cNvPr id="3" name="Shape 1"/>
-          <p:cNvSpPr/>
-          <p:nvPr/>
-        </p:nvSpPr>
-        <p:spPr>
-          <a:xfrm>
-            <a:off x="548640" y="658368"/>
-            <a:ext cx="384048" cy="128016"/>
-          </a:xfrm>
-          <a:prstGeom prst="roundRect">
-            <a:avLst>
-              <a:gd name="adj" fmla="val 42857"/>
-            </a:avLst>
-          </a:prstGeom>
-          <a:solidFill>
-            <a:srgbClr val="FFFFFF"/>
-          </a:solidFill>
-          <a:ln w="12700">
-            <a:solidFill>
-              <a:srgbClr val="FFFFFF"/>
-            </a:solidFill>
-            <a:prstDash val="solid"/>
-          </a:ln>
-        </p:spPr>
-      </p:sp>
-      <p:sp>
-        <p:nvSpPr>
-          <p:cNvPr id="4" name="Shape 2"/>
-          <p:cNvSpPr/>
-          <p:nvPr/>
-        </p:nvSpPr>
-        <p:spPr>
-          <a:xfrm>
-            <a:off x="640080" y="493776"/>
-            <a:ext cx="384048" cy="128016"/>
-          </a:xfrm>
-          <a:prstGeom prst="roundRect">
-            <a:avLst>
-              <a:gd name="adj" fmla="val 42857"/>
-            </a:avLst>
-          </a:prstGeom>
-          <a:solidFill>
-            <a:srgbClr val="FFFFFF"/>
-          </a:solidFill>
-          <a:ln w="12700">
-            <a:solidFill>
-              <a:srgbClr val="FFFFFF"/>
-            </a:solidFill>
-            <a:prstDash val="solid"/>
-          </a:ln>
-        </p:spPr>
-      </p:sp>
-      <p:sp>
-        <p:nvSpPr>
-          <p:cNvPr id="5" name="Shape 3"/>
-          <p:cNvSpPr/>
-          <p:nvPr/>
-        </p:nvSpPr>
-        <p:spPr>
-          <a:xfrm>
-            <a:off x="1024128" y="859536"/>
-            <a:ext cx="118872" cy="118872"/>
-          </a:xfrm>
-          <a:prstGeom prst="ellipse">
-            <a:avLst/>
-          </a:prstGeom>
-          <a:solidFill>
-            <a:srgbClr val="FFC83D"/>
-          </a:solidFill>
-          <a:ln w="12700">
-            <a:solidFill>
-              <a:srgbClr val="FFC83D"/>
-            </a:solidFill>
-            <a:prstDash val="solid"/>
-          </a:ln>
-        </p:spPr>
-      </p:sp>
-      <p:sp>
-        <p:nvSpPr>
-          <p:cNvPr id="6" name="Text 4"/>
+          <p:cNvPr id="2" name="Text 0"/>
           <p:cNvSpPr txBox="1"/>
           <p:nvPr/>
         </p:nvSpPr>
@@ -1893,7 +2068,7 @@
                 <a:ea typeface="Arial" pitchFamily="34" charset="-122"/>
                 <a:cs typeface="Arial" pitchFamily="34" charset="-120"/>
               </a:rPr>
-              <a:t>Carteira e caixa de setembro de 2026</a:t>
+              <a:t>Carteira e caixa de agosto de 2026</a:t>
             </a:r>
             <a:endParaRPr lang="en-US" sz="3600" dirty="0"/>
           </a:p>
@@ -1901,7 +2076,7 @@
       </p:sp>
       <p:sp>
         <p:nvSpPr>
-          <p:cNvPr id="7" name="Text 5"/>
+          <p:cNvPr id="3" name="Text 1"/>
           <p:cNvSpPr txBox="1"/>
           <p:nvPr/>
         </p:nvSpPr>
@@ -1932,7 +2107,7 @@
                 <a:ea typeface="Arial" pitchFamily="34" charset="-122"/>
                 <a:cs typeface="Arial" pitchFamily="34" charset="-120"/>
               </a:rPr>
-              <a:t>Ferraz &amp; Lima Advocacia (exemplo fictício) · reunião mensal com o contador · 6 de outubro de 2026</a:t>
+              <a:t>Ferraz &amp; Lima Advocacia (exemplo fictício) · reunião mensal com o contador · 14 de setembro de 2026</a:t>
             </a:r>
             <a:endParaRPr lang="en-US" sz="1600" dirty="0"/>
           </a:p>
@@ -1940,14 +2115,14 @@
       </p:sp>
       <p:sp>
         <p:nvSpPr>
-          <p:cNvPr id="8" name="Text 6"/>
+          <p:cNvPr id="4" name="Text 2"/>
           <p:cNvSpPr txBox="1"/>
           <p:nvPr/>
         </p:nvSpPr>
         <p:spPr>
           <a:xfrm>
             <a:off x="457200" y="3291840"/>
-            <a:ext cx="7772400" cy="640080"/>
+            <a:ext cx="7772400" cy="822960"/>
           </a:xfrm>
           <a:prstGeom prst="rect">
             <a:avLst/>
@@ -1956,7 +2131,7 @@
           <a:ln/>
         </p:spPr>
         <p:txBody>
-          <a:bodyPr wrap="square" lIns="0" tIns="0" rIns="0" bIns="0" rtlCol="0" anchor="ctr"/>
+          <a:bodyPr wrap="square" lIns="0" tIns="0" rIns="0" bIns="0" rtlCol="0" anchor="t"/>
           <a:lstStyle/>
           <a:p>
             <a:pPr indent="0" marL="0">
@@ -1971,156 +2146,11 @@
                 <a:ea typeface="Arial" pitchFamily="34" charset="-122"/>
                 <a:cs typeface="Arial" pitchFamily="34" charset="-120"/>
               </a:rPr>
-              <a:t>Entrou R$ 29,4 mil, saiu R$ 20,2 mil, a receber R$ 128,3 mil. Oito dúvidas no slide 7.</a:t>
+              <a:t>Entrou R$ 26.900, saiu R$ 21.897, sobrou R$ 5.003; a receber R$ 111.990. Oito dúvidas no slide 7.</a:t>
             </a:r>
             <a:endParaRPr lang="en-US" sz="1400" dirty="0"/>
           </a:p>
         </p:txBody>
-      </p:sp>
-      <p:sp>
-        <p:nvSpPr>
-          <p:cNvPr id="9" name="Text 7"/>
-          <p:cNvSpPr txBox="1"/>
-          <p:nvPr/>
-        </p:nvSpPr>
-        <p:spPr>
-          <a:xfrm>
-            <a:off x="457200" y="4791456"/>
-            <a:ext cx="6858000" cy="201168"/>
-          </a:xfrm>
-          <a:prstGeom prst="rect">
-            <a:avLst/>
-          </a:prstGeom>
-          <a:noFill/>
-          <a:ln/>
-        </p:spPr>
-        <p:txBody>
-          <a:bodyPr wrap="square" lIns="0" tIns="0" rIns="0" bIns="0" rtlCol="0" anchor="ctr"/>
-          <a:lstStyle/>
-          <a:p>
-            <a:pPr indent="0" marL="0">
-              <a:buNone/>
-            </a:pPr>
-            <a:r>
-              <a:rPr lang="en-US" sz="700" dirty="0">
-                <a:solidFill>
-                  <a:srgbClr val="7A5AA8"/>
-                </a:solidFill>
-                <a:latin typeface="Arial" pitchFamily="34" charset="0"/>
-                <a:ea typeface="Arial" pitchFamily="34" charset="-122"/>
-                <a:cs typeface="Arial" pitchFamily="34" charset="-120"/>
-              </a:rPr>
-              <a:t>Kit de Gestão para Advogados · modelo v1.0 · set/2026</a:t>
-            </a:r>
-            <a:endParaRPr lang="en-US" sz="700" dirty="0"/>
-          </a:p>
-        </p:txBody>
-      </p:sp>
-      <p:sp>
-        <p:nvSpPr>
-          <p:cNvPr id="10" name="Shape 8"/>
-          <p:cNvSpPr/>
-          <p:nvPr/>
-        </p:nvSpPr>
-        <p:spPr>
-          <a:xfrm>
-            <a:off x="8229600" y="4818888"/>
-            <a:ext cx="211226" cy="70409"/>
-          </a:xfrm>
-          <a:prstGeom prst="roundRect">
-            <a:avLst>
-              <a:gd name="adj" fmla="val 42857"/>
-            </a:avLst>
-          </a:prstGeom>
-          <a:solidFill>
-            <a:srgbClr val="B89BE0"/>
-          </a:solidFill>
-          <a:ln w="12700">
-            <a:solidFill>
-              <a:srgbClr val="B89BE0"/>
-            </a:solidFill>
-            <a:prstDash val="solid"/>
-          </a:ln>
-        </p:spPr>
-      </p:sp>
-      <p:sp>
-        <p:nvSpPr>
-          <p:cNvPr id="11" name="Shape 9"/>
-          <p:cNvSpPr/>
-          <p:nvPr/>
-        </p:nvSpPr>
-        <p:spPr>
-          <a:xfrm>
-            <a:off x="8279892" y="4728362"/>
-            <a:ext cx="211226" cy="70409"/>
-          </a:xfrm>
-          <a:prstGeom prst="roundRect">
-            <a:avLst>
-              <a:gd name="adj" fmla="val 42857"/>
-            </a:avLst>
-          </a:prstGeom>
-          <a:solidFill>
-            <a:srgbClr val="FFFFFF"/>
-          </a:solidFill>
-          <a:ln w="12700">
-            <a:solidFill>
-              <a:srgbClr val="FFFFFF"/>
-            </a:solidFill>
-            <a:prstDash val="solid"/>
-          </a:ln>
-        </p:spPr>
-      </p:sp>
-      <p:sp>
-        <p:nvSpPr>
-          <p:cNvPr id="12" name="Shape 10"/>
-          <p:cNvSpPr/>
-          <p:nvPr/>
-        </p:nvSpPr>
-        <p:spPr>
-          <a:xfrm>
-            <a:off x="8330184" y="4637837"/>
-            <a:ext cx="211226" cy="70409"/>
-          </a:xfrm>
-          <a:prstGeom prst="roundRect">
-            <a:avLst>
-              <a:gd name="adj" fmla="val 42857"/>
-            </a:avLst>
-          </a:prstGeom>
-          <a:solidFill>
-            <a:srgbClr val="FFFFFF"/>
-          </a:solidFill>
-          <a:ln w="12700">
-            <a:solidFill>
-              <a:srgbClr val="FFFFFF"/>
-            </a:solidFill>
-            <a:prstDash val="solid"/>
-          </a:ln>
-        </p:spPr>
-      </p:sp>
-      <p:sp>
-        <p:nvSpPr>
-          <p:cNvPr id="13" name="Shape 11"/>
-          <p:cNvSpPr/>
-          <p:nvPr/>
-        </p:nvSpPr>
-        <p:spPr>
-          <a:xfrm>
-            <a:off x="8541410" y="4839005"/>
-            <a:ext cx="65380" cy="65380"/>
-          </a:xfrm>
-          <a:prstGeom prst="ellipse">
-            <a:avLst/>
-          </a:prstGeom>
-          <a:solidFill>
-            <a:srgbClr val="FFC83D"/>
-          </a:solidFill>
-          <a:ln w="12700">
-            <a:solidFill>
-              <a:srgbClr val="FFC83D"/>
-            </a:solidFill>
-            <a:prstDash val="solid"/>
-          </a:ln>
-        </p:spPr>
       </p:sp>
     </p:spTree>
   </p:cSld>
@@ -2133,13 +2163,6 @@
 <file path=ppt/slides/slide2.xml><?xml version="1.0" encoding="utf-8"?>
 <p:sld xmlns:a="http://schemas.openxmlformats.org/drawingml/2006/main" xmlns:r="http://schemas.openxmlformats.org/officeDocument/2006/relationships" xmlns:p="http://schemas.openxmlformats.org/presentationml/2006/main">
   <p:cSld name="Slide 2">
-    <p:bg>
-      <p:bgPr>
-        <a:solidFill>
-          <a:srgbClr val="FFFFFF"/>
-        </a:solidFill>
-      </p:bgPr>
-    </p:bg>
     <p:spTree>
       <p:nvGrpSpPr>
         <p:cNvPr id="1" name=""/>
@@ -2189,7 +2212,7 @@
                 <a:ea typeface="Arial" pitchFamily="34" charset="-122"/>
                 <a:cs typeface="Arial" pitchFamily="34" charset="-120"/>
               </a:rPr>
-              <a:t>Receita do mês por modalidade</a:t>
+              <a:t>Receita de agosto por categoria</a:t>
             </a:r>
             <a:endParaRPr lang="en-US" sz="2400" dirty="0"/>
           </a:p>
@@ -2228,7 +2251,7 @@
                 <a:ea typeface="Arial" pitchFamily="34" charset="-122"/>
                 <a:cs typeface="Arial" pitchFamily="34" charset="-120"/>
               </a:rPr>
-              <a:t>Recebimentos de setembro (regime de caixa), Caixa do escritório (09), aba Painel. Total: R$ 29.400.</a:t>
+              <a:t>Recebimentos de agosto (regime de caixa), Caixa do escritório (09), aba Painel "De onde veio o dinheiro". Total: R$ 26.900.</a:t>
             </a:r>
             <a:endParaRPr lang="en-US" sz="1200" dirty="0"/>
           </a:p>
@@ -2259,7 +2282,7 @@
         <p:spPr>
           <a:xfrm>
             <a:off x="5852160" y="1508760"/>
-            <a:ext cx="2926080" cy="3017520"/>
+            <a:ext cx="2926080" cy="3108960"/>
           </a:xfrm>
           <a:prstGeom prst="rect">
             <a:avLst/>
@@ -2278,7 +2301,7 @@
               <a:buNone/>
             </a:pPr>
             <a:r>
-              <a:rPr lang="en-US" sz="1050" b="1" dirty="0">
+              <a:rPr lang="en-US" sz="1000" b="1" dirty="0">
                 <a:solidFill>
                   <a:srgbClr val="3B1F5E"/>
                 </a:solidFill>
@@ -2288,7 +2311,7 @@
               </a:rPr>
               <a:t>Leitura</a:t>
             </a:r>
-            <a:endParaRPr lang="en-US" sz="1050" dirty="0"/>
+            <a:endParaRPr lang="en-US" sz="1000" dirty="0"/>
           </a:p>
           <a:p>
             <a:pPr marL="342900" indent="-342900">
@@ -2299,7 +2322,7 @@
               <a:buChar char="•"/>
             </a:pPr>
             <a:r>
-              <a:rPr lang="en-US" sz="1050" dirty="0">
+              <a:rPr lang="en-US" sz="1000" dirty="0">
                 <a:solidFill>
                   <a:srgbClr val="1F1235"/>
                 </a:solidFill>
@@ -2307,9 +2330,9 @@
                 <a:ea typeface="Arial" pitchFamily="34" charset="-122"/>
                 <a:cs typeface="Arial" pitchFamily="34" charset="-120"/>
               </a:rPr>
-              <a:t>Agosto: R$ 27.900. Setembro é o maior mês do ano.</a:t>
+              <a:t>Julho: R$ 29.460 (−8,7 %). Agosto não teve honorário por hora nem êxito; consultoria e pareceres foram o dobro da média do ano (R$ 4.549).</a:t>
             </a:r>
-            <a:endParaRPr lang="en-US" sz="1050" dirty="0"/>
+            <a:endParaRPr lang="en-US" sz="1000" dirty="0"/>
           </a:p>
           <a:p>
             <a:pPr marL="342900" indent="-342900">
@@ -2320,7 +2343,7 @@
               <a:buChar char="•"/>
             </a:pPr>
             <a:r>
-              <a:rPr lang="en-US" sz="1050" dirty="0">
+              <a:rPr lang="en-US" sz="1000" dirty="0">
                 <a:solidFill>
                   <a:srgbClr val="1F1235"/>
                 </a:solidFill>
@@ -2328,9 +2351,9 @@
                 <a:ea typeface="Arial" pitchFamily="34" charset="-122"/>
                 <a:cs typeface="Arial" pitchFamily="34" charset="-120"/>
               </a:rPr>
-              <a:t>Cada recebimento está lançado por cliente, caso e forma de pagamento (Pix, transferência ou boleto).</a:t>
+              <a:t>Cada recebimento está lançado por categoria, data e forma de pagamento; a nota fiscal de cada um vai em anexo.</a:t>
             </a:r>
-            <a:endParaRPr lang="en-US" sz="1050" dirty="0"/>
+            <a:endParaRPr lang="en-US" sz="1000" dirty="0"/>
           </a:p>
           <a:p>
             <a:pPr marL="342900" indent="-342900">
@@ -2341,7 +2364,7 @@
               <a:buChar char="•"/>
             </a:pPr>
             <a:r>
-              <a:rPr lang="en-US" sz="1050" dirty="0">
+              <a:rPr lang="en-US" sz="1000" dirty="0">
                 <a:solidFill>
                   <a:srgbClr val="1F1235"/>
                 </a:solidFill>
@@ -2349,9 +2372,9 @@
                 <a:ea typeface="Arial" pitchFamily="34" charset="-122"/>
                 <a:cs typeface="Arial" pitchFamily="34" charset="-120"/>
               </a:rPr>
-              <a:t>Reembolso de custas: R$ 0 em setembro. Quando houver, vai em categoria própria, fora da receita (dúvida 4).</a:t>
+              <a:t>Reembolso de custas (R$ 310) entra em categoria própria, fora dos honorários (dúvida 4).</a:t>
             </a:r>
-            <a:endParaRPr lang="en-US" sz="1050" dirty="0"/>
+            <a:endParaRPr lang="en-US" sz="1000" dirty="0"/>
           </a:p>
           <a:p>
             <a:pPr marL="342900" indent="-342900">
@@ -2362,7 +2385,7 @@
               <a:buChar char="•"/>
             </a:pPr>
             <a:r>
-              <a:rPr lang="en-US" sz="1050" dirty="0">
+              <a:rPr lang="en-US" sz="1000" dirty="0">
                 <a:solidFill>
                   <a:srgbClr val="1F1235"/>
                 </a:solidFill>
@@ -2370,156 +2393,11 @@
                 <a:ea typeface="Arial" pitchFamily="34" charset="-122"/>
                 <a:cs typeface="Arial" pitchFamily="34" charset="-120"/>
               </a:rPr>
-              <a:t>A receber já emitido e não pago no mês: R$ 7.500 (parcela final de um caso e um parecer).</a:t>
+              <a:t>De janeiro a agosto: R$ 207.850 recebidos (fixos R$ 123.450, hora R$ 18.900, êxito R$ 27.000, consultoria R$ 36.390, reembolsos R$ 1.630, outras R$ 480).</a:t>
             </a:r>
-            <a:endParaRPr lang="en-US" sz="1050" dirty="0"/>
+            <a:endParaRPr lang="en-US" sz="1000" dirty="0"/>
           </a:p>
         </p:txBody>
-      </p:sp>
-      <p:sp>
-        <p:nvSpPr>
-          <p:cNvPr id="6" name="Text 3"/>
-          <p:cNvSpPr txBox="1"/>
-          <p:nvPr/>
-        </p:nvSpPr>
-        <p:spPr>
-          <a:xfrm>
-            <a:off x="457200" y="4791456"/>
-            <a:ext cx="6858000" cy="201168"/>
-          </a:xfrm>
-          <a:prstGeom prst="rect">
-            <a:avLst/>
-          </a:prstGeom>
-          <a:noFill/>
-          <a:ln/>
-        </p:spPr>
-        <p:txBody>
-          <a:bodyPr wrap="square" lIns="0" tIns="0" rIns="0" bIns="0" rtlCol="0" anchor="ctr"/>
-          <a:lstStyle/>
-          <a:p>
-            <a:pPr indent="0" marL="0">
-              <a:buNone/>
-            </a:pPr>
-            <a:r>
-              <a:rPr lang="en-US" sz="700" dirty="0">
-                <a:solidFill>
-                  <a:srgbClr val="B89BE0"/>
-                </a:solidFill>
-                <a:latin typeface="Arial" pitchFamily="34" charset="0"/>
-                <a:ea typeface="Arial" pitchFamily="34" charset="-122"/>
-                <a:cs typeface="Arial" pitchFamily="34" charset="-120"/>
-              </a:rPr>
-              <a:t>Kit de Gestão para Advogados · modelo v1.0 · set/2026</a:t>
-            </a:r>
-            <a:endParaRPr lang="en-US" sz="700" dirty="0"/>
-          </a:p>
-        </p:txBody>
-      </p:sp>
-      <p:sp>
-        <p:nvSpPr>
-          <p:cNvPr id="7" name="Shape 4"/>
-          <p:cNvSpPr/>
-          <p:nvPr/>
-        </p:nvSpPr>
-        <p:spPr>
-          <a:xfrm>
-            <a:off x="8229600" y="4818888"/>
-            <a:ext cx="211226" cy="70409"/>
-          </a:xfrm>
-          <a:prstGeom prst="roundRect">
-            <a:avLst>
-              <a:gd name="adj" fmla="val 42857"/>
-            </a:avLst>
-          </a:prstGeom>
-          <a:solidFill>
-            <a:srgbClr val="7A5AA8"/>
-          </a:solidFill>
-          <a:ln w="12700">
-            <a:solidFill>
-              <a:srgbClr val="7A5AA8"/>
-            </a:solidFill>
-            <a:prstDash val="solid"/>
-          </a:ln>
-        </p:spPr>
-      </p:sp>
-      <p:sp>
-        <p:nvSpPr>
-          <p:cNvPr id="8" name="Shape 5"/>
-          <p:cNvSpPr/>
-          <p:nvPr/>
-        </p:nvSpPr>
-        <p:spPr>
-          <a:xfrm>
-            <a:off x="8279892" y="4728362"/>
-            <a:ext cx="211226" cy="70409"/>
-          </a:xfrm>
-          <a:prstGeom prst="roundRect">
-            <a:avLst>
-              <a:gd name="adj" fmla="val 42857"/>
-            </a:avLst>
-          </a:prstGeom>
-          <a:solidFill>
-            <a:srgbClr val="3B1F5E"/>
-          </a:solidFill>
-          <a:ln w="12700">
-            <a:solidFill>
-              <a:srgbClr val="3B1F5E"/>
-            </a:solidFill>
-            <a:prstDash val="solid"/>
-          </a:ln>
-        </p:spPr>
-      </p:sp>
-      <p:sp>
-        <p:nvSpPr>
-          <p:cNvPr id="9" name="Shape 6"/>
-          <p:cNvSpPr/>
-          <p:nvPr/>
-        </p:nvSpPr>
-        <p:spPr>
-          <a:xfrm>
-            <a:off x="8330184" y="4637837"/>
-            <a:ext cx="211226" cy="70409"/>
-          </a:xfrm>
-          <a:prstGeom prst="roundRect">
-            <a:avLst>
-              <a:gd name="adj" fmla="val 42857"/>
-            </a:avLst>
-          </a:prstGeom>
-          <a:solidFill>
-            <a:srgbClr val="3B1F5E"/>
-          </a:solidFill>
-          <a:ln w="12700">
-            <a:solidFill>
-              <a:srgbClr val="3B1F5E"/>
-            </a:solidFill>
-            <a:prstDash val="solid"/>
-          </a:ln>
-        </p:spPr>
-      </p:sp>
-      <p:sp>
-        <p:nvSpPr>
-          <p:cNvPr id="10" name="Shape 7"/>
-          <p:cNvSpPr/>
-          <p:nvPr/>
-        </p:nvSpPr>
-        <p:spPr>
-          <a:xfrm>
-            <a:off x="8541410" y="4839005"/>
-            <a:ext cx="65380" cy="65380"/>
-          </a:xfrm>
-          <a:prstGeom prst="ellipse">
-            <a:avLst/>
-          </a:prstGeom>
-          <a:solidFill>
-            <a:srgbClr val="FFC83D"/>
-          </a:solidFill>
-          <a:ln w="12700">
-            <a:solidFill>
-              <a:srgbClr val="FFC83D"/>
-            </a:solidFill>
-            <a:prstDash val="solid"/>
-          </a:ln>
-        </p:spPr>
       </p:sp>
     </p:spTree>
   </p:cSld>
@@ -2532,13 +2410,6 @@
 <file path=ppt/slides/slide3.xml><?xml version="1.0" encoding="utf-8"?>
 <p:sld xmlns:a="http://schemas.openxmlformats.org/drawingml/2006/main" xmlns:r="http://schemas.openxmlformats.org/officeDocument/2006/relationships" xmlns:p="http://schemas.openxmlformats.org/presentationml/2006/main">
   <p:cSld name="Slide 3">
-    <p:bg>
-      <p:bgPr>
-        <a:solidFill>
-          <a:srgbClr val="FFFFFF"/>
-        </a:solidFill>
-      </p:bgPr>
-    </p:bg>
     <p:spTree>
       <p:nvGrpSpPr>
         <p:cNvPr id="1" name=""/>
@@ -2588,7 +2459,7 @@
                 <a:ea typeface="Arial" pitchFamily="34" charset="-122"/>
                 <a:cs typeface="Arial" pitchFamily="34" charset="-120"/>
               </a:rPr>
-              <a:t>Saídas do mês por categoria</a:t>
+              <a:t>Saídas de agosto por categoria</a:t>
             </a:r>
             <a:endParaRPr lang="en-US" sz="2400" dirty="0"/>
           </a:p>
@@ -2627,7 +2498,7 @@
                 <a:ea typeface="Arial" pitchFamily="34" charset="-122"/>
                 <a:cs typeface="Arial" pitchFamily="34" charset="-120"/>
               </a:rPr>
-              <a:t>Caixa do escritório (09), aba Painel. Total pago ou provisionado em setembro: R$ 20.179.</a:t>
+              <a:t>Caixa do escritório (09), aba Painel "Para onde foi o dinheiro". Total pago em agosto: R$ 21.897.</a:t>
             </a:r>
             <a:endParaRPr lang="en-US" sz="1200" dirty="0"/>
           </a:p>
@@ -2649,17 +2520,17 @@
         </p:nvGraphicFramePr>
         <p:xfrm>
           <a:off x="457200" y="1463040"/>
-          <a:ext cx="4480560" cy="914400"/>
+          <a:ext cx="4846320" cy="914400"/>
         </p:xfrm>
         <a:graphic>
           <a:graphicData uri="http://schemas.openxmlformats.org/drawingml/2006/table">
             <a:tbl>
               <a:tblPr/>
               <a:tblGrid>
-                <a:gridCol w="3200400"/>
-                <a:gridCol w="1280160"/>
+                <a:gridCol w="3749040"/>
+                <a:gridCol w="1097280"/>
               </a:tblGrid>
-              <a:tr h="256032">
+              <a:tr h="224028">
                 <a:tc>
                   <a:txBody>
                     <a:bodyPr/>
@@ -2669,7 +2540,7 @@
                         <a:buNone/>
                       </a:pPr>
                       <a:r>
-                        <a:rPr lang="en-US" sz="950" b="1" dirty="0">
+                        <a:rPr lang="en-US" sz="900" b="1" dirty="0">
                           <a:solidFill>
                             <a:srgbClr val="FFFFFF"/>
                           </a:solidFill>
@@ -2679,7 +2550,7 @@
                         </a:rPr>
                         <a:t>Categoria</a:t>
                       </a:r>
-                      <a:endParaRPr lang="en-US" sz="950" dirty="0">
+                      <a:endParaRPr lang="en-US" sz="900" dirty="0">
                         <a:latin typeface="Arial" charset="0"/>
                         <a:ea typeface="Arial" charset="0"/>
                         <a:cs typeface="Arial" charset="0"/>
@@ -2737,7 +2608,7 @@
                         <a:buNone/>
                       </a:pPr>
                       <a:r>
-                        <a:rPr lang="en-US" sz="950" b="1" dirty="0">
+                        <a:rPr lang="en-US" sz="900" b="1" dirty="0">
                           <a:solidFill>
                             <a:srgbClr val="FFFFFF"/>
                           </a:solidFill>
@@ -2745,9 +2616,9 @@
                           <a:ea typeface="Arial" pitchFamily="34" charset="-122"/>
                           <a:cs typeface="Arial" pitchFamily="34" charset="-120"/>
                         </a:rPr>
-                        <a:t>Setembro (R$)</a:t>
+                        <a:t>Agosto (R$)</a:t>
                       </a:r>
-                      <a:endParaRPr lang="en-US" sz="950" dirty="0">
+                      <a:endParaRPr lang="en-US" sz="900" dirty="0">
                         <a:latin typeface="Arial" charset="0"/>
                         <a:ea typeface="Arial" charset="0"/>
                         <a:cs typeface="Arial" charset="0"/>
@@ -2797,7 +2668,7 @@
                   </a:tcPr>
                 </a:tc>
               </a:tr>
-              <a:tr h="256032">
+              <a:tr h="224028">
                 <a:tc>
                   <a:txBody>
                     <a:bodyPr/>
@@ -2807,7 +2678,7 @@
                         <a:buNone/>
                       </a:pPr>
                       <a:r>
-                        <a:rPr lang="en-US" sz="950" dirty="0">
+                        <a:rPr lang="en-US" sz="900" dirty="0">
                           <a:solidFill>
                             <a:srgbClr val="1F1235"/>
                           </a:solidFill>
@@ -2817,7 +2688,7 @@
                         </a:rPr>
                         <a:t>Pró-labore dos sócios (2 × R$ 6.000)</a:t>
                       </a:r>
-                      <a:endParaRPr lang="en-US" sz="950" dirty="0">
+                      <a:endParaRPr lang="en-US" sz="900" dirty="0">
                         <a:latin typeface="Arial" charset="0"/>
                         <a:ea typeface="Arial" charset="0"/>
                         <a:cs typeface="Arial" charset="0"/>
@@ -2875,7 +2746,7 @@
                         <a:buNone/>
                       </a:pPr>
                       <a:r>
-                        <a:rPr lang="en-US" sz="950" dirty="0">
+                        <a:rPr lang="en-US" sz="900" dirty="0">
                           <a:solidFill>
                             <a:srgbClr val="1F1235"/>
                           </a:solidFill>
@@ -2885,7 +2756,7 @@
                         </a:rPr>
                         <a:t>12.000</a:t>
                       </a:r>
-                      <a:endParaRPr lang="en-US" sz="950" dirty="0">
+                      <a:endParaRPr lang="en-US" sz="900" dirty="0">
                         <a:latin typeface="Arial" charset="0"/>
                         <a:ea typeface="Arial" charset="0"/>
                         <a:cs typeface="Arial" charset="0"/>
@@ -2935,7 +2806,7 @@
                   </a:tcPr>
                 </a:tc>
               </a:tr>
-              <a:tr h="256032">
+              <a:tr h="224028">
                 <a:tc>
                   <a:txBody>
                     <a:bodyPr/>
@@ -2945,7 +2816,7 @@
                         <a:buNone/>
                       </a:pPr>
                       <a:r>
-                        <a:rPr lang="en-US" sz="950" dirty="0">
+                        <a:rPr lang="en-US" sz="900" dirty="0">
                           <a:solidFill>
                             <a:srgbClr val="1F1235"/>
                           </a:solidFill>
@@ -2955,7 +2826,7 @@
                         </a:rPr>
                         <a:t>Aluguel e condomínio</a:t>
                       </a:r>
-                      <a:endParaRPr lang="en-US" sz="950" dirty="0">
+                      <a:endParaRPr lang="en-US" sz="900" dirty="0">
                         <a:latin typeface="Arial" charset="0"/>
                         <a:ea typeface="Arial" charset="0"/>
                         <a:cs typeface="Arial" charset="0"/>
@@ -3013,7 +2884,7 @@
                         <a:buNone/>
                       </a:pPr>
                       <a:r>
-                        <a:rPr lang="en-US" sz="950" dirty="0">
+                        <a:rPr lang="en-US" sz="900" dirty="0">
                           <a:solidFill>
                             <a:srgbClr val="1F1235"/>
                           </a:solidFill>
@@ -3023,7 +2894,7 @@
                         </a:rPr>
                         <a:t>2.800</a:t>
                       </a:r>
-                      <a:endParaRPr lang="en-US" sz="950" dirty="0">
+                      <a:endParaRPr lang="en-US" sz="900" dirty="0">
                         <a:latin typeface="Arial" charset="0"/>
                         <a:ea typeface="Arial" charset="0"/>
                         <a:cs typeface="Arial" charset="0"/>
@@ -3073,7 +2944,7 @@
                   </a:tcPr>
                 </a:tc>
               </a:tr>
-              <a:tr h="256032">
+              <a:tr h="224028">
                 <a:tc>
                   <a:txBody>
                     <a:bodyPr/>
@@ -3083,7 +2954,7 @@
                         <a:buNone/>
                       </a:pPr>
                       <a:r>
-                        <a:rPr lang="en-US" sz="950" dirty="0">
+                        <a:rPr lang="en-US" sz="900" dirty="0">
                           <a:solidFill>
                             <a:srgbClr val="1F1235"/>
                           </a:solidFill>
@@ -3091,9 +2962,9 @@
                           <a:ea typeface="Arial" pitchFamily="34" charset="-122"/>
                           <a:cs typeface="Arial" pitchFamily="34" charset="-120"/>
                         </a:rPr>
-                        <a:t>Impostos e taxas (6% da receita)</a:t>
+                        <a:t>Impostos e taxas (guia de 20/08: 8 % das entradas de julho)</a:t>
                       </a:r>
-                      <a:endParaRPr lang="en-US" sz="950" dirty="0">
+                      <a:endParaRPr lang="en-US" sz="900" dirty="0">
                         <a:latin typeface="Arial" charset="0"/>
                         <a:ea typeface="Arial" charset="0"/>
                         <a:cs typeface="Arial" charset="0"/>
@@ -3151,7 +3022,7 @@
                         <a:buNone/>
                       </a:pPr>
                       <a:r>
-                        <a:rPr lang="en-US" sz="950" dirty="0">
+                        <a:rPr lang="en-US" sz="900" dirty="0">
                           <a:solidFill>
                             <a:srgbClr val="1F1235"/>
                           </a:solidFill>
@@ -3159,9 +3030,9 @@
                           <a:ea typeface="Arial" pitchFamily="34" charset="-122"/>
                           <a:cs typeface="Arial" pitchFamily="34" charset="-120"/>
                         </a:rPr>
-                        <a:t>1.764</a:t>
+                        <a:t>2.357</a:t>
                       </a:r>
-                      <a:endParaRPr lang="en-US" sz="950" dirty="0">
+                      <a:endParaRPr lang="en-US" sz="900" dirty="0">
                         <a:latin typeface="Arial" charset="0"/>
                         <a:ea typeface="Arial" charset="0"/>
                         <a:cs typeface="Arial" charset="0"/>
@@ -3211,7 +3082,7 @@
                   </a:tcPr>
                 </a:tc>
               </a:tr>
-              <a:tr h="256032">
+              <a:tr h="224028">
                 <a:tc>
                   <a:txBody>
                     <a:bodyPr/>
@@ -3221,7 +3092,7 @@
                         <a:buNone/>
                       </a:pPr>
                       <a:r>
-                        <a:rPr lang="en-US" sz="950" dirty="0">
+                        <a:rPr lang="en-US" sz="900" dirty="0">
                           <a:solidFill>
                             <a:srgbClr val="1F1235"/>
                           </a:solidFill>
@@ -3231,7 +3102,7 @@
                         </a:rPr>
                         <a:t>Estagiária (bolsa)</a:t>
                       </a:r>
-                      <a:endParaRPr lang="en-US" sz="950" dirty="0">
+                      <a:endParaRPr lang="en-US" sz="900" dirty="0">
                         <a:latin typeface="Arial" charset="0"/>
                         <a:ea typeface="Arial" charset="0"/>
                         <a:cs typeface="Arial" charset="0"/>
@@ -3289,7 +3160,7 @@
                         <a:buNone/>
                       </a:pPr>
                       <a:r>
-                        <a:rPr lang="en-US" sz="950" dirty="0">
+                        <a:rPr lang="en-US" sz="900" dirty="0">
                           <a:solidFill>
                             <a:srgbClr val="1F1235"/>
                           </a:solidFill>
@@ -3299,7 +3170,7 @@
                         </a:rPr>
                         <a:t>1.400</a:t>
                       </a:r>
-                      <a:endParaRPr lang="en-US" sz="950" dirty="0">
+                      <a:endParaRPr lang="en-US" sz="900" dirty="0">
                         <a:latin typeface="Arial" charset="0"/>
                         <a:ea typeface="Arial" charset="0"/>
                         <a:cs typeface="Arial" charset="0"/>
@@ -3349,7 +3220,7 @@
                   </a:tcPr>
                 </a:tc>
               </a:tr>
-              <a:tr h="256032">
+              <a:tr h="224028">
                 <a:tc>
                   <a:txBody>
                     <a:bodyPr/>
@@ -3359,7 +3230,7 @@
                         <a:buNone/>
                       </a:pPr>
                       <a:r>
-                        <a:rPr lang="en-US" sz="950" dirty="0">
+                        <a:rPr lang="en-US" sz="900" dirty="0">
                           <a:solidFill>
                             <a:srgbClr val="1F1235"/>
                           </a:solidFill>
@@ -3369,7 +3240,7 @@
                         </a:rPr>
                         <a:t>Contador</a:t>
                       </a:r>
-                      <a:endParaRPr lang="en-US" sz="950" dirty="0">
+                      <a:endParaRPr lang="en-US" sz="900" dirty="0">
                         <a:latin typeface="Arial" charset="0"/>
                         <a:ea typeface="Arial" charset="0"/>
                         <a:cs typeface="Arial" charset="0"/>
@@ -3427,7 +3298,7 @@
                         <a:buNone/>
                       </a:pPr>
                       <a:r>
-                        <a:rPr lang="en-US" sz="950" dirty="0">
+                        <a:rPr lang="en-US" sz="900" dirty="0">
                           <a:solidFill>
                             <a:srgbClr val="1F1235"/>
                           </a:solidFill>
@@ -3437,7 +3308,7 @@
                         </a:rPr>
                         <a:t>600</a:t>
                       </a:r>
-                      <a:endParaRPr lang="en-US" sz="950" dirty="0">
+                      <a:endParaRPr lang="en-US" sz="900" dirty="0">
                         <a:latin typeface="Arial" charset="0"/>
                         <a:ea typeface="Arial" charset="0"/>
                         <a:cs typeface="Arial" charset="0"/>
@@ -3487,7 +3358,7 @@
                   </a:tcPr>
                 </a:tc>
               </a:tr>
-              <a:tr h="256032">
+              <a:tr h="224028">
                 <a:tc>
                   <a:txBody>
                     <a:bodyPr/>
@@ -3497,7 +3368,7 @@
                         <a:buNone/>
                       </a:pPr>
                       <a:r>
-                        <a:rPr lang="en-US" sz="950" dirty="0">
+                        <a:rPr lang="en-US" sz="900" dirty="0">
                           <a:solidFill>
                             <a:srgbClr val="1F1235"/>
                           </a:solidFill>
@@ -3505,9 +3376,9 @@
                           <a:ea typeface="Arial" pitchFamily="34" charset="-122"/>
                           <a:cs typeface="Arial" pitchFamily="34" charset="-120"/>
                         </a:rPr>
-                        <a:t>Sistemas e assinaturas</a:t>
+                        <a:t>Outras saídas (despesa pessoal de sócio, a acertar na 11)</a:t>
                       </a:r>
-                      <a:endParaRPr lang="en-US" sz="950" dirty="0">
+                      <a:endParaRPr lang="en-US" sz="900" dirty="0">
                         <a:latin typeface="Arial" charset="0"/>
                         <a:ea typeface="Arial" charset="0"/>
                         <a:cs typeface="Arial" charset="0"/>
@@ -3565,7 +3436,7 @@
                         <a:buNone/>
                       </a:pPr>
                       <a:r>
-                        <a:rPr lang="en-US" sz="950" dirty="0">
+                        <a:rPr lang="en-US" sz="900" dirty="0">
                           <a:solidFill>
                             <a:srgbClr val="1F1235"/>
                           </a:solidFill>
@@ -3573,9 +3444,9 @@
                           <a:ea typeface="Arial" pitchFamily="34" charset="-122"/>
                           <a:cs typeface="Arial" pitchFamily="34" charset="-120"/>
                         </a:rPr>
-                        <a:t>450</a:t>
+                        <a:t>480</a:t>
                       </a:r>
-                      <a:endParaRPr lang="en-US" sz="950" dirty="0">
+                      <a:endParaRPr lang="en-US" sz="900" dirty="0">
                         <a:latin typeface="Arial" charset="0"/>
                         <a:ea typeface="Arial" charset="0"/>
                         <a:cs typeface="Arial" charset="0"/>
@@ -3625,7 +3496,7 @@
                   </a:tcPr>
                 </a:tc>
               </a:tr>
-              <a:tr h="256032">
+              <a:tr h="224028">
                 <a:tc>
                   <a:txBody>
                     <a:bodyPr/>
@@ -3635,7 +3506,7 @@
                         <a:buNone/>
                       </a:pPr>
                       <a:r>
-                        <a:rPr lang="en-US" sz="950" dirty="0">
+                        <a:rPr lang="en-US" sz="900" dirty="0">
                           <a:solidFill>
                             <a:srgbClr val="1F1235"/>
                           </a:solidFill>
@@ -3643,9 +3514,9 @@
                           <a:ea typeface="Arial" pitchFamily="34" charset="-122"/>
                           <a:cs typeface="Arial" pitchFamily="34" charset="-120"/>
                         </a:rPr>
-                        <a:t>Marketing e site</a:t>
+                        <a:t>Sistemas e assinaturas</a:t>
                       </a:r>
-                      <a:endParaRPr lang="en-US" sz="950" dirty="0">
+                      <a:endParaRPr lang="en-US" sz="900" dirty="0">
                         <a:latin typeface="Arial" charset="0"/>
                         <a:ea typeface="Arial" charset="0"/>
                         <a:cs typeface="Arial" charset="0"/>
@@ -3703,7 +3574,7 @@
                         <a:buNone/>
                       </a:pPr>
                       <a:r>
-                        <a:rPr lang="en-US" sz="950" dirty="0">
+                        <a:rPr lang="en-US" sz="900" dirty="0">
                           <a:solidFill>
                             <a:srgbClr val="1F1235"/>
                           </a:solidFill>
@@ -3711,9 +3582,9 @@
                           <a:ea typeface="Arial" pitchFamily="34" charset="-122"/>
                           <a:cs typeface="Arial" pitchFamily="34" charset="-120"/>
                         </a:rPr>
-                        <a:t>400</a:t>
+                        <a:t>450</a:t>
                       </a:r>
-                      <a:endParaRPr lang="en-US" sz="950" dirty="0">
+                      <a:endParaRPr lang="en-US" sz="900" dirty="0">
                         <a:latin typeface="Arial" charset="0"/>
                         <a:ea typeface="Arial" charset="0"/>
                         <a:cs typeface="Arial" charset="0"/>
@@ -3763,7 +3634,7 @@
                   </a:tcPr>
                 </a:tc>
               </a:tr>
-              <a:tr h="256032">
+              <a:tr h="224028">
                 <a:tc>
                   <a:txBody>
                     <a:bodyPr/>
@@ -3773,7 +3644,7 @@
                         <a:buNone/>
                       </a:pPr>
                       <a:r>
-                        <a:rPr lang="en-US" sz="950" dirty="0">
+                        <a:rPr lang="en-US" sz="900" dirty="0">
                           <a:solidFill>
                             <a:srgbClr val="1F1235"/>
                           </a:solidFill>
@@ -3781,9 +3652,9 @@
                           <a:ea typeface="Arial" pitchFamily="34" charset="-122"/>
                           <a:cs typeface="Arial" pitchFamily="34" charset="-120"/>
                         </a:rPr>
-                        <a:t>Material, correio e outros</a:t>
+                        <a:t>Marketing e site</a:t>
                       </a:r>
-                      <a:endParaRPr lang="en-US" sz="950" dirty="0">
+                      <a:endParaRPr lang="en-US" sz="900" dirty="0">
                         <a:latin typeface="Arial" charset="0"/>
                         <a:ea typeface="Arial" charset="0"/>
                         <a:cs typeface="Arial" charset="0"/>
@@ -3841,7 +3712,7 @@
                         <a:buNone/>
                       </a:pPr>
                       <a:r>
-                        <a:rPr lang="en-US" sz="950" dirty="0">
+                        <a:rPr lang="en-US" sz="900" dirty="0">
                           <a:solidFill>
                             <a:srgbClr val="1F1235"/>
                           </a:solidFill>
@@ -3849,9 +3720,9 @@
                           <a:ea typeface="Arial" pitchFamily="34" charset="-122"/>
                           <a:cs typeface="Arial" pitchFamily="34" charset="-120"/>
                         </a:rPr>
-                        <a:t>395</a:t>
+                        <a:t>400</a:t>
                       </a:r>
-                      <a:endParaRPr lang="en-US" sz="950" dirty="0">
+                      <a:endParaRPr lang="en-US" sz="900" dirty="0">
                         <a:latin typeface="Arial" charset="0"/>
                         <a:ea typeface="Arial" charset="0"/>
                         <a:cs typeface="Arial" charset="0"/>
@@ -3901,7 +3772,7 @@
                   </a:tcPr>
                 </a:tc>
               </a:tr>
-              <a:tr h="256032">
+              <a:tr h="224028">
                 <a:tc>
                   <a:txBody>
                     <a:bodyPr/>
@@ -3911,7 +3782,7 @@
                         <a:buNone/>
                       </a:pPr>
                       <a:r>
-                        <a:rPr lang="en-US" sz="950" dirty="0">
+                        <a:rPr lang="en-US" sz="900" dirty="0">
                           <a:solidFill>
                             <a:srgbClr val="1F1235"/>
                           </a:solidFill>
@@ -3919,9 +3790,9 @@
                           <a:ea typeface="Arial" pitchFamily="34" charset="-122"/>
                           <a:cs typeface="Arial" pitchFamily="34" charset="-120"/>
                         </a:rPr>
-                        <a:t>Telefone e internet</a:t>
+                        <a:t>Custas e despesas de processo</a:t>
                       </a:r>
-                      <a:endParaRPr lang="en-US" sz="950" dirty="0">
+                      <a:endParaRPr lang="en-US" sz="900" dirty="0">
                         <a:latin typeface="Arial" charset="0"/>
                         <a:ea typeface="Arial" charset="0"/>
                         <a:cs typeface="Arial" charset="0"/>
@@ -3979,7 +3850,7 @@
                         <a:buNone/>
                       </a:pPr>
                       <a:r>
-                        <a:rPr lang="en-US" sz="950" dirty="0">
+                        <a:rPr lang="en-US" sz="900" dirty="0">
                           <a:solidFill>
                             <a:srgbClr val="1F1235"/>
                           </a:solidFill>
@@ -3987,9 +3858,9 @@
                           <a:ea typeface="Arial" pitchFamily="34" charset="-122"/>
                           <a:cs typeface="Arial" pitchFamily="34" charset="-120"/>
                         </a:rPr>
-                        <a:t>220</a:t>
+                        <a:t>380</a:t>
                       </a:r>
-                      <a:endParaRPr lang="en-US" sz="950" dirty="0">
+                      <a:endParaRPr lang="en-US" sz="900" dirty="0">
                         <a:latin typeface="Arial" charset="0"/>
                         <a:ea typeface="Arial" charset="0"/>
                         <a:cs typeface="Arial" charset="0"/>
@@ -4039,7 +3910,7 @@
                   </a:tcPr>
                 </a:tc>
               </a:tr>
-              <a:tr h="256032">
+              <a:tr h="224028">
                 <a:tc>
                   <a:txBody>
                     <a:bodyPr/>
@@ -4049,7 +3920,7 @@
                         <a:buNone/>
                       </a:pPr>
                       <a:r>
-                        <a:rPr lang="en-US" sz="950" dirty="0">
+                        <a:rPr lang="en-US" sz="900" dirty="0">
                           <a:solidFill>
                             <a:srgbClr val="1F1235"/>
                           </a:solidFill>
@@ -4057,9 +3928,9 @@
                           <a:ea typeface="Arial" pitchFamily="34" charset="-122"/>
                           <a:cs typeface="Arial" pitchFamily="34" charset="-120"/>
                         </a:rPr>
-                        <a:t>Anuidades OAB e cursos</a:t>
+                        <a:t>Material, correio e outros</a:t>
                       </a:r>
-                      <a:endParaRPr lang="en-US" sz="950" dirty="0">
+                      <a:endParaRPr lang="en-US" sz="900" dirty="0">
                         <a:latin typeface="Arial" charset="0"/>
                         <a:ea typeface="Arial" charset="0"/>
                         <a:cs typeface="Arial" charset="0"/>
@@ -4117,7 +3988,7 @@
                         <a:buNone/>
                       </a:pPr>
                       <a:r>
-                        <a:rPr lang="en-US" sz="950" dirty="0">
+                        <a:rPr lang="en-US" sz="900" dirty="0">
                           <a:solidFill>
                             <a:srgbClr val="1F1235"/>
                           </a:solidFill>
@@ -4125,9 +3996,9 @@
                           <a:ea typeface="Arial" pitchFamily="34" charset="-122"/>
                           <a:cs typeface="Arial" pitchFamily="34" charset="-120"/>
                         </a:rPr>
-                        <a:t>150</a:t>
+                        <a:t>380</a:t>
                       </a:r>
-                      <a:endParaRPr lang="en-US" sz="950" dirty="0">
+                      <a:endParaRPr lang="en-US" sz="900" dirty="0">
                         <a:latin typeface="Arial" charset="0"/>
                         <a:ea typeface="Arial" charset="0"/>
                         <a:cs typeface="Arial" charset="0"/>
@@ -4177,7 +4048,7 @@
                   </a:tcPr>
                 </a:tc>
               </a:tr>
-              <a:tr h="256032">
+              <a:tr h="224028">
                 <a:tc>
                   <a:txBody>
                     <a:bodyPr/>
@@ -4187,7 +4058,7 @@
                         <a:buNone/>
                       </a:pPr>
                       <a:r>
-                        <a:rPr lang="en-US" sz="950" b="1" dirty="0">
+                        <a:rPr lang="en-US" sz="900" dirty="0">
                           <a:solidFill>
                             <a:srgbClr val="1F1235"/>
                           </a:solidFill>
@@ -4195,9 +4066,9 @@
                           <a:ea typeface="Arial" pitchFamily="34" charset="-122"/>
                           <a:cs typeface="Arial" pitchFamily="34" charset="-120"/>
                         </a:rPr>
-                        <a:t>Total</a:t>
+                        <a:t>Anuidades OAB e cursos</a:t>
                       </a:r>
-                      <a:endParaRPr lang="en-US" sz="950" dirty="0">
+                      <a:endParaRPr lang="en-US" sz="900" dirty="0">
                         <a:latin typeface="Arial" charset="0"/>
                         <a:ea typeface="Arial" charset="0"/>
                         <a:cs typeface="Arial" charset="0"/>
@@ -4255,7 +4126,7 @@
                         <a:buNone/>
                       </a:pPr>
                       <a:r>
-                        <a:rPr lang="en-US" sz="950" b="1" dirty="0">
+                        <a:rPr lang="en-US" sz="900" dirty="0">
                           <a:solidFill>
                             <a:srgbClr val="1F1235"/>
                           </a:solidFill>
@@ -4263,9 +4134,9 @@
                           <a:ea typeface="Arial" pitchFamily="34" charset="-122"/>
                           <a:cs typeface="Arial" pitchFamily="34" charset="-120"/>
                         </a:rPr>
-                        <a:t>20.179</a:t>
+                        <a:t>250</a:t>
                       </a:r>
-                      <a:endParaRPr lang="en-US" sz="950" dirty="0">
+                      <a:endParaRPr lang="en-US" sz="900" dirty="0">
                         <a:latin typeface="Arial" charset="0"/>
                         <a:ea typeface="Arial" charset="0"/>
                         <a:cs typeface="Arial" charset="0"/>
@@ -4311,6 +4182,420 @@
                     </a:lnB>
                     <a:solidFill>
                       <a:srgbClr val="F3EEFB"/>
+                    </a:solidFill>
+                  </a:tcPr>
+                </a:tc>
+              </a:tr>
+              <a:tr h="224028">
+                <a:tc>
+                  <a:txBody>
+                    <a:bodyPr/>
+                    <a:lstStyle/>
+                    <a:p>
+                      <a:pPr algn="l" indent="0" marL="0">
+                        <a:buNone/>
+                      </a:pPr>
+                      <a:r>
+                        <a:rPr lang="en-US" sz="900" dirty="0">
+                          <a:solidFill>
+                            <a:srgbClr val="1F1235"/>
+                          </a:solidFill>
+                          <a:latin typeface="Arial" pitchFamily="34" charset="0"/>
+                          <a:ea typeface="Arial" pitchFamily="34" charset="-122"/>
+                          <a:cs typeface="Arial" pitchFamily="34" charset="-120"/>
+                        </a:rPr>
+                        <a:t>Telefone e internet</a:t>
+                      </a:r>
+                      <a:endParaRPr lang="en-US" sz="900" dirty="0">
+                        <a:latin typeface="Arial" charset="0"/>
+                        <a:ea typeface="Arial" charset="0"/>
+                        <a:cs typeface="Arial" charset="0"/>
+                      </a:endParaRPr>
+                    </a:p>
+                  </a:txBody>
+                  <a:tcPr marL="54864" marR="54864" marT="54864" marB="54864" anchor="ctr">
+                    <a:lnL w="9525" cap="flat" cmpd="sng" algn="ctr">
+                      <a:solidFill>
+                        <a:srgbClr val="DCD2EC"/>
+                      </a:solidFill>
+                      <a:prstDash val="solid"/>
+                      <a:round/>
+                      <a:headEnd type="none" w="med" len="med"/>
+                      <a:tailEnd type="none" w="med" len="med"/>
+                    </a:lnL>
+                    <a:lnR w="9525" cap="flat" cmpd="sng" algn="ctr">
+                      <a:solidFill>
+                        <a:srgbClr val="DCD2EC"/>
+                      </a:solidFill>
+                      <a:prstDash val="solid"/>
+                      <a:round/>
+                      <a:headEnd type="none" w="med" len="med"/>
+                      <a:tailEnd type="none" w="med" len="med"/>
+                    </a:lnR>
+                    <a:lnT w="9525" cap="flat" cmpd="sng" algn="ctr">
+                      <a:solidFill>
+                        <a:srgbClr val="DCD2EC"/>
+                      </a:solidFill>
+                      <a:prstDash val="solid"/>
+                      <a:round/>
+                      <a:headEnd type="none" w="med" len="med"/>
+                      <a:tailEnd type="none" w="med" len="med"/>
+                    </a:lnT>
+                    <a:lnB w="9525" cap="flat" cmpd="sng" algn="ctr">
+                      <a:solidFill>
+                        <a:srgbClr val="DCD2EC"/>
+                      </a:solidFill>
+                      <a:prstDash val="solid"/>
+                      <a:round/>
+                      <a:headEnd type="none" w="med" len="med"/>
+                      <a:tailEnd type="none" w="med" len="med"/>
+                    </a:lnB>
+                    <a:solidFill>
+                      <a:srgbClr val="FFFFFF"/>
+                    </a:solidFill>
+                  </a:tcPr>
+                </a:tc>
+                <a:tc>
+                  <a:txBody>
+                    <a:bodyPr/>
+                    <a:lstStyle/>
+                    <a:p>
+                      <a:pPr algn="r" indent="0" marL="0">
+                        <a:buNone/>
+                      </a:pPr>
+                      <a:r>
+                        <a:rPr lang="en-US" sz="900" dirty="0">
+                          <a:solidFill>
+                            <a:srgbClr val="1F1235"/>
+                          </a:solidFill>
+                          <a:latin typeface="Arial" pitchFamily="34" charset="0"/>
+                          <a:ea typeface="Arial" pitchFamily="34" charset="-122"/>
+                          <a:cs typeface="Arial" pitchFamily="34" charset="-120"/>
+                        </a:rPr>
+                        <a:t>220</a:t>
+                      </a:r>
+                      <a:endParaRPr lang="en-US" sz="900" dirty="0">
+                        <a:latin typeface="Arial" charset="0"/>
+                        <a:ea typeface="Arial" charset="0"/>
+                        <a:cs typeface="Arial" charset="0"/>
+                      </a:endParaRPr>
+                    </a:p>
+                  </a:txBody>
+                  <a:tcPr marL="54864" marR="54864" marT="54864" marB="54864" anchor="ctr">
+                    <a:lnL w="9525" cap="flat" cmpd="sng" algn="ctr">
+                      <a:solidFill>
+                        <a:srgbClr val="DCD2EC"/>
+                      </a:solidFill>
+                      <a:prstDash val="solid"/>
+                      <a:round/>
+                      <a:headEnd type="none" w="med" len="med"/>
+                      <a:tailEnd type="none" w="med" len="med"/>
+                    </a:lnL>
+                    <a:lnR w="9525" cap="flat" cmpd="sng" algn="ctr">
+                      <a:solidFill>
+                        <a:srgbClr val="DCD2EC"/>
+                      </a:solidFill>
+                      <a:prstDash val="solid"/>
+                      <a:round/>
+                      <a:headEnd type="none" w="med" len="med"/>
+                      <a:tailEnd type="none" w="med" len="med"/>
+                    </a:lnR>
+                    <a:lnT w="9525" cap="flat" cmpd="sng" algn="ctr">
+                      <a:solidFill>
+                        <a:srgbClr val="DCD2EC"/>
+                      </a:solidFill>
+                      <a:prstDash val="solid"/>
+                      <a:round/>
+                      <a:headEnd type="none" w="med" len="med"/>
+                      <a:tailEnd type="none" w="med" len="med"/>
+                    </a:lnT>
+                    <a:lnB w="9525" cap="flat" cmpd="sng" algn="ctr">
+                      <a:solidFill>
+                        <a:srgbClr val="DCD2EC"/>
+                      </a:solidFill>
+                      <a:prstDash val="solid"/>
+                      <a:round/>
+                      <a:headEnd type="none" w="med" len="med"/>
+                      <a:tailEnd type="none" w="med" len="med"/>
+                    </a:lnB>
+                    <a:solidFill>
+                      <a:srgbClr val="FFFFFF"/>
+                    </a:solidFill>
+                  </a:tcPr>
+                </a:tc>
+              </a:tr>
+              <a:tr h="224028">
+                <a:tc>
+                  <a:txBody>
+                    <a:bodyPr/>
+                    <a:lstStyle/>
+                    <a:p>
+                      <a:pPr algn="l" indent="0" marL="0">
+                        <a:buNone/>
+                      </a:pPr>
+                      <a:r>
+                        <a:rPr lang="en-US" sz="900" dirty="0">
+                          <a:solidFill>
+                            <a:srgbClr val="1F1235"/>
+                          </a:solidFill>
+                          <a:latin typeface="Arial" pitchFamily="34" charset="0"/>
+                          <a:ea typeface="Arial" pitchFamily="34" charset="-122"/>
+                          <a:cs typeface="Arial" pitchFamily="34" charset="-120"/>
+                        </a:rPr>
+                        <a:t>Deslocamento e viagens</a:t>
+                      </a:r>
+                      <a:endParaRPr lang="en-US" sz="900" dirty="0">
+                        <a:latin typeface="Arial" charset="0"/>
+                        <a:ea typeface="Arial" charset="0"/>
+                        <a:cs typeface="Arial" charset="0"/>
+                      </a:endParaRPr>
+                    </a:p>
+                  </a:txBody>
+                  <a:tcPr marL="54864" marR="54864" marT="54864" marB="54864" anchor="ctr">
+                    <a:lnL w="9525" cap="flat" cmpd="sng" algn="ctr">
+                      <a:solidFill>
+                        <a:srgbClr val="DCD2EC"/>
+                      </a:solidFill>
+                      <a:prstDash val="solid"/>
+                      <a:round/>
+                      <a:headEnd type="none" w="med" len="med"/>
+                      <a:tailEnd type="none" w="med" len="med"/>
+                    </a:lnL>
+                    <a:lnR w="9525" cap="flat" cmpd="sng" algn="ctr">
+                      <a:solidFill>
+                        <a:srgbClr val="DCD2EC"/>
+                      </a:solidFill>
+                      <a:prstDash val="solid"/>
+                      <a:round/>
+                      <a:headEnd type="none" w="med" len="med"/>
+                      <a:tailEnd type="none" w="med" len="med"/>
+                    </a:lnR>
+                    <a:lnT w="9525" cap="flat" cmpd="sng" algn="ctr">
+                      <a:solidFill>
+                        <a:srgbClr val="DCD2EC"/>
+                      </a:solidFill>
+                      <a:prstDash val="solid"/>
+                      <a:round/>
+                      <a:headEnd type="none" w="med" len="med"/>
+                      <a:tailEnd type="none" w="med" len="med"/>
+                    </a:lnT>
+                    <a:lnB w="9525" cap="flat" cmpd="sng" algn="ctr">
+                      <a:solidFill>
+                        <a:srgbClr val="DCD2EC"/>
+                      </a:solidFill>
+                      <a:prstDash val="solid"/>
+                      <a:round/>
+                      <a:headEnd type="none" w="med" len="med"/>
+                      <a:tailEnd type="none" w="med" len="med"/>
+                    </a:lnB>
+                    <a:solidFill>
+                      <a:srgbClr val="F3EEFB"/>
+                    </a:solidFill>
+                  </a:tcPr>
+                </a:tc>
+                <a:tc>
+                  <a:txBody>
+                    <a:bodyPr/>
+                    <a:lstStyle/>
+                    <a:p>
+                      <a:pPr algn="r" indent="0" marL="0">
+                        <a:buNone/>
+                      </a:pPr>
+                      <a:r>
+                        <a:rPr lang="en-US" sz="900" dirty="0">
+                          <a:solidFill>
+                            <a:srgbClr val="1F1235"/>
+                          </a:solidFill>
+                          <a:latin typeface="Arial" pitchFamily="34" charset="0"/>
+                          <a:ea typeface="Arial" pitchFamily="34" charset="-122"/>
+                          <a:cs typeface="Arial" pitchFamily="34" charset="-120"/>
+                        </a:rPr>
+                        <a:t>180</a:t>
+                      </a:r>
+                      <a:endParaRPr lang="en-US" sz="900" dirty="0">
+                        <a:latin typeface="Arial" charset="0"/>
+                        <a:ea typeface="Arial" charset="0"/>
+                        <a:cs typeface="Arial" charset="0"/>
+                      </a:endParaRPr>
+                    </a:p>
+                  </a:txBody>
+                  <a:tcPr marL="54864" marR="54864" marT="54864" marB="54864" anchor="ctr">
+                    <a:lnL w="9525" cap="flat" cmpd="sng" algn="ctr">
+                      <a:solidFill>
+                        <a:srgbClr val="DCD2EC"/>
+                      </a:solidFill>
+                      <a:prstDash val="solid"/>
+                      <a:round/>
+                      <a:headEnd type="none" w="med" len="med"/>
+                      <a:tailEnd type="none" w="med" len="med"/>
+                    </a:lnL>
+                    <a:lnR w="9525" cap="flat" cmpd="sng" algn="ctr">
+                      <a:solidFill>
+                        <a:srgbClr val="DCD2EC"/>
+                      </a:solidFill>
+                      <a:prstDash val="solid"/>
+                      <a:round/>
+                      <a:headEnd type="none" w="med" len="med"/>
+                      <a:tailEnd type="none" w="med" len="med"/>
+                    </a:lnR>
+                    <a:lnT w="9525" cap="flat" cmpd="sng" algn="ctr">
+                      <a:solidFill>
+                        <a:srgbClr val="DCD2EC"/>
+                      </a:solidFill>
+                      <a:prstDash val="solid"/>
+                      <a:round/>
+                      <a:headEnd type="none" w="med" len="med"/>
+                      <a:tailEnd type="none" w="med" len="med"/>
+                    </a:lnT>
+                    <a:lnB w="9525" cap="flat" cmpd="sng" algn="ctr">
+                      <a:solidFill>
+                        <a:srgbClr val="DCD2EC"/>
+                      </a:solidFill>
+                      <a:prstDash val="solid"/>
+                      <a:round/>
+                      <a:headEnd type="none" w="med" len="med"/>
+                      <a:tailEnd type="none" w="med" len="med"/>
+                    </a:lnB>
+                    <a:solidFill>
+                      <a:srgbClr val="F3EEFB"/>
+                    </a:solidFill>
+                  </a:tcPr>
+                </a:tc>
+              </a:tr>
+              <a:tr h="224028">
+                <a:tc>
+                  <a:txBody>
+                    <a:bodyPr/>
+                    <a:lstStyle/>
+                    <a:p>
+                      <a:pPr algn="l" indent="0" marL="0">
+                        <a:buNone/>
+                      </a:pPr>
+                      <a:r>
+                        <a:rPr lang="en-US" sz="900" b="1" dirty="0">
+                          <a:solidFill>
+                            <a:srgbClr val="1F1235"/>
+                          </a:solidFill>
+                          <a:latin typeface="Arial" pitchFamily="34" charset="0"/>
+                          <a:ea typeface="Arial" pitchFamily="34" charset="-122"/>
+                          <a:cs typeface="Arial" pitchFamily="34" charset="-120"/>
+                        </a:rPr>
+                        <a:t>Total</a:t>
+                      </a:r>
+                      <a:endParaRPr lang="en-US" sz="900" dirty="0">
+                        <a:latin typeface="Arial" charset="0"/>
+                        <a:ea typeface="Arial" charset="0"/>
+                        <a:cs typeface="Arial" charset="0"/>
+                      </a:endParaRPr>
+                    </a:p>
+                  </a:txBody>
+                  <a:tcPr marL="54864" marR="54864" marT="54864" marB="54864" anchor="ctr">
+                    <a:lnL w="9525" cap="flat" cmpd="sng" algn="ctr">
+                      <a:solidFill>
+                        <a:srgbClr val="DCD2EC"/>
+                      </a:solidFill>
+                      <a:prstDash val="solid"/>
+                      <a:round/>
+                      <a:headEnd type="none" w="med" len="med"/>
+                      <a:tailEnd type="none" w="med" len="med"/>
+                    </a:lnL>
+                    <a:lnR w="9525" cap="flat" cmpd="sng" algn="ctr">
+                      <a:solidFill>
+                        <a:srgbClr val="DCD2EC"/>
+                      </a:solidFill>
+                      <a:prstDash val="solid"/>
+                      <a:round/>
+                      <a:headEnd type="none" w="med" len="med"/>
+                      <a:tailEnd type="none" w="med" len="med"/>
+                    </a:lnR>
+                    <a:lnT w="9525" cap="flat" cmpd="sng" algn="ctr">
+                      <a:solidFill>
+                        <a:srgbClr val="DCD2EC"/>
+                      </a:solidFill>
+                      <a:prstDash val="solid"/>
+                      <a:round/>
+                      <a:headEnd type="none" w="med" len="med"/>
+                      <a:tailEnd type="none" w="med" len="med"/>
+                    </a:lnT>
+                    <a:lnB w="9525" cap="flat" cmpd="sng" algn="ctr">
+                      <a:solidFill>
+                        <a:srgbClr val="DCD2EC"/>
+                      </a:solidFill>
+                      <a:prstDash val="solid"/>
+                      <a:round/>
+                      <a:headEnd type="none" w="med" len="med"/>
+                      <a:tailEnd type="none" w="med" len="med"/>
+                    </a:lnB>
+                    <a:solidFill>
+                      <a:srgbClr val="FFFFFF"/>
+                    </a:solidFill>
+                  </a:tcPr>
+                </a:tc>
+                <a:tc>
+                  <a:txBody>
+                    <a:bodyPr/>
+                    <a:lstStyle/>
+                    <a:p>
+                      <a:pPr algn="r" indent="0" marL="0">
+                        <a:buNone/>
+                      </a:pPr>
+                      <a:r>
+                        <a:rPr lang="en-US" sz="900" b="1" dirty="0">
+                          <a:solidFill>
+                            <a:srgbClr val="1F1235"/>
+                          </a:solidFill>
+                          <a:latin typeface="Arial" pitchFamily="34" charset="0"/>
+                          <a:ea typeface="Arial" pitchFamily="34" charset="-122"/>
+                          <a:cs typeface="Arial" pitchFamily="34" charset="-120"/>
+                        </a:rPr>
+                        <a:t>21.897</a:t>
+                      </a:r>
+                      <a:endParaRPr lang="en-US" sz="900" dirty="0">
+                        <a:latin typeface="Arial" charset="0"/>
+                        <a:ea typeface="Arial" charset="0"/>
+                        <a:cs typeface="Arial" charset="0"/>
+                      </a:endParaRPr>
+                    </a:p>
+                  </a:txBody>
+                  <a:tcPr marL="54864" marR="54864" marT="54864" marB="54864" anchor="ctr">
+                    <a:lnL w="9525" cap="flat" cmpd="sng" algn="ctr">
+                      <a:solidFill>
+                        <a:srgbClr val="DCD2EC"/>
+                      </a:solidFill>
+                      <a:prstDash val="solid"/>
+                      <a:round/>
+                      <a:headEnd type="none" w="med" len="med"/>
+                      <a:tailEnd type="none" w="med" len="med"/>
+                    </a:lnL>
+                    <a:lnR w="9525" cap="flat" cmpd="sng" algn="ctr">
+                      <a:solidFill>
+                        <a:srgbClr val="DCD2EC"/>
+                      </a:solidFill>
+                      <a:prstDash val="solid"/>
+                      <a:round/>
+                      <a:headEnd type="none" w="med" len="med"/>
+                      <a:tailEnd type="none" w="med" len="med"/>
+                    </a:lnR>
+                    <a:lnT w="9525" cap="flat" cmpd="sng" algn="ctr">
+                      <a:solidFill>
+                        <a:srgbClr val="DCD2EC"/>
+                      </a:solidFill>
+                      <a:prstDash val="solid"/>
+                      <a:round/>
+                      <a:headEnd type="none" w="med" len="med"/>
+                      <a:tailEnd type="none" w="med" len="med"/>
+                    </a:lnT>
+                    <a:lnB w="9525" cap="flat" cmpd="sng" algn="ctr">
+                      <a:solidFill>
+                        <a:srgbClr val="DCD2EC"/>
+                      </a:solidFill>
+                      <a:prstDash val="solid"/>
+                      <a:round/>
+                      <a:headEnd type="none" w="med" len="med"/>
+                      <a:tailEnd type="none" w="med" len="med"/>
+                    </a:lnB>
+                    <a:solidFill>
+                      <a:srgbClr val="FFFFFF"/>
                     </a:solidFill>
                   </a:tcPr>
                 </a:tc>
@@ -4327,8 +4612,8 @@
         </p:nvSpPr>
         <p:spPr>
           <a:xfrm>
-            <a:off x="5669280" y="1508760"/>
-            <a:ext cx="3108960" cy="3017520"/>
+            <a:off x="5486400" y="1508760"/>
+            <a:ext cx="3291840" cy="3108960"/>
           </a:xfrm>
           <a:prstGeom prst="rect">
             <a:avLst/>
@@ -4347,7 +4632,7 @@
               <a:buNone/>
             </a:pPr>
             <a:r>
-              <a:rPr lang="en-US" sz="1050" b="1" dirty="0">
+              <a:rPr lang="en-US" sz="1000" b="1" dirty="0">
                 <a:solidFill>
                   <a:srgbClr val="3B1F5E"/>
                 </a:solidFill>
@@ -4357,7 +4642,7 @@
               </a:rPr>
               <a:t>Custo fixo</a:t>
             </a:r>
-            <a:endParaRPr lang="en-US" sz="1050" dirty="0"/>
+            <a:endParaRPr lang="en-US" sz="1000" dirty="0"/>
           </a:p>
           <a:p>
             <a:pPr marL="342900" indent="-342900">
@@ -4368,7 +4653,7 @@
               <a:buChar char="•"/>
             </a:pPr>
             <a:r>
-              <a:rPr lang="en-US" sz="1050" dirty="0">
+              <a:rPr lang="en-US" sz="1000" dirty="0">
                 <a:solidFill>
                   <a:srgbClr val="1F1235"/>
                 </a:solidFill>
@@ -4376,9 +4661,9 @@
                 <a:ea typeface="Arial" pitchFamily="34" charset="-122"/>
                 <a:cs typeface="Arial" pitchFamily="34" charset="-120"/>
               </a:rPr>
-              <a:t>Sem pró-labore: R$ 6.415. Com pró-labore: R$ 18.415 por mês.</a:t>
+              <a:t>Sem pró-labore: R$ 6.500 por mês (8 linhas). Com pró-labore: R$ 18.500.</a:t>
             </a:r>
-            <a:endParaRPr lang="en-US" sz="1050" dirty="0"/>
+            <a:endParaRPr lang="en-US" sz="1000" dirty="0"/>
           </a:p>
           <a:p>
             <a:pPr marL="342900" indent="-342900">
@@ -4389,7 +4674,7 @@
               <a:buChar char="•"/>
             </a:pPr>
             <a:r>
-              <a:rPr lang="en-US" sz="1050" dirty="0">
+              <a:rPr lang="en-US" sz="1000" dirty="0">
                 <a:solidFill>
                   <a:srgbClr val="1F1235"/>
                 </a:solidFill>
@@ -4397,9 +4682,9 @@
                 <a:ea typeface="Arial" pitchFamily="34" charset="-122"/>
                 <a:cs typeface="Arial" pitchFamily="34" charset="-120"/>
               </a:rPr>
-              <a:t>Custo-hora do escritório: R$ 84 (custo fixo com pró-labore ÷ 220 horas faturáveis dos sócios).</a:t>
+              <a:t>Custo-hora do escritório: R$ 66,07 (R$ 18.500 ÷ 280 horas faturáveis de meta, planilha 05); hora mínima a cobrar R$ 110.</a:t>
             </a:r>
-            <a:endParaRPr lang="en-US" sz="1050" dirty="0"/>
+            <a:endParaRPr lang="en-US" sz="1000" dirty="0"/>
           </a:p>
           <a:p>
             <a:pPr indent="0" marL="0">
@@ -4409,7 +4694,7 @@
               <a:buNone/>
             </a:pPr>
             <a:r>
-              <a:rPr lang="en-US" sz="1050" b="1" dirty="0">
+              <a:rPr lang="en-US" sz="1000" b="1" dirty="0">
                 <a:solidFill>
                   <a:srgbClr val="3B1F5E"/>
                 </a:solidFill>
@@ -4417,9 +4702,9 @@
                 <a:ea typeface="Arial" pitchFamily="34" charset="-122"/>
                 <a:cs typeface="Arial" pitchFamily="34" charset="-120"/>
               </a:rPr>
-              <a:t>Fora da tabela</a:t>
+              <a:t>Fora do custo fixo</a:t>
             </a:r>
-            <a:endParaRPr lang="en-US" sz="1050" dirty="0"/>
+            <a:endParaRPr lang="en-US" sz="1000" dirty="0"/>
           </a:p>
           <a:p>
             <a:pPr marL="342900" indent="-342900">
@@ -4430,7 +4715,7 @@
               <a:buChar char="•"/>
             </a:pPr>
             <a:r>
-              <a:rPr lang="en-US" sz="1050" dirty="0">
+              <a:rPr lang="en-US" sz="1000" dirty="0">
                 <a:solidFill>
                   <a:srgbClr val="1F1235"/>
                 </a:solidFill>
@@ -4438,9 +4723,9 @@
                 <a:ea typeface="Arial" pitchFamily="34" charset="-122"/>
                 <a:cs typeface="Arial" pitchFamily="34" charset="-120"/>
               </a:rPr>
-              <a:t>Custas adiantadas para clientes: R$ 70 em setembro, a reembolsar (categoria própria, não é despesa do escritório).</a:t>
+              <a:t>Custas adiantadas para clientes (R$ 380) vão em categoria própria e são reembolsadas: não são despesa do escritório (dúvida 4).</a:t>
             </a:r>
-            <a:endParaRPr lang="en-US" sz="1050" dirty="0"/>
+            <a:endParaRPr lang="en-US" sz="1000" dirty="0"/>
           </a:p>
           <a:p>
             <a:pPr marL="342900" indent="-342900">
@@ -4451,7 +4736,7 @@
               <a:buChar char="•"/>
             </a:pPr>
             <a:r>
-              <a:rPr lang="en-US" sz="1050" dirty="0">
+              <a:rPr lang="en-US" sz="1000" dirty="0">
                 <a:solidFill>
                   <a:srgbClr val="1F1235"/>
                 </a:solidFill>
@@ -4459,156 +4744,11 @@
                 <a:ea typeface="Arial" pitchFamily="34" charset="-122"/>
                 <a:cs typeface="Arial" pitchFamily="34" charset="-120"/>
               </a:rPr>
-              <a:t>Anuidade da OAB: paga em janeiro (R$ 1.100); R$ 150 por mês é a média com cursos.</a:t>
+              <a:t>A guia de setembro (20/09) será de R$ 2.152: 8 % dos R$ 26.900 de agosto.</a:t>
             </a:r>
-            <a:endParaRPr lang="en-US" sz="1050" dirty="0"/>
+            <a:endParaRPr lang="en-US" sz="1000" dirty="0"/>
           </a:p>
         </p:txBody>
-      </p:sp>
-      <p:sp>
-        <p:nvSpPr>
-          <p:cNvPr id="6" name="Text 3"/>
-          <p:cNvSpPr txBox="1"/>
-          <p:nvPr/>
-        </p:nvSpPr>
-        <p:spPr>
-          <a:xfrm>
-            <a:off x="457200" y="4791456"/>
-            <a:ext cx="6858000" cy="201168"/>
-          </a:xfrm>
-          <a:prstGeom prst="rect">
-            <a:avLst/>
-          </a:prstGeom>
-          <a:noFill/>
-          <a:ln/>
-        </p:spPr>
-        <p:txBody>
-          <a:bodyPr wrap="square" lIns="0" tIns="0" rIns="0" bIns="0" rtlCol="0" anchor="ctr"/>
-          <a:lstStyle/>
-          <a:p>
-            <a:pPr indent="0" marL="0">
-              <a:buNone/>
-            </a:pPr>
-            <a:r>
-              <a:rPr lang="en-US" sz="700" dirty="0">
-                <a:solidFill>
-                  <a:srgbClr val="B89BE0"/>
-                </a:solidFill>
-                <a:latin typeface="Arial" pitchFamily="34" charset="0"/>
-                <a:ea typeface="Arial" pitchFamily="34" charset="-122"/>
-                <a:cs typeface="Arial" pitchFamily="34" charset="-120"/>
-              </a:rPr>
-              <a:t>Kit de Gestão para Advogados · modelo v1.0 · set/2026</a:t>
-            </a:r>
-            <a:endParaRPr lang="en-US" sz="700" dirty="0"/>
-          </a:p>
-        </p:txBody>
-      </p:sp>
-      <p:sp>
-        <p:nvSpPr>
-          <p:cNvPr id="7" name="Shape 4"/>
-          <p:cNvSpPr/>
-          <p:nvPr/>
-        </p:nvSpPr>
-        <p:spPr>
-          <a:xfrm>
-            <a:off x="8229600" y="4818888"/>
-            <a:ext cx="211226" cy="70409"/>
-          </a:xfrm>
-          <a:prstGeom prst="roundRect">
-            <a:avLst>
-              <a:gd name="adj" fmla="val 42857"/>
-            </a:avLst>
-          </a:prstGeom>
-          <a:solidFill>
-            <a:srgbClr val="7A5AA8"/>
-          </a:solidFill>
-          <a:ln w="12700">
-            <a:solidFill>
-              <a:srgbClr val="7A5AA8"/>
-            </a:solidFill>
-            <a:prstDash val="solid"/>
-          </a:ln>
-        </p:spPr>
-      </p:sp>
-      <p:sp>
-        <p:nvSpPr>
-          <p:cNvPr id="8" name="Shape 5"/>
-          <p:cNvSpPr/>
-          <p:nvPr/>
-        </p:nvSpPr>
-        <p:spPr>
-          <a:xfrm>
-            <a:off x="8279892" y="4728362"/>
-            <a:ext cx="211226" cy="70409"/>
-          </a:xfrm>
-          <a:prstGeom prst="roundRect">
-            <a:avLst>
-              <a:gd name="adj" fmla="val 42857"/>
-            </a:avLst>
-          </a:prstGeom>
-          <a:solidFill>
-            <a:srgbClr val="3B1F5E"/>
-          </a:solidFill>
-          <a:ln w="12700">
-            <a:solidFill>
-              <a:srgbClr val="3B1F5E"/>
-            </a:solidFill>
-            <a:prstDash val="solid"/>
-          </a:ln>
-        </p:spPr>
-      </p:sp>
-      <p:sp>
-        <p:nvSpPr>
-          <p:cNvPr id="9" name="Shape 6"/>
-          <p:cNvSpPr/>
-          <p:nvPr/>
-        </p:nvSpPr>
-        <p:spPr>
-          <a:xfrm>
-            <a:off x="8330184" y="4637837"/>
-            <a:ext cx="211226" cy="70409"/>
-          </a:xfrm>
-          <a:prstGeom prst="roundRect">
-            <a:avLst>
-              <a:gd name="adj" fmla="val 42857"/>
-            </a:avLst>
-          </a:prstGeom>
-          <a:solidFill>
-            <a:srgbClr val="3B1F5E"/>
-          </a:solidFill>
-          <a:ln w="12700">
-            <a:solidFill>
-              <a:srgbClr val="3B1F5E"/>
-            </a:solidFill>
-            <a:prstDash val="solid"/>
-          </a:ln>
-        </p:spPr>
-      </p:sp>
-      <p:sp>
-        <p:nvSpPr>
-          <p:cNvPr id="10" name="Shape 7"/>
-          <p:cNvSpPr/>
-          <p:nvPr/>
-        </p:nvSpPr>
-        <p:spPr>
-          <a:xfrm>
-            <a:off x="8541410" y="4839005"/>
-            <a:ext cx="65380" cy="65380"/>
-          </a:xfrm>
-          <a:prstGeom prst="ellipse">
-            <a:avLst/>
-          </a:prstGeom>
-          <a:solidFill>
-            <a:srgbClr val="FFC83D"/>
-          </a:solidFill>
-          <a:ln w="12700">
-            <a:solidFill>
-              <a:srgbClr val="FFC83D"/>
-            </a:solidFill>
-            <a:prstDash val="solid"/>
-          </a:ln>
-        </p:spPr>
       </p:sp>
     </p:spTree>
   </p:cSld>
@@ -4621,13 +4761,6 @@
 <file path=ppt/slides/slide4.xml><?xml version="1.0" encoding="utf-8"?>
 <p:sld xmlns:a="http://schemas.openxmlformats.org/drawingml/2006/main" xmlns:r="http://schemas.openxmlformats.org/officeDocument/2006/relationships" xmlns:p="http://schemas.openxmlformats.org/presentationml/2006/main">
   <p:cSld name="Slide 4">
-    <p:bg>
-      <p:bgPr>
-        <a:solidFill>
-          <a:srgbClr val="FFFFFF"/>
-        </a:solidFill>
-      </p:bgPr>
-    </p:bg>
     <p:spTree>
       <p:nvGrpSpPr>
         <p:cNvPr id="1" name=""/>
@@ -4677,7 +4810,7 @@
                 <a:ea typeface="Arial" pitchFamily="34" charset="-122"/>
                 <a:cs typeface="Arial" pitchFamily="34" charset="-120"/>
               </a:rPr>
-              <a:t>Provisão de impostos, 13º e férias</a:t>
+              <a:t>Provisão de impostos e reservas</a:t>
             </a:r>
             <a:endParaRPr lang="en-US" sz="2400" dirty="0"/>
           </a:p>
@@ -4716,7 +4849,7 @@
                 <a:ea typeface="Arial" pitchFamily="34" charset="-122"/>
                 <a:cs typeface="Arial" pitchFamily="34" charset="-120"/>
               </a:rPr>
-              <a:t>Planilha Provisão (10). Separado no fechamento do mês e transferido para a conta reserva no dia 28.</a:t>
+              <a:t>Planilha Provisão (10). Separado no fechamento do mês e transferido para a conta separada no dia 5.</a:t>
             </a:r>
             <a:endParaRPr lang="en-US" sz="1200" dirty="0"/>
           </a:p>
@@ -4737,7 +4870,7 @@
           </p:nvPr>
         </p:nvGraphicFramePr>
         <p:xfrm>
-          <a:off x="457200" y="1463040"/>
+          <a:off x="457200" y="1417320"/>
           <a:ext cx="8229600" cy="914400"/>
         </p:xfrm>
         <a:graphic>
@@ -4745,12 +4878,12 @@
             <a:tbl>
               <a:tblPr/>
               <a:tblGrid>
-                <a:gridCol w="2011680"/>
-                <a:gridCol w="3291840"/>
-                <a:gridCol w="1371600"/>
-                <a:gridCol w="1554480"/>
+                <a:gridCol w="2286000"/>
+                <a:gridCol w="3840480"/>
+                <a:gridCol w="1005840"/>
+                <a:gridCol w="1097280"/>
               </a:tblGrid>
-              <a:tr h="347472">
+              <a:tr h="310896">
                 <a:tc>
                   <a:txBody>
                     <a:bodyPr/>
@@ -4760,7 +4893,7 @@
                         <a:buNone/>
                       </a:pPr>
                       <a:r>
-                        <a:rPr lang="en-US" sz="1050" b="1" dirty="0">
+                        <a:rPr lang="en-US" sz="950" b="1" dirty="0">
                           <a:solidFill>
                             <a:srgbClr val="FFFFFF"/>
                           </a:solidFill>
@@ -4770,7 +4903,7 @@
                         </a:rPr>
                         <a:t>Provisão</a:t>
                       </a:r>
-                      <a:endParaRPr lang="en-US" sz="1050" dirty="0">
+                      <a:endParaRPr lang="en-US" sz="950" dirty="0">
                         <a:latin typeface="Arial" charset="0"/>
                         <a:ea typeface="Arial" charset="0"/>
                         <a:cs typeface="Arial" charset="0"/>
@@ -4828,7 +4961,7 @@
                         <a:buNone/>
                       </a:pPr>
                       <a:r>
-                        <a:rPr lang="en-US" sz="1050" b="1" dirty="0">
+                        <a:rPr lang="en-US" sz="950" b="1" dirty="0">
                           <a:solidFill>
                             <a:srgbClr val="FFFFFF"/>
                           </a:solidFill>
@@ -4838,7 +4971,7 @@
                         </a:rPr>
                         <a:t>Base de cálculo</a:t>
                       </a:r>
-                      <a:endParaRPr lang="en-US" sz="1050" dirty="0">
+                      <a:endParaRPr lang="en-US" sz="950" dirty="0">
                         <a:latin typeface="Arial" charset="0"/>
                         <a:ea typeface="Arial" charset="0"/>
                         <a:cs typeface="Arial" charset="0"/>
@@ -4896,7 +5029,7 @@
                         <a:buNone/>
                       </a:pPr>
                       <a:r>
-                        <a:rPr lang="en-US" sz="1050" b="1" dirty="0">
+                        <a:rPr lang="en-US" sz="950" b="1" dirty="0">
                           <a:solidFill>
                             <a:srgbClr val="FFFFFF"/>
                           </a:solidFill>
@@ -4904,9 +5037,9 @@
                           <a:ea typeface="Arial" pitchFamily="34" charset="-122"/>
                           <a:cs typeface="Arial" pitchFamily="34" charset="-120"/>
                         </a:rPr>
-                        <a:t>Setembro (R$)</a:t>
+                        <a:t>Agosto (R$)</a:t>
                       </a:r>
-                      <a:endParaRPr lang="en-US" sz="1050" dirty="0">
+                      <a:endParaRPr lang="en-US" sz="950" dirty="0">
                         <a:latin typeface="Arial" charset="0"/>
                         <a:ea typeface="Arial" charset="0"/>
                         <a:cs typeface="Arial" charset="0"/>
@@ -4964,7 +5097,7 @@
                         <a:buNone/>
                       </a:pPr>
                       <a:r>
-                        <a:rPr lang="en-US" sz="1050" b="1" dirty="0">
+                        <a:rPr lang="en-US" sz="950" b="1" dirty="0">
                           <a:solidFill>
                             <a:srgbClr val="FFFFFF"/>
                           </a:solidFill>
@@ -4972,9 +5105,9 @@
                           <a:ea typeface="Arial" pitchFamily="34" charset="-122"/>
                           <a:cs typeface="Arial" pitchFamily="34" charset="-120"/>
                         </a:rPr>
-                        <a:t>Janeiro a setembro (R$)</a:t>
+                        <a:t>Jan–ago (R$)</a:t>
                       </a:r>
-                      <a:endParaRPr lang="en-US" sz="1050" dirty="0">
+                      <a:endParaRPr lang="en-US" sz="950" dirty="0">
                         <a:latin typeface="Arial" charset="0"/>
                         <a:ea typeface="Arial" charset="0"/>
                         <a:cs typeface="Arial" charset="0"/>
@@ -5024,7 +5157,7 @@
                   </a:tcPr>
                 </a:tc>
               </a:tr>
-              <a:tr h="411480">
+              <a:tr h="384048">
                 <a:tc>
                   <a:txBody>
                     <a:bodyPr/>
@@ -5034,7 +5167,7 @@
                         <a:buNone/>
                       </a:pPr>
                       <a:r>
-                        <a:rPr lang="en-US" sz="1050" dirty="0">
+                        <a:rPr lang="en-US" sz="950" dirty="0">
                           <a:solidFill>
                             <a:srgbClr val="1F1235"/>
                           </a:solidFill>
@@ -5044,7 +5177,7 @@
                         </a:rPr>
                         <a:t>Impostos e taxas</a:t>
                       </a:r>
-                      <a:endParaRPr lang="en-US" sz="1050" dirty="0">
+                      <a:endParaRPr lang="en-US" sz="950" dirty="0">
                         <a:latin typeface="Arial" charset="0"/>
                         <a:ea typeface="Arial" charset="0"/>
                         <a:cs typeface="Arial" charset="0"/>
@@ -5102,7 +5235,7 @@
                         <a:buNone/>
                       </a:pPr>
                       <a:r>
-                        <a:rPr lang="en-US" sz="1050" dirty="0">
+                        <a:rPr lang="en-US" sz="950" dirty="0">
                           <a:solidFill>
                             <a:srgbClr val="1F1235"/>
                           </a:solidFill>
@@ -5110,9 +5243,9 @@
                           <a:ea typeface="Arial" pitchFamily="34" charset="-122"/>
                           <a:cs typeface="Arial" pitchFamily="34" charset="-120"/>
                         </a:rPr>
-                        <a:t>6% da receita do mês (alíquota efetiva combinada com o contador)</a:t>
+                        <a:t>8 % das entradas do mês (alíquota efetiva combinada com o contador); guia paga no dia 20 do mês seguinte</a:t>
                       </a:r>
-                      <a:endParaRPr lang="en-US" sz="1050" dirty="0">
+                      <a:endParaRPr lang="en-US" sz="950" dirty="0">
                         <a:latin typeface="Arial" charset="0"/>
                         <a:ea typeface="Arial" charset="0"/>
                         <a:cs typeface="Arial" charset="0"/>
@@ -5170,7 +5303,7 @@
                         <a:buNone/>
                       </a:pPr>
                       <a:r>
-                        <a:rPr lang="en-US" sz="1050" dirty="0">
+                        <a:rPr lang="en-US" sz="950" dirty="0">
                           <a:solidFill>
                             <a:srgbClr val="1F1235"/>
                           </a:solidFill>
@@ -5178,9 +5311,9 @@
                           <a:ea typeface="Arial" pitchFamily="34" charset="-122"/>
                           <a:cs typeface="Arial" pitchFamily="34" charset="-120"/>
                         </a:rPr>
-                        <a:t>1.764</a:t>
+                        <a:t>2.152</a:t>
                       </a:r>
-                      <a:endParaRPr lang="en-US" sz="1050" dirty="0">
+                      <a:endParaRPr lang="en-US" sz="950" dirty="0">
                         <a:latin typeface="Arial" charset="0"/>
                         <a:ea typeface="Arial" charset="0"/>
                         <a:cs typeface="Arial" charset="0"/>
@@ -5238,7 +5371,7 @@
                         <a:buNone/>
                       </a:pPr>
                       <a:r>
-                        <a:rPr lang="en-US" sz="1050" dirty="0">
+                        <a:rPr lang="en-US" sz="950" dirty="0">
                           <a:solidFill>
                             <a:srgbClr val="1F1235"/>
                           </a:solidFill>
@@ -5246,9 +5379,9 @@
                           <a:ea typeface="Arial" pitchFamily="34" charset="-122"/>
                           <a:cs typeface="Arial" pitchFamily="34" charset="-120"/>
                         </a:rPr>
-                        <a:t>13.236</a:t>
+                        <a:t>16.591</a:t>
                       </a:r>
-                      <a:endParaRPr lang="en-US" sz="1050" dirty="0">
+                      <a:endParaRPr lang="en-US" sz="950" dirty="0">
                         <a:latin typeface="Arial" charset="0"/>
                         <a:ea typeface="Arial" charset="0"/>
                         <a:cs typeface="Arial" charset="0"/>
@@ -5298,7 +5431,7 @@
                   </a:tcPr>
                 </a:tc>
               </a:tr>
-              <a:tr h="411480">
+              <a:tr h="384048">
                 <a:tc>
                   <a:txBody>
                     <a:bodyPr/>
@@ -5308,7 +5441,7 @@
                         <a:buNone/>
                       </a:pPr>
                       <a:r>
-                        <a:rPr lang="en-US" sz="1050" dirty="0">
+                        <a:rPr lang="en-US" sz="950" dirty="0">
                           <a:solidFill>
                             <a:srgbClr val="1F1235"/>
                           </a:solidFill>
@@ -5316,9 +5449,9 @@
                           <a:ea typeface="Arial" pitchFamily="34" charset="-122"/>
                           <a:cs typeface="Arial" pitchFamily="34" charset="-120"/>
                         </a:rPr>
-                        <a:t>13º dos sócios</a:t>
+                        <a:t>Reserva de fim de ano decidida pelos sócios</a:t>
                       </a:r>
-                      <a:endParaRPr lang="en-US" sz="1050" dirty="0">
+                      <a:endParaRPr lang="en-US" sz="950" dirty="0">
                         <a:latin typeface="Arial" charset="0"/>
                         <a:ea typeface="Arial" charset="0"/>
                         <a:cs typeface="Arial" charset="0"/>
@@ -5376,7 +5509,7 @@
                         <a:buNone/>
                       </a:pPr>
                       <a:r>
-                        <a:rPr lang="en-US" sz="1050" dirty="0">
+                        <a:rPr lang="en-US" sz="950" dirty="0">
                           <a:solidFill>
                             <a:srgbClr val="1F1235"/>
                           </a:solidFill>
@@ -5384,9 +5517,9 @@
                           <a:ea typeface="Arial" pitchFamily="34" charset="-122"/>
                           <a:cs typeface="Arial" pitchFamily="34" charset="-120"/>
                         </a:rPr>
-                        <a:t>1/12 do pró-labore (R$ 12.000 ÷ 12)</a:t>
+                        <a:t>R$ 500 por sócio por mês; sem obrigação legal, é decisão dos sócios (dúvida 7)</a:t>
                       </a:r>
-                      <a:endParaRPr lang="en-US" sz="1050" dirty="0">
+                      <a:endParaRPr lang="en-US" sz="950" dirty="0">
                         <a:latin typeface="Arial" charset="0"/>
                         <a:ea typeface="Arial" charset="0"/>
                         <a:cs typeface="Arial" charset="0"/>
@@ -5444,7 +5577,7 @@
                         <a:buNone/>
                       </a:pPr>
                       <a:r>
-                        <a:rPr lang="en-US" sz="1050" dirty="0">
+                        <a:rPr lang="en-US" sz="950" dirty="0">
                           <a:solidFill>
                             <a:srgbClr val="1F1235"/>
                           </a:solidFill>
@@ -5454,7 +5587,7 @@
                         </a:rPr>
                         <a:t>1.000</a:t>
                       </a:r>
-                      <a:endParaRPr lang="en-US" sz="1050" dirty="0">
+                      <a:endParaRPr lang="en-US" sz="950" dirty="0">
                         <a:latin typeface="Arial" charset="0"/>
                         <a:ea typeface="Arial" charset="0"/>
                         <a:cs typeface="Arial" charset="0"/>
@@ -5512,7 +5645,7 @@
                         <a:buNone/>
                       </a:pPr>
                       <a:r>
-                        <a:rPr lang="en-US" sz="1050" dirty="0">
+                        <a:rPr lang="en-US" sz="950" dirty="0">
                           <a:solidFill>
                             <a:srgbClr val="1F1235"/>
                           </a:solidFill>
@@ -5520,9 +5653,9 @@
                           <a:ea typeface="Arial" pitchFamily="34" charset="-122"/>
                           <a:cs typeface="Arial" pitchFamily="34" charset="-120"/>
                         </a:rPr>
-                        <a:t>9.000</a:t>
+                        <a:t>8.000</a:t>
                       </a:r>
-                      <a:endParaRPr lang="en-US" sz="1050" dirty="0">
+                      <a:endParaRPr lang="en-US" sz="950" dirty="0">
                         <a:latin typeface="Arial" charset="0"/>
                         <a:ea typeface="Arial" charset="0"/>
                         <a:cs typeface="Arial" charset="0"/>
@@ -5572,7 +5705,7 @@
                   </a:tcPr>
                 </a:tc>
               </a:tr>
-              <a:tr h="411480">
+              <a:tr h="384048">
                 <a:tc>
                   <a:txBody>
                     <a:bodyPr/>
@@ -5582,7 +5715,7 @@
                         <a:buNone/>
                       </a:pPr>
                       <a:r>
-                        <a:rPr lang="en-US" sz="1050" dirty="0">
+                        <a:rPr lang="en-US" sz="950" dirty="0">
                           <a:solidFill>
                             <a:srgbClr val="1F1235"/>
                           </a:solidFill>
@@ -5590,9 +5723,9 @@
                           <a:ea typeface="Arial" pitchFamily="34" charset="-122"/>
                           <a:cs typeface="Arial" pitchFamily="34" charset="-120"/>
                         </a:rPr>
-                        <a:t>Recesso de janeiro</a:t>
+                        <a:t>Reserva para janeiro, mês de receita menor</a:t>
                       </a:r>
-                      <a:endParaRPr lang="en-US" sz="1050" dirty="0">
+                      <a:endParaRPr lang="en-US" sz="950" dirty="0">
                         <a:latin typeface="Arial" charset="0"/>
                         <a:ea typeface="Arial" charset="0"/>
                         <a:cs typeface="Arial" charset="0"/>
@@ -5650,7 +5783,7 @@
                         <a:buNone/>
                       </a:pPr>
                       <a:r>
-                        <a:rPr lang="en-US" sz="1050" dirty="0">
+                        <a:rPr lang="en-US" sz="950" dirty="0">
                           <a:solidFill>
                             <a:srgbClr val="1F1235"/>
                           </a:solidFill>
@@ -5658,9 +5791,9 @@
                           <a:ea typeface="Arial" pitchFamily="34" charset="-122"/>
                           <a:cs typeface="Arial" pitchFamily="34" charset="-120"/>
                         </a:rPr>
-                        <a:t>1/12 do custo fixo sem pró-labore (R$ 6.415 ÷ 12)</a:t>
+                        <a:t>R$ 156 por mês (inclui o recesso da estagiária), para o caixa não depender de janeiro</a:t>
                       </a:r>
-                      <a:endParaRPr lang="en-US" sz="1050" dirty="0">
+                      <a:endParaRPr lang="en-US" sz="950" dirty="0">
                         <a:latin typeface="Arial" charset="0"/>
                         <a:ea typeface="Arial" charset="0"/>
                         <a:cs typeface="Arial" charset="0"/>
@@ -5718,7 +5851,7 @@
                         <a:buNone/>
                       </a:pPr>
                       <a:r>
-                        <a:rPr lang="en-US" sz="1050" dirty="0">
+                        <a:rPr lang="en-US" sz="950" dirty="0">
                           <a:solidFill>
                             <a:srgbClr val="1F1235"/>
                           </a:solidFill>
@@ -5726,9 +5859,9 @@
                           <a:ea typeface="Arial" pitchFamily="34" charset="-122"/>
                           <a:cs typeface="Arial" pitchFamily="34" charset="-120"/>
                         </a:rPr>
-                        <a:t>535</a:t>
+                        <a:t>156</a:t>
                       </a:r>
-                      <a:endParaRPr lang="en-US" sz="1050" dirty="0">
+                      <a:endParaRPr lang="en-US" sz="950" dirty="0">
                         <a:latin typeface="Arial" charset="0"/>
                         <a:ea typeface="Arial" charset="0"/>
                         <a:cs typeface="Arial" charset="0"/>
@@ -5786,7 +5919,7 @@
                         <a:buNone/>
                       </a:pPr>
                       <a:r>
-                        <a:rPr lang="en-US" sz="1050" dirty="0">
+                        <a:rPr lang="en-US" sz="950" dirty="0">
                           <a:solidFill>
                             <a:srgbClr val="1F1235"/>
                           </a:solidFill>
@@ -5794,9 +5927,9 @@
                           <a:ea typeface="Arial" pitchFamily="34" charset="-122"/>
                           <a:cs typeface="Arial" pitchFamily="34" charset="-120"/>
                         </a:rPr>
-                        <a:t>4.815</a:t>
+                        <a:t>1.244</a:t>
                       </a:r>
-                      <a:endParaRPr lang="en-US" sz="1050" dirty="0">
+                      <a:endParaRPr lang="en-US" sz="950" dirty="0">
                         <a:latin typeface="Arial" charset="0"/>
                         <a:ea typeface="Arial" charset="0"/>
                         <a:cs typeface="Arial" charset="0"/>
@@ -5846,7 +5979,7 @@
                   </a:tcPr>
                 </a:tc>
               </a:tr>
-              <a:tr h="365760">
+              <a:tr h="274320">
                 <a:tc>
                   <a:txBody>
                     <a:bodyPr/>
@@ -5856,7 +5989,7 @@
                         <a:buNone/>
                       </a:pPr>
                       <a:r>
-                        <a:rPr lang="en-US" sz="1050" b="1" dirty="0">
+                        <a:rPr lang="en-US" sz="950" b="1" dirty="0">
                           <a:solidFill>
                             <a:srgbClr val="1F1235"/>
                           </a:solidFill>
@@ -5864,9 +5997,9 @@
                           <a:ea typeface="Arial" pitchFamily="34" charset="-122"/>
                           <a:cs typeface="Arial" pitchFamily="34" charset="-120"/>
                         </a:rPr>
-                        <a:t>Total provisionado</a:t>
+                        <a:t>Total separado</a:t>
                       </a:r>
-                      <a:endParaRPr lang="en-US" sz="1050" dirty="0">
+                      <a:endParaRPr lang="en-US" sz="950" dirty="0">
                         <a:latin typeface="Arial" charset="0"/>
                         <a:ea typeface="Arial" charset="0"/>
                         <a:cs typeface="Arial" charset="0"/>
@@ -5923,7 +6056,7 @@
                       <a:pPr algn="l" indent="0" marL="0">
                         <a:buNone/>
                       </a:pPr>
-                      <a:endParaRPr lang="en-US" sz="1050" dirty="0">
+                      <a:endParaRPr lang="en-US" sz="950" dirty="0">
                         <a:latin typeface="Arial" charset="0"/>
                         <a:ea typeface="Arial" charset="0"/>
                         <a:cs typeface="Arial" charset="0"/>
@@ -5981,7 +6114,7 @@
                         <a:buNone/>
                       </a:pPr>
                       <a:r>
-                        <a:rPr lang="en-US" sz="1050" b="1" dirty="0">
+                        <a:rPr lang="en-US" sz="950" b="1" dirty="0">
                           <a:solidFill>
                             <a:srgbClr val="1F1235"/>
                           </a:solidFill>
@@ -5989,9 +6122,9 @@
                           <a:ea typeface="Arial" pitchFamily="34" charset="-122"/>
                           <a:cs typeface="Arial" pitchFamily="34" charset="-120"/>
                         </a:rPr>
-                        <a:t>3.299</a:t>
+                        <a:t>3.308</a:t>
                       </a:r>
-                      <a:endParaRPr lang="en-US" sz="1050" dirty="0">
+                      <a:endParaRPr lang="en-US" sz="950" dirty="0">
                         <a:latin typeface="Arial" charset="0"/>
                         <a:ea typeface="Arial" charset="0"/>
                         <a:cs typeface="Arial" charset="0"/>
@@ -6049,7 +6182,7 @@
                         <a:buNone/>
                       </a:pPr>
                       <a:r>
-                        <a:rPr lang="en-US" sz="1050" b="1" dirty="0">
+                        <a:rPr lang="en-US" sz="950" b="1" dirty="0">
                           <a:solidFill>
                             <a:srgbClr val="1F1235"/>
                           </a:solidFill>
@@ -6057,9 +6190,546 @@
                           <a:ea typeface="Arial" pitchFamily="34" charset="-122"/>
                           <a:cs typeface="Arial" pitchFamily="34" charset="-120"/>
                         </a:rPr>
-                        <a:t>27.051</a:t>
+                        <a:t>25.834</a:t>
                       </a:r>
-                      <a:endParaRPr lang="en-US" sz="1050" dirty="0">
+                      <a:endParaRPr lang="en-US" sz="950" dirty="0">
+                        <a:latin typeface="Arial" charset="0"/>
+                        <a:ea typeface="Arial" charset="0"/>
+                        <a:cs typeface="Arial" charset="0"/>
+                      </a:endParaRPr>
+                    </a:p>
+                  </a:txBody>
+                  <a:tcPr marL="54864" marR="54864" marT="54864" marB="54864" anchor="ctr">
+                    <a:lnL w="9525" cap="flat" cmpd="sng" algn="ctr">
+                      <a:solidFill>
+                        <a:srgbClr val="DCD2EC"/>
+                      </a:solidFill>
+                      <a:prstDash val="solid"/>
+                      <a:round/>
+                      <a:headEnd type="none" w="med" len="med"/>
+                      <a:tailEnd type="none" w="med" len="med"/>
+                    </a:lnL>
+                    <a:lnR w="9525" cap="flat" cmpd="sng" algn="ctr">
+                      <a:solidFill>
+                        <a:srgbClr val="DCD2EC"/>
+                      </a:solidFill>
+                      <a:prstDash val="solid"/>
+                      <a:round/>
+                      <a:headEnd type="none" w="med" len="med"/>
+                      <a:tailEnd type="none" w="med" len="med"/>
+                    </a:lnR>
+                    <a:lnT w="9525" cap="flat" cmpd="sng" algn="ctr">
+                      <a:solidFill>
+                        <a:srgbClr val="DCD2EC"/>
+                      </a:solidFill>
+                      <a:prstDash val="solid"/>
+                      <a:round/>
+                      <a:headEnd type="none" w="med" len="med"/>
+                      <a:tailEnd type="none" w="med" len="med"/>
+                    </a:lnT>
+                    <a:lnB w="9525" cap="flat" cmpd="sng" algn="ctr">
+                      <a:solidFill>
+                        <a:srgbClr val="DCD2EC"/>
+                      </a:solidFill>
+                      <a:prstDash val="solid"/>
+                      <a:round/>
+                      <a:headEnd type="none" w="med" len="med"/>
+                      <a:tailEnd type="none" w="med" len="med"/>
+                    </a:lnB>
+                    <a:solidFill>
+                      <a:srgbClr val="FFFFFF"/>
+                    </a:solidFill>
+                  </a:tcPr>
+                </a:tc>
+              </a:tr>
+              <a:tr h="274320">
+                <a:tc>
+                  <a:txBody>
+                    <a:bodyPr/>
+                    <a:lstStyle/>
+                    <a:p>
+                      <a:pPr algn="l" indent="0" marL="0">
+                        <a:buNone/>
+                      </a:pPr>
+                      <a:r>
+                        <a:rPr lang="en-US" sz="950" dirty="0">
+                          <a:solidFill>
+                            <a:srgbClr val="1F1235"/>
+                          </a:solidFill>
+                          <a:latin typeface="Arial" pitchFamily="34" charset="0"/>
+                          <a:ea typeface="Arial" pitchFamily="34" charset="-122"/>
+                          <a:cs typeface="Arial" pitchFamily="34" charset="-120"/>
+                        </a:rPr>
+                        <a:t>Guias pagas</a:t>
+                      </a:r>
+                      <a:endParaRPr lang="en-US" sz="950" dirty="0">
+                        <a:latin typeface="Arial" charset="0"/>
+                        <a:ea typeface="Arial" charset="0"/>
+                        <a:cs typeface="Arial" charset="0"/>
+                      </a:endParaRPr>
+                    </a:p>
+                  </a:txBody>
+                  <a:tcPr marL="54864" marR="54864" marT="54864" marB="54864" anchor="ctr">
+                    <a:lnL w="9525" cap="flat" cmpd="sng" algn="ctr">
+                      <a:solidFill>
+                        <a:srgbClr val="DCD2EC"/>
+                      </a:solidFill>
+                      <a:prstDash val="solid"/>
+                      <a:round/>
+                      <a:headEnd type="none" w="med" len="med"/>
+                      <a:tailEnd type="none" w="med" len="med"/>
+                    </a:lnL>
+                    <a:lnR w="9525" cap="flat" cmpd="sng" algn="ctr">
+                      <a:solidFill>
+                        <a:srgbClr val="DCD2EC"/>
+                      </a:solidFill>
+                      <a:prstDash val="solid"/>
+                      <a:round/>
+                      <a:headEnd type="none" w="med" len="med"/>
+                      <a:tailEnd type="none" w="med" len="med"/>
+                    </a:lnR>
+                    <a:lnT w="9525" cap="flat" cmpd="sng" algn="ctr">
+                      <a:solidFill>
+                        <a:srgbClr val="DCD2EC"/>
+                      </a:solidFill>
+                      <a:prstDash val="solid"/>
+                      <a:round/>
+                      <a:headEnd type="none" w="med" len="med"/>
+                      <a:tailEnd type="none" w="med" len="med"/>
+                    </a:lnT>
+                    <a:lnB w="9525" cap="flat" cmpd="sng" algn="ctr">
+                      <a:solidFill>
+                        <a:srgbClr val="DCD2EC"/>
+                      </a:solidFill>
+                      <a:prstDash val="solid"/>
+                      <a:round/>
+                      <a:headEnd type="none" w="med" len="med"/>
+                      <a:tailEnd type="none" w="med" len="med"/>
+                    </a:lnB>
+                    <a:solidFill>
+                      <a:srgbClr val="F3EEFB"/>
+                    </a:solidFill>
+                  </a:tcPr>
+                </a:tc>
+                <a:tc>
+                  <a:txBody>
+                    <a:bodyPr/>
+                    <a:lstStyle/>
+                    <a:p>
+                      <a:pPr algn="l" indent="0" marL="0">
+                        <a:buNone/>
+                      </a:pPr>
+                      <a:r>
+                        <a:rPr lang="en-US" sz="950" dirty="0">
+                          <a:solidFill>
+                            <a:srgbClr val="1F1235"/>
+                          </a:solidFill>
+                          <a:latin typeface="Arial" pitchFamily="34" charset="0"/>
+                          <a:ea typeface="Arial" pitchFamily="34" charset="-122"/>
+                          <a:cs typeface="Arial" pitchFamily="34" charset="-120"/>
+                        </a:rPr>
+                        <a:t>8 % das entradas do mês anterior, dia 20</a:t>
+                      </a:r>
+                      <a:endParaRPr lang="en-US" sz="950" dirty="0">
+                        <a:latin typeface="Arial" charset="0"/>
+                        <a:ea typeface="Arial" charset="0"/>
+                        <a:cs typeface="Arial" charset="0"/>
+                      </a:endParaRPr>
+                    </a:p>
+                  </a:txBody>
+                  <a:tcPr marL="54864" marR="54864" marT="54864" marB="54864" anchor="ctr">
+                    <a:lnL w="9525" cap="flat" cmpd="sng" algn="ctr">
+                      <a:solidFill>
+                        <a:srgbClr val="DCD2EC"/>
+                      </a:solidFill>
+                      <a:prstDash val="solid"/>
+                      <a:round/>
+                      <a:headEnd type="none" w="med" len="med"/>
+                      <a:tailEnd type="none" w="med" len="med"/>
+                    </a:lnL>
+                    <a:lnR w="9525" cap="flat" cmpd="sng" algn="ctr">
+                      <a:solidFill>
+                        <a:srgbClr val="DCD2EC"/>
+                      </a:solidFill>
+                      <a:prstDash val="solid"/>
+                      <a:round/>
+                      <a:headEnd type="none" w="med" len="med"/>
+                      <a:tailEnd type="none" w="med" len="med"/>
+                    </a:lnR>
+                    <a:lnT w="9525" cap="flat" cmpd="sng" algn="ctr">
+                      <a:solidFill>
+                        <a:srgbClr val="DCD2EC"/>
+                      </a:solidFill>
+                      <a:prstDash val="solid"/>
+                      <a:round/>
+                      <a:headEnd type="none" w="med" len="med"/>
+                      <a:tailEnd type="none" w="med" len="med"/>
+                    </a:lnT>
+                    <a:lnB w="9525" cap="flat" cmpd="sng" algn="ctr">
+                      <a:solidFill>
+                        <a:srgbClr val="DCD2EC"/>
+                      </a:solidFill>
+                      <a:prstDash val="solid"/>
+                      <a:round/>
+                      <a:headEnd type="none" w="med" len="med"/>
+                      <a:tailEnd type="none" w="med" len="med"/>
+                    </a:lnB>
+                    <a:solidFill>
+                      <a:srgbClr val="F3EEFB"/>
+                    </a:solidFill>
+                  </a:tcPr>
+                </a:tc>
+                <a:tc>
+                  <a:txBody>
+                    <a:bodyPr/>
+                    <a:lstStyle/>
+                    <a:p>
+                      <a:pPr algn="r" indent="0" marL="0">
+                        <a:buNone/>
+                      </a:pPr>
+                      <a:r>
+                        <a:rPr lang="en-US" sz="950" dirty="0">
+                          <a:solidFill>
+                            <a:srgbClr val="1F1235"/>
+                          </a:solidFill>
+                          <a:latin typeface="Arial" pitchFamily="34" charset="0"/>
+                          <a:ea typeface="Arial" pitchFamily="34" charset="-122"/>
+                          <a:cs typeface="Arial" pitchFamily="34" charset="-120"/>
+                        </a:rPr>
+                        <a:t>2.357</a:t>
+                      </a:r>
+                      <a:endParaRPr lang="en-US" sz="950" dirty="0">
+                        <a:latin typeface="Arial" charset="0"/>
+                        <a:ea typeface="Arial" charset="0"/>
+                        <a:cs typeface="Arial" charset="0"/>
+                      </a:endParaRPr>
+                    </a:p>
+                  </a:txBody>
+                  <a:tcPr marL="54864" marR="54864" marT="54864" marB="54864" anchor="ctr">
+                    <a:lnL w="9525" cap="flat" cmpd="sng" algn="ctr">
+                      <a:solidFill>
+                        <a:srgbClr val="DCD2EC"/>
+                      </a:solidFill>
+                      <a:prstDash val="solid"/>
+                      <a:round/>
+                      <a:headEnd type="none" w="med" len="med"/>
+                      <a:tailEnd type="none" w="med" len="med"/>
+                    </a:lnL>
+                    <a:lnR w="9525" cap="flat" cmpd="sng" algn="ctr">
+                      <a:solidFill>
+                        <a:srgbClr val="DCD2EC"/>
+                      </a:solidFill>
+                      <a:prstDash val="solid"/>
+                      <a:round/>
+                      <a:headEnd type="none" w="med" len="med"/>
+                      <a:tailEnd type="none" w="med" len="med"/>
+                    </a:lnR>
+                    <a:lnT w="9525" cap="flat" cmpd="sng" algn="ctr">
+                      <a:solidFill>
+                        <a:srgbClr val="DCD2EC"/>
+                      </a:solidFill>
+                      <a:prstDash val="solid"/>
+                      <a:round/>
+                      <a:headEnd type="none" w="med" len="med"/>
+                      <a:tailEnd type="none" w="med" len="med"/>
+                    </a:lnT>
+                    <a:lnB w="9525" cap="flat" cmpd="sng" algn="ctr">
+                      <a:solidFill>
+                        <a:srgbClr val="DCD2EC"/>
+                      </a:solidFill>
+                      <a:prstDash val="solid"/>
+                      <a:round/>
+                      <a:headEnd type="none" w="med" len="med"/>
+                      <a:tailEnd type="none" w="med" len="med"/>
+                    </a:lnB>
+                    <a:solidFill>
+                      <a:srgbClr val="F3EEFB"/>
+                    </a:solidFill>
+                  </a:tcPr>
+                </a:tc>
+                <a:tc>
+                  <a:txBody>
+                    <a:bodyPr/>
+                    <a:lstStyle/>
+                    <a:p>
+                      <a:pPr algn="r" indent="0" marL="0">
+                        <a:buNone/>
+                      </a:pPr>
+                      <a:r>
+                        <a:rPr lang="en-US" sz="950" dirty="0">
+                          <a:solidFill>
+                            <a:srgbClr val="1F1235"/>
+                          </a:solidFill>
+                          <a:latin typeface="Arial" pitchFamily="34" charset="0"/>
+                          <a:ea typeface="Arial" pitchFamily="34" charset="-122"/>
+                          <a:cs typeface="Arial" pitchFamily="34" charset="-120"/>
+                        </a:rPr>
+                        <a:t>16.087</a:t>
+                      </a:r>
+                      <a:endParaRPr lang="en-US" sz="950" dirty="0">
+                        <a:latin typeface="Arial" charset="0"/>
+                        <a:ea typeface="Arial" charset="0"/>
+                        <a:cs typeface="Arial" charset="0"/>
+                      </a:endParaRPr>
+                    </a:p>
+                  </a:txBody>
+                  <a:tcPr marL="54864" marR="54864" marT="54864" marB="54864" anchor="ctr">
+                    <a:lnL w="9525" cap="flat" cmpd="sng" algn="ctr">
+                      <a:solidFill>
+                        <a:srgbClr val="DCD2EC"/>
+                      </a:solidFill>
+                      <a:prstDash val="solid"/>
+                      <a:round/>
+                      <a:headEnd type="none" w="med" len="med"/>
+                      <a:tailEnd type="none" w="med" len="med"/>
+                    </a:lnL>
+                    <a:lnR w="9525" cap="flat" cmpd="sng" algn="ctr">
+                      <a:solidFill>
+                        <a:srgbClr val="DCD2EC"/>
+                      </a:solidFill>
+                      <a:prstDash val="solid"/>
+                      <a:round/>
+                      <a:headEnd type="none" w="med" len="med"/>
+                      <a:tailEnd type="none" w="med" len="med"/>
+                    </a:lnR>
+                    <a:lnT w="9525" cap="flat" cmpd="sng" algn="ctr">
+                      <a:solidFill>
+                        <a:srgbClr val="DCD2EC"/>
+                      </a:solidFill>
+                      <a:prstDash val="solid"/>
+                      <a:round/>
+                      <a:headEnd type="none" w="med" len="med"/>
+                      <a:tailEnd type="none" w="med" len="med"/>
+                    </a:lnT>
+                    <a:lnB w="9525" cap="flat" cmpd="sng" algn="ctr">
+                      <a:solidFill>
+                        <a:srgbClr val="DCD2EC"/>
+                      </a:solidFill>
+                      <a:prstDash val="solid"/>
+                      <a:round/>
+                      <a:headEnd type="none" w="med" len="med"/>
+                      <a:tailEnd type="none" w="med" len="med"/>
+                    </a:lnB>
+                    <a:solidFill>
+                      <a:srgbClr val="F3EEFB"/>
+                    </a:solidFill>
+                  </a:tcPr>
+                </a:tc>
+              </a:tr>
+              <a:tr h="274320">
+                <a:tc>
+                  <a:txBody>
+                    <a:bodyPr/>
+                    <a:lstStyle/>
+                    <a:p>
+                      <a:pPr algn="l" indent="0" marL="0">
+                        <a:buNone/>
+                      </a:pPr>
+                      <a:r>
+                        <a:rPr lang="en-US" sz="950" b="1" dirty="0">
+                          <a:solidFill>
+                            <a:srgbClr val="1F1235"/>
+                          </a:solidFill>
+                          <a:latin typeface="Arial" pitchFamily="34" charset="0"/>
+                          <a:ea typeface="Arial" pitchFamily="34" charset="-122"/>
+                          <a:cs typeface="Arial" pitchFamily="34" charset="-120"/>
+                        </a:rPr>
+                        <a:t>Saldo provisionado (fim de agosto)</a:t>
+                      </a:r>
+                      <a:endParaRPr lang="en-US" sz="950" dirty="0">
+                        <a:latin typeface="Arial" charset="0"/>
+                        <a:ea typeface="Arial" charset="0"/>
+                        <a:cs typeface="Arial" charset="0"/>
+                      </a:endParaRPr>
+                    </a:p>
+                  </a:txBody>
+                  <a:tcPr marL="54864" marR="54864" marT="54864" marB="54864" anchor="ctr">
+                    <a:lnL w="9525" cap="flat" cmpd="sng" algn="ctr">
+                      <a:solidFill>
+                        <a:srgbClr val="DCD2EC"/>
+                      </a:solidFill>
+                      <a:prstDash val="solid"/>
+                      <a:round/>
+                      <a:headEnd type="none" w="med" len="med"/>
+                      <a:tailEnd type="none" w="med" len="med"/>
+                    </a:lnL>
+                    <a:lnR w="9525" cap="flat" cmpd="sng" algn="ctr">
+                      <a:solidFill>
+                        <a:srgbClr val="DCD2EC"/>
+                      </a:solidFill>
+                      <a:prstDash val="solid"/>
+                      <a:round/>
+                      <a:headEnd type="none" w="med" len="med"/>
+                      <a:tailEnd type="none" w="med" len="med"/>
+                    </a:lnR>
+                    <a:lnT w="9525" cap="flat" cmpd="sng" algn="ctr">
+                      <a:solidFill>
+                        <a:srgbClr val="DCD2EC"/>
+                      </a:solidFill>
+                      <a:prstDash val="solid"/>
+                      <a:round/>
+                      <a:headEnd type="none" w="med" len="med"/>
+                      <a:tailEnd type="none" w="med" len="med"/>
+                    </a:lnT>
+                    <a:lnB w="9525" cap="flat" cmpd="sng" algn="ctr">
+                      <a:solidFill>
+                        <a:srgbClr val="DCD2EC"/>
+                      </a:solidFill>
+                      <a:prstDash val="solid"/>
+                      <a:round/>
+                      <a:headEnd type="none" w="med" len="med"/>
+                      <a:tailEnd type="none" w="med" len="med"/>
+                    </a:lnB>
+                    <a:solidFill>
+                      <a:srgbClr val="FFFFFF"/>
+                    </a:solidFill>
+                  </a:tcPr>
+                </a:tc>
+                <a:tc>
+                  <a:txBody>
+                    <a:bodyPr/>
+                    <a:lstStyle/>
+                    <a:p>
+                      <a:pPr algn="l" indent="0" marL="0">
+                        <a:buNone/>
+                      </a:pPr>
+                      <a:r>
+                        <a:rPr lang="en-US" sz="950" dirty="0">
+                          <a:solidFill>
+                            <a:srgbClr val="1F1235"/>
+                          </a:solidFill>
+                          <a:latin typeface="Arial" pitchFamily="34" charset="0"/>
+                          <a:ea typeface="Arial" pitchFamily="34" charset="-122"/>
+                          <a:cs typeface="Arial" pitchFamily="34" charset="-120"/>
+                        </a:rPr>
+                        <a:t>separado − usado</a:t>
+                      </a:r>
+                      <a:endParaRPr lang="en-US" sz="950" dirty="0">
+                        <a:latin typeface="Arial" charset="0"/>
+                        <a:ea typeface="Arial" charset="0"/>
+                        <a:cs typeface="Arial" charset="0"/>
+                      </a:endParaRPr>
+                    </a:p>
+                  </a:txBody>
+                  <a:tcPr marL="54864" marR="54864" marT="54864" marB="54864" anchor="ctr">
+                    <a:lnL w="9525" cap="flat" cmpd="sng" algn="ctr">
+                      <a:solidFill>
+                        <a:srgbClr val="DCD2EC"/>
+                      </a:solidFill>
+                      <a:prstDash val="solid"/>
+                      <a:round/>
+                      <a:headEnd type="none" w="med" len="med"/>
+                      <a:tailEnd type="none" w="med" len="med"/>
+                    </a:lnL>
+                    <a:lnR w="9525" cap="flat" cmpd="sng" algn="ctr">
+                      <a:solidFill>
+                        <a:srgbClr val="DCD2EC"/>
+                      </a:solidFill>
+                      <a:prstDash val="solid"/>
+                      <a:round/>
+                      <a:headEnd type="none" w="med" len="med"/>
+                      <a:tailEnd type="none" w="med" len="med"/>
+                    </a:lnR>
+                    <a:lnT w="9525" cap="flat" cmpd="sng" algn="ctr">
+                      <a:solidFill>
+                        <a:srgbClr val="DCD2EC"/>
+                      </a:solidFill>
+                      <a:prstDash val="solid"/>
+                      <a:round/>
+                      <a:headEnd type="none" w="med" len="med"/>
+                      <a:tailEnd type="none" w="med" len="med"/>
+                    </a:lnT>
+                    <a:lnB w="9525" cap="flat" cmpd="sng" algn="ctr">
+                      <a:solidFill>
+                        <a:srgbClr val="DCD2EC"/>
+                      </a:solidFill>
+                      <a:prstDash val="solid"/>
+                      <a:round/>
+                      <a:headEnd type="none" w="med" len="med"/>
+                      <a:tailEnd type="none" w="med" len="med"/>
+                    </a:lnB>
+                    <a:solidFill>
+                      <a:srgbClr val="FFFFFF"/>
+                    </a:solidFill>
+                  </a:tcPr>
+                </a:tc>
+                <a:tc>
+                  <a:txBody>
+                    <a:bodyPr/>
+                    <a:lstStyle/>
+                    <a:p>
+                      <a:pPr algn="r" indent="0" marL="0">
+                        <a:buNone/>
+                      </a:pPr>
+                      <a:endParaRPr lang="en-US" sz="950" dirty="0">
+                        <a:latin typeface="Arial" charset="0"/>
+                        <a:ea typeface="Arial" charset="0"/>
+                        <a:cs typeface="Arial" charset="0"/>
+                      </a:endParaRPr>
+                    </a:p>
+                  </a:txBody>
+                  <a:tcPr marL="54864" marR="54864" marT="54864" marB="54864" anchor="ctr">
+                    <a:lnL w="9525" cap="flat" cmpd="sng" algn="ctr">
+                      <a:solidFill>
+                        <a:srgbClr val="DCD2EC"/>
+                      </a:solidFill>
+                      <a:prstDash val="solid"/>
+                      <a:round/>
+                      <a:headEnd type="none" w="med" len="med"/>
+                      <a:tailEnd type="none" w="med" len="med"/>
+                    </a:lnL>
+                    <a:lnR w="9525" cap="flat" cmpd="sng" algn="ctr">
+                      <a:solidFill>
+                        <a:srgbClr val="DCD2EC"/>
+                      </a:solidFill>
+                      <a:prstDash val="solid"/>
+                      <a:round/>
+                      <a:headEnd type="none" w="med" len="med"/>
+                      <a:tailEnd type="none" w="med" len="med"/>
+                    </a:lnR>
+                    <a:lnT w="9525" cap="flat" cmpd="sng" algn="ctr">
+                      <a:solidFill>
+                        <a:srgbClr val="DCD2EC"/>
+                      </a:solidFill>
+                      <a:prstDash val="solid"/>
+                      <a:round/>
+                      <a:headEnd type="none" w="med" len="med"/>
+                      <a:tailEnd type="none" w="med" len="med"/>
+                    </a:lnT>
+                    <a:lnB w="9525" cap="flat" cmpd="sng" algn="ctr">
+                      <a:solidFill>
+                        <a:srgbClr val="DCD2EC"/>
+                      </a:solidFill>
+                      <a:prstDash val="solid"/>
+                      <a:round/>
+                      <a:headEnd type="none" w="med" len="med"/>
+                      <a:tailEnd type="none" w="med" len="med"/>
+                    </a:lnB>
+                    <a:solidFill>
+                      <a:srgbClr val="FFFFFF"/>
+                    </a:solidFill>
+                  </a:tcPr>
+                </a:tc>
+                <a:tc>
+                  <a:txBody>
+                    <a:bodyPr/>
+                    <a:lstStyle/>
+                    <a:p>
+                      <a:pPr algn="r" indent="0" marL="0">
+                        <a:buNone/>
+                      </a:pPr>
+                      <a:r>
+                        <a:rPr lang="en-US" sz="950" b="1" dirty="0">
+                          <a:solidFill>
+                            <a:srgbClr val="1F1235"/>
+                          </a:solidFill>
+                          <a:latin typeface="Arial" pitchFamily="34" charset="0"/>
+                          <a:ea typeface="Arial" pitchFamily="34" charset="-122"/>
+                          <a:cs typeface="Arial" pitchFamily="34" charset="-120"/>
+                        </a:rPr>
+                        <a:t>9.747</a:t>
+                      </a:r>
+                      <a:endParaRPr lang="en-US" sz="950" dirty="0">
                         <a:latin typeface="Arial" charset="0"/>
                         <a:ea typeface="Arial" charset="0"/>
                         <a:cs typeface="Arial" charset="0"/>
@@ -6121,8 +6791,8 @@
         </p:nvSpPr>
         <p:spPr>
           <a:xfrm>
-            <a:off x="457200" y="3520440"/>
-            <a:ext cx="8229600" cy="1097280"/>
+            <a:off x="457200" y="4069080"/>
+            <a:ext cx="7772400" cy="640080"/>
           </a:xfrm>
           <a:prstGeom prst="rect">
             <a:avLst/>
@@ -6141,7 +6811,7 @@
               <a:buNone/>
             </a:pPr>
             <a:r>
-              <a:rPr lang="en-US" sz="1050" b="1" dirty="0">
+              <a:rPr lang="en-US" sz="950" b="1" dirty="0">
                 <a:solidFill>
                   <a:srgbClr val="3B1F5E"/>
                 </a:solidFill>
@@ -6149,9 +6819,9 @@
                 <a:ea typeface="Arial" pitchFamily="34" charset="-122"/>
                 <a:cs typeface="Arial" pitchFamily="34" charset="-120"/>
               </a:rPr>
-              <a:t>Regra do escritório</a:t>
+              <a:t>Reserva do escritório (12)</a:t>
             </a:r>
-            <a:endParaRPr lang="en-US" sz="1050" dirty="0"/>
+            <a:endParaRPr lang="en-US" sz="950" dirty="0"/>
           </a:p>
           <a:p>
             <a:pPr marL="342900" indent="-342900">
@@ -6162,7 +6832,7 @@
               <a:buChar char="•"/>
             </a:pPr>
             <a:r>
-              <a:rPr lang="en-US" sz="1050" dirty="0">
+              <a:rPr lang="en-US" sz="950" dirty="0">
                 <a:solidFill>
                   <a:srgbClr val="1F1235"/>
                 </a:solidFill>
@@ -6170,197 +6840,11 @@
                 <a:ea typeface="Arial" pitchFamily="34" charset="-122"/>
                 <a:cs typeface="Arial" pitchFamily="34" charset="-120"/>
               </a:rPr>
-              <a:t>Impostos pagos no dia 20 do mês seguinte (regime de caixa); 13º e recesso pagos em dezembro e janeiro com o provisionado, sem usar o caixa do mês.</a:t>
+              <a:t>Alvo: três meses de custo fixo com pró-labore (R$ 55.500). Guardado: R$ 12.000. Aporte proposto pelos sócios: R$ 3.000 por mês a partir de setembro (meta em dezembro de 2027).</a:t>
             </a:r>
-            <a:endParaRPr lang="en-US" sz="1050" dirty="0"/>
-          </a:p>
-          <a:p>
-            <a:pPr indent="0" marL="0">
-              <a:spcAft>
-                <a:spcPts val="600"/>
-              </a:spcAft>
-              <a:buNone/>
-            </a:pPr>
-            <a:r>
-              <a:rPr lang="en-US" sz="1050" b="1" dirty="0">
-                <a:solidFill>
-                  <a:srgbClr val="3B1F5E"/>
-                </a:solidFill>
-                <a:latin typeface="Arial" pitchFamily="34" charset="0"/>
-                <a:ea typeface="Arial" pitchFamily="34" charset="-122"/>
-                <a:cs typeface="Arial" pitchFamily="34" charset="-120"/>
-              </a:rPr>
-              <a:t>Reserva</a:t>
-            </a:r>
-            <a:endParaRPr lang="en-US" sz="1050" dirty="0"/>
-          </a:p>
-          <a:p>
-            <a:pPr marL="342900" indent="-342900">
-              <a:spcAft>
-                <a:spcPts val="600"/>
-              </a:spcAft>
-              <a:buSzPct val="100000"/>
-              <a:buChar char="•"/>
-            </a:pPr>
-            <a:r>
-              <a:rPr lang="en-US" sz="1050" dirty="0">
-                <a:solidFill>
-                  <a:srgbClr val="1F1235"/>
-                </a:solidFill>
-                <a:latin typeface="Arial" pitchFamily="34" charset="0"/>
-                <a:ea typeface="Arial" pitchFamily="34" charset="-122"/>
-                <a:cs typeface="Arial" pitchFamily="34" charset="-120"/>
-              </a:rPr>
-              <a:t>Alvo: três meses de custo fixo com pró-labore (R$ 55,2 mil). Aporte aprovado pelos sócios: R$ 4.000 por mês a partir de outubro (planilha 12).</a:t>
-            </a:r>
-            <a:endParaRPr lang="en-US" sz="1050" dirty="0"/>
+            <a:endParaRPr lang="en-US" sz="950" dirty="0"/>
           </a:p>
         </p:txBody>
-      </p:sp>
-      <p:sp>
-        <p:nvSpPr>
-          <p:cNvPr id="6" name="Text 3"/>
-          <p:cNvSpPr txBox="1"/>
-          <p:nvPr/>
-        </p:nvSpPr>
-        <p:spPr>
-          <a:xfrm>
-            <a:off x="457200" y="4791456"/>
-            <a:ext cx="6858000" cy="201168"/>
-          </a:xfrm>
-          <a:prstGeom prst="rect">
-            <a:avLst/>
-          </a:prstGeom>
-          <a:noFill/>
-          <a:ln/>
-        </p:spPr>
-        <p:txBody>
-          <a:bodyPr wrap="square" lIns="0" tIns="0" rIns="0" bIns="0" rtlCol="0" anchor="ctr"/>
-          <a:lstStyle/>
-          <a:p>
-            <a:pPr indent="0" marL="0">
-              <a:buNone/>
-            </a:pPr>
-            <a:r>
-              <a:rPr lang="en-US" sz="700" dirty="0">
-                <a:solidFill>
-                  <a:srgbClr val="B89BE0"/>
-                </a:solidFill>
-                <a:latin typeface="Arial" pitchFamily="34" charset="0"/>
-                <a:ea typeface="Arial" pitchFamily="34" charset="-122"/>
-                <a:cs typeface="Arial" pitchFamily="34" charset="-120"/>
-              </a:rPr>
-              <a:t>Kit de Gestão para Advogados · modelo v1.0 · set/2026</a:t>
-            </a:r>
-            <a:endParaRPr lang="en-US" sz="700" dirty="0"/>
-          </a:p>
-        </p:txBody>
-      </p:sp>
-      <p:sp>
-        <p:nvSpPr>
-          <p:cNvPr id="7" name="Shape 4"/>
-          <p:cNvSpPr/>
-          <p:nvPr/>
-        </p:nvSpPr>
-        <p:spPr>
-          <a:xfrm>
-            <a:off x="8229600" y="4818888"/>
-            <a:ext cx="211226" cy="70409"/>
-          </a:xfrm>
-          <a:prstGeom prst="roundRect">
-            <a:avLst>
-              <a:gd name="adj" fmla="val 42857"/>
-            </a:avLst>
-          </a:prstGeom>
-          <a:solidFill>
-            <a:srgbClr val="7A5AA8"/>
-          </a:solidFill>
-          <a:ln w="12700">
-            <a:solidFill>
-              <a:srgbClr val="7A5AA8"/>
-            </a:solidFill>
-            <a:prstDash val="solid"/>
-          </a:ln>
-        </p:spPr>
-      </p:sp>
-      <p:sp>
-        <p:nvSpPr>
-          <p:cNvPr id="8" name="Shape 5"/>
-          <p:cNvSpPr/>
-          <p:nvPr/>
-        </p:nvSpPr>
-        <p:spPr>
-          <a:xfrm>
-            <a:off x="8279892" y="4728362"/>
-            <a:ext cx="211226" cy="70409"/>
-          </a:xfrm>
-          <a:prstGeom prst="roundRect">
-            <a:avLst>
-              <a:gd name="adj" fmla="val 42857"/>
-            </a:avLst>
-          </a:prstGeom>
-          <a:solidFill>
-            <a:srgbClr val="3B1F5E"/>
-          </a:solidFill>
-          <a:ln w="12700">
-            <a:solidFill>
-              <a:srgbClr val="3B1F5E"/>
-            </a:solidFill>
-            <a:prstDash val="solid"/>
-          </a:ln>
-        </p:spPr>
-      </p:sp>
-      <p:sp>
-        <p:nvSpPr>
-          <p:cNvPr id="9" name="Shape 6"/>
-          <p:cNvSpPr/>
-          <p:nvPr/>
-        </p:nvSpPr>
-        <p:spPr>
-          <a:xfrm>
-            <a:off x="8330184" y="4637837"/>
-            <a:ext cx="211226" cy="70409"/>
-          </a:xfrm>
-          <a:prstGeom prst="roundRect">
-            <a:avLst>
-              <a:gd name="adj" fmla="val 42857"/>
-            </a:avLst>
-          </a:prstGeom>
-          <a:solidFill>
-            <a:srgbClr val="3B1F5E"/>
-          </a:solidFill>
-          <a:ln w="12700">
-            <a:solidFill>
-              <a:srgbClr val="3B1F5E"/>
-            </a:solidFill>
-            <a:prstDash val="solid"/>
-          </a:ln>
-        </p:spPr>
-      </p:sp>
-      <p:sp>
-        <p:nvSpPr>
-          <p:cNvPr id="10" name="Shape 7"/>
-          <p:cNvSpPr/>
-          <p:nvPr/>
-        </p:nvSpPr>
-        <p:spPr>
-          <a:xfrm>
-            <a:off x="8541410" y="4839005"/>
-            <a:ext cx="65380" cy="65380"/>
-          </a:xfrm>
-          <a:prstGeom prst="ellipse">
-            <a:avLst/>
-          </a:prstGeom>
-          <a:solidFill>
-            <a:srgbClr val="FFC83D"/>
-          </a:solidFill>
-          <a:ln w="12700">
-            <a:solidFill>
-              <a:srgbClr val="FFC83D"/>
-            </a:solidFill>
-            <a:prstDash val="solid"/>
-          </a:ln>
-        </p:spPr>
       </p:sp>
     </p:spTree>
   </p:cSld>
@@ -6373,13 +6857,6 @@
 <file path=ppt/slides/slide5.xml><?xml version="1.0" encoding="utf-8"?>
 <p:sld xmlns:a="http://schemas.openxmlformats.org/drawingml/2006/main" xmlns:r="http://schemas.openxmlformats.org/officeDocument/2006/relationships" xmlns:p="http://schemas.openxmlformats.org/presentationml/2006/main">
   <p:cSld name="Slide 5">
-    <p:bg>
-      <p:bgPr>
-        <a:solidFill>
-          <a:srgbClr val="FFFFFF"/>
-        </a:solidFill>
-      </p:bgPr>
-    </p:bg>
     <p:spTree>
       <p:nvGrpSpPr>
         <p:cNvPr id="1" name=""/>
@@ -6468,7 +6945,7 @@
                 <a:ea typeface="Arial" pitchFamily="34" charset="-122"/>
                 <a:cs typeface="Arial" pitchFamily="34" charset="-120"/>
               </a:rPr>
-              <a:t>Carteira de clientes e casos (13) e Parcelas e inadimplência (14), posição de 30/9.</a:t>
+              <a:t>Carteira de clientes e casos (13) e Parcelas e inadimplência (14), posição de sexta, 11/09. Só totais.</a:t>
             </a:r>
             <a:endParaRPr lang="en-US" sz="1200" dirty="0"/>
           </a:p>
@@ -6536,7 +7013,7 @@
                 <a:ea typeface="Arial" pitchFamily="34" charset="-122"/>
                 <a:cs typeface="Arial" pitchFamily="34" charset="-120"/>
               </a:rPr>
-              <a:t>R$ 128,3 mil</a:t>
+              <a:t>R$ 111.990</a:t>
             </a:r>
             <a:endParaRPr lang="en-US" sz="2600" dirty="0"/>
           </a:p>
@@ -6614,7 +7091,7 @@
                 <a:ea typeface="Arial" pitchFamily="34" charset="-122"/>
                 <a:cs typeface="Arial" pitchFamily="34" charset="-120"/>
               </a:rPr>
-              <a:t>contratado menos recebido nos 38 casos</a:t>
+              <a:t>contratado menos recebido nos 30 casos ativos</a:t>
             </a:r>
             <a:endParaRPr lang="en-US" sz="1050" dirty="0"/>
           </a:p>
@@ -6682,7 +7159,7 @@
                 <a:ea typeface="Arial" pitchFamily="34" charset="-122"/>
                 <a:cs typeface="Arial" pitchFamily="34" charset="-120"/>
               </a:rPr>
-              <a:t>R$ 21,6 mil</a:t>
+              <a:t>R$ 14.480</a:t>
             </a:r>
             <a:endParaRPr lang="en-US" sz="2600" dirty="0"/>
           </a:p>
@@ -6721,7 +7198,7 @@
                 <a:ea typeface="Arial" pitchFamily="34" charset="-122"/>
                 <a:cs typeface="Arial" pitchFamily="34" charset="-120"/>
               </a:rPr>
-              <a:t>Vencido (16,8%)</a:t>
+              <a:t>Vencido (5,1 %)</a:t>
             </a:r>
             <a:endParaRPr lang="en-US" sz="1300" dirty="0"/>
           </a:p>
@@ -6760,7 +7237,7 @@
                 <a:ea typeface="Arial" pitchFamily="34" charset="-122"/>
                 <a:cs typeface="Arial" pitchFamily="34" charset="-120"/>
               </a:rPr>
-              <a:t>julho R$ 23,6 mil · agosto R$ 20,9 mil</a:t>
+              <a:t>8 parcelas; fim de agosto R$ 12.500 (4,5 %) · julho R$ 8.900 (3,6 %)</a:t>
             </a:r>
             <a:endParaRPr lang="en-US" sz="1050" dirty="0"/>
           </a:p>
@@ -6828,7 +7305,7 @@
                 <a:ea typeface="Arial" pitchFamily="34" charset="-122"/>
                 <a:cs typeface="Arial" pitchFamily="34" charset="-120"/>
               </a:rPr>
-              <a:t>R$ 36,0 mil</a:t>
+              <a:t>R$ 30.000</a:t>
             </a:r>
             <a:endParaRPr lang="en-US" sz="2600" dirty="0"/>
           </a:p>
@@ -6906,7 +7383,7 @@
                 <a:ea typeface="Arial" pitchFamily="34" charset="-122"/>
                 <a:cs typeface="Arial" pitchFamily="34" charset="-120"/>
               </a:rPr>
-              <a:t>4 casos; entra só no fim, não é atraso</a:t>
+              <a:t>5 casos de êxito puro; entra só no fim, não é atraso</a:t>
             </a:r>
             <a:endParaRPr lang="en-US" sz="1050" dirty="0"/>
           </a:p>
@@ -6921,7 +7398,7 @@
         <p:spPr>
           <a:xfrm>
             <a:off x="457200" y="3337560"/>
-            <a:ext cx="8229600" cy="1280160"/>
+            <a:ext cx="8229600" cy="1325880"/>
           </a:xfrm>
           <a:prstGeom prst="rect">
             <a:avLst/>
@@ -6940,7 +7417,7 @@
               <a:buNone/>
             </a:pPr>
             <a:r>
-              <a:rPr lang="en-US" sz="1100" b="1" dirty="0">
+              <a:rPr lang="en-US" sz="1000" b="1" dirty="0">
                 <a:solidFill>
                   <a:srgbClr val="3B1F5E"/>
                 </a:solidFill>
@@ -6950,7 +7427,7 @@
               </a:rPr>
               <a:t>O que o contador precisa saber</a:t>
             </a:r>
-            <a:endParaRPr lang="en-US" sz="1100" dirty="0"/>
+            <a:endParaRPr lang="en-US" sz="1000" dirty="0"/>
           </a:p>
           <a:p>
             <a:pPr marL="342900" indent="-342900">
@@ -6961,7 +7438,7 @@
               <a:buChar char="•"/>
             </a:pPr>
             <a:r>
-              <a:rPr lang="en-US" sz="1100" dirty="0">
+              <a:rPr lang="en-US" sz="1000" dirty="0">
                 <a:solidFill>
                   <a:srgbClr val="1F1235"/>
                 </a:solidFill>
@@ -6969,9 +7446,9 @@
                 <a:ea typeface="Arial" pitchFamily="34" charset="-122"/>
                 <a:cs typeface="Arial" pitchFamily="34" charset="-120"/>
               </a:rPr>
-              <a:t>Com parcelas datadas (fixo, hora e misto): R$ 92,3 mil em 15 casos. Sem data (êxito): R$ 36 mil em 4 casos.</a:t>
+              <a:t>Com parcelas datadas (fixo, hora e misto): R$ 56.730 em aberto na planilha 14, dos quais R$ 14.480 vencidos (6 parcelas há mais de 30 dias, R$ 11.000). Sem data (êxito): R$ 30.000 em 5 casos, mais a parte de êxito de 6 casos mistos.</a:t>
             </a:r>
-            <a:endParaRPr lang="en-US" sz="1100" dirty="0"/>
+            <a:endParaRPr lang="en-US" sz="1000" dirty="0"/>
           </a:p>
           <a:p>
             <a:pPr marL="342900" indent="-342900">
@@ -6982,7 +7459,7 @@
               <a:buChar char="•"/>
             </a:pPr>
             <a:r>
-              <a:rPr lang="en-US" sz="1100" dirty="0">
+              <a:rPr lang="en-US" sz="1000" dirty="0">
                 <a:solidFill>
                   <a:srgbClr val="1F1235"/>
                 </a:solidFill>
@@ -6990,9 +7467,9 @@
                 <a:ea typeface="Arial" pitchFamily="34" charset="-122"/>
                 <a:cs typeface="Arial" pitchFamily="34" charset="-120"/>
               </a:rPr>
-              <a:t>Nenhuma parcela foi dada como perdida em 2026; a régua de cobrança está em andamento nos R$ 21,6 mil vencidos.</a:t>
+              <a:t>Inadimplência = vencido ÷ (pago + vencido): R$ 14.480 ÷ (R$ 271.910 + R$ 14.480). Nenhuma parcela foi dada como perdida em 2026; a régua de cobrança está em andamento.</a:t>
             </a:r>
-            <a:endParaRPr lang="en-US" sz="1100" dirty="0"/>
+            <a:endParaRPr lang="en-US" sz="1000" dirty="0"/>
           </a:p>
           <a:p>
             <a:pPr marL="342900" indent="-342900">
@@ -7003,7 +7480,7 @@
               <a:buChar char="•"/>
             </a:pPr>
             <a:r>
-              <a:rPr lang="en-US" sz="1100" dirty="0">
+              <a:rPr lang="en-US" sz="1000" dirty="0">
                 <a:solidFill>
                   <a:srgbClr val="1F1235"/>
                 </a:solidFill>
@@ -7011,156 +7488,11 @@
                 <a:ea typeface="Arial" pitchFamily="34" charset="-122"/>
                 <a:cs typeface="Arial" pitchFamily="34" charset="-120"/>
               </a:rPr>
-              <a:t>Recebido de janeiro a setembro: R$ 220,6 mil, contra R$ 374,2 mil contratados na carteira.</a:t>
+              <a:t>Carteira: R$ 383.900 contratados e R$ 271.910 recebidos (inclui 2025); recebido em 2026 até 11/09: R$ 213.070 (caixa).</a:t>
             </a:r>
-            <a:endParaRPr lang="en-US" sz="1100" dirty="0"/>
+            <a:endParaRPr lang="en-US" sz="1000" dirty="0"/>
           </a:p>
         </p:txBody>
-      </p:sp>
-      <p:sp>
-        <p:nvSpPr>
-          <p:cNvPr id="17" name="Text 15"/>
-          <p:cNvSpPr txBox="1"/>
-          <p:nvPr/>
-        </p:nvSpPr>
-        <p:spPr>
-          <a:xfrm>
-            <a:off x="457200" y="4791456"/>
-            <a:ext cx="6858000" cy="201168"/>
-          </a:xfrm>
-          <a:prstGeom prst="rect">
-            <a:avLst/>
-          </a:prstGeom>
-          <a:noFill/>
-          <a:ln/>
-        </p:spPr>
-        <p:txBody>
-          <a:bodyPr wrap="square" lIns="0" tIns="0" rIns="0" bIns="0" rtlCol="0" anchor="ctr"/>
-          <a:lstStyle/>
-          <a:p>
-            <a:pPr indent="0" marL="0">
-              <a:buNone/>
-            </a:pPr>
-            <a:r>
-              <a:rPr lang="en-US" sz="700" dirty="0">
-                <a:solidFill>
-                  <a:srgbClr val="B89BE0"/>
-                </a:solidFill>
-                <a:latin typeface="Arial" pitchFamily="34" charset="0"/>
-                <a:ea typeface="Arial" pitchFamily="34" charset="-122"/>
-                <a:cs typeface="Arial" pitchFamily="34" charset="-120"/>
-              </a:rPr>
-              <a:t>Kit de Gestão para Advogados · modelo v1.0 · set/2026</a:t>
-            </a:r>
-            <a:endParaRPr lang="en-US" sz="700" dirty="0"/>
-          </a:p>
-        </p:txBody>
-      </p:sp>
-      <p:sp>
-        <p:nvSpPr>
-          <p:cNvPr id="18" name="Shape 16"/>
-          <p:cNvSpPr/>
-          <p:nvPr/>
-        </p:nvSpPr>
-        <p:spPr>
-          <a:xfrm>
-            <a:off x="8229600" y="4818888"/>
-            <a:ext cx="211226" cy="70409"/>
-          </a:xfrm>
-          <a:prstGeom prst="roundRect">
-            <a:avLst>
-              <a:gd name="adj" fmla="val 42857"/>
-            </a:avLst>
-          </a:prstGeom>
-          <a:solidFill>
-            <a:srgbClr val="7A5AA8"/>
-          </a:solidFill>
-          <a:ln w="12700">
-            <a:solidFill>
-              <a:srgbClr val="7A5AA8"/>
-            </a:solidFill>
-            <a:prstDash val="solid"/>
-          </a:ln>
-        </p:spPr>
-      </p:sp>
-      <p:sp>
-        <p:nvSpPr>
-          <p:cNvPr id="19" name="Shape 17"/>
-          <p:cNvSpPr/>
-          <p:nvPr/>
-        </p:nvSpPr>
-        <p:spPr>
-          <a:xfrm>
-            <a:off x="8279892" y="4728362"/>
-            <a:ext cx="211226" cy="70409"/>
-          </a:xfrm>
-          <a:prstGeom prst="roundRect">
-            <a:avLst>
-              <a:gd name="adj" fmla="val 42857"/>
-            </a:avLst>
-          </a:prstGeom>
-          <a:solidFill>
-            <a:srgbClr val="3B1F5E"/>
-          </a:solidFill>
-          <a:ln w="12700">
-            <a:solidFill>
-              <a:srgbClr val="3B1F5E"/>
-            </a:solidFill>
-            <a:prstDash val="solid"/>
-          </a:ln>
-        </p:spPr>
-      </p:sp>
-      <p:sp>
-        <p:nvSpPr>
-          <p:cNvPr id="20" name="Shape 18"/>
-          <p:cNvSpPr/>
-          <p:nvPr/>
-        </p:nvSpPr>
-        <p:spPr>
-          <a:xfrm>
-            <a:off x="8330184" y="4637837"/>
-            <a:ext cx="211226" cy="70409"/>
-          </a:xfrm>
-          <a:prstGeom prst="roundRect">
-            <a:avLst>
-              <a:gd name="adj" fmla="val 42857"/>
-            </a:avLst>
-          </a:prstGeom>
-          <a:solidFill>
-            <a:srgbClr val="3B1F5E"/>
-          </a:solidFill>
-          <a:ln w="12700">
-            <a:solidFill>
-              <a:srgbClr val="3B1F5E"/>
-            </a:solidFill>
-            <a:prstDash val="solid"/>
-          </a:ln>
-        </p:spPr>
-      </p:sp>
-      <p:sp>
-        <p:nvSpPr>
-          <p:cNvPr id="21" name="Shape 19"/>
-          <p:cNvSpPr/>
-          <p:nvPr/>
-        </p:nvSpPr>
-        <p:spPr>
-          <a:xfrm>
-            <a:off x="8541410" y="4839005"/>
-            <a:ext cx="65380" cy="65380"/>
-          </a:xfrm>
-          <a:prstGeom prst="ellipse">
-            <a:avLst/>
-          </a:prstGeom>
-          <a:solidFill>
-            <a:srgbClr val="FFC83D"/>
-          </a:solidFill>
-          <a:ln w="12700">
-            <a:solidFill>
-              <a:srgbClr val="FFC83D"/>
-            </a:solidFill>
-            <a:prstDash val="solid"/>
-          </a:ln>
-        </p:spPr>
       </p:sp>
     </p:spTree>
   </p:cSld>
@@ -7173,13 +7505,6 @@
 <file path=ppt/slides/slide6.xml><?xml version="1.0" encoding="utf-8"?>
 <p:sld xmlns:a="http://schemas.openxmlformats.org/drawingml/2006/main" xmlns:r="http://schemas.openxmlformats.org/officeDocument/2006/relationships" xmlns:p="http://schemas.openxmlformats.org/presentationml/2006/main">
   <p:cSld name="Slide 6">
-    <p:bg>
-      <p:bgPr>
-        <a:solidFill>
-          <a:srgbClr val="FFFFFF"/>
-        </a:solidFill>
-      </p:bgPr>
-    </p:bg>
     <p:spTree>
       <p:nvGrpSpPr>
         <p:cNvPr id="1" name=""/>
@@ -7268,7 +7593,7 @@
                 <a:ea typeface="Arial" pitchFamily="34" charset="-122"/>
                 <a:cs typeface="Arial" pitchFamily="34" charset="-120"/>
               </a:rPr>
-              <a:t>Pró-labore e separação pessoa física × escritório (11). Pagamento no dia 28, sempre da conta do escritório.</a:t>
+              <a:t>Pró-labore e separação pessoa física × escritório (11). Pagamento no dia 28, sempre da conta do escritório. Janeiro a agosto.</a:t>
             </a:r>
             <a:endParaRPr lang="en-US" sz="1200" dirty="0"/>
           </a:p>
@@ -7290,20 +7615,23 @@
         </p:nvGraphicFramePr>
         <p:xfrm>
           <a:off x="457200" y="1463040"/>
-          <a:ext cx="8229600" cy="914400"/>
+          <a:ext cx="8412480" cy="914400"/>
         </p:xfrm>
         <a:graphic>
           <a:graphicData uri="http://schemas.openxmlformats.org/drawingml/2006/table">
             <a:tbl>
               <a:tblPr/>
               <a:tblGrid>
-                <a:gridCol w="2377440"/>
-                <a:gridCol w="1371600"/>
                 <a:gridCol w="1463040"/>
-                <a:gridCol w="1371600"/>
-                <a:gridCol w="1645920"/>
+                <a:gridCol w="1005840"/>
+                <a:gridCol w="1005840"/>
+                <a:gridCol w="960120"/>
+                <a:gridCol w="1234440"/>
+                <a:gridCol w="868680"/>
+                <a:gridCol w="868680"/>
+                <a:gridCol w="1005840"/>
               </a:tblGrid>
-              <a:tr h="411480">
+              <a:tr h="457200">
                 <a:tc>
                   <a:txBody>
                     <a:bodyPr/>
@@ -7313,7 +7641,7 @@
                         <a:buNone/>
                       </a:pPr>
                       <a:r>
-                        <a:rPr lang="en-US" sz="1050" b="1" dirty="0">
+                        <a:rPr lang="en-US" sz="950" b="1" dirty="0">
                           <a:solidFill>
                             <a:srgbClr val="FFFFFF"/>
                           </a:solidFill>
@@ -7321,9 +7649,9 @@
                           <a:ea typeface="Arial" pitchFamily="34" charset="-122"/>
                           <a:cs typeface="Arial" pitchFamily="34" charset="-120"/>
                         </a:rPr>
-                        <a:t>Pessoa</a:t>
+                        <a:t>Sócio</a:t>
                       </a:r>
-                      <a:endParaRPr lang="en-US" sz="1050" dirty="0">
+                      <a:endParaRPr lang="en-US" sz="950" dirty="0">
                         <a:latin typeface="Arial" charset="0"/>
                         <a:ea typeface="Arial" charset="0"/>
                         <a:cs typeface="Arial" charset="0"/>
@@ -7381,7 +7709,7 @@
                         <a:buNone/>
                       </a:pPr>
                       <a:r>
-                        <a:rPr lang="en-US" sz="1050" b="1" dirty="0">
+                        <a:rPr lang="en-US" sz="950" b="1" dirty="0">
                           <a:solidFill>
                             <a:srgbClr val="FFFFFF"/>
                           </a:solidFill>
@@ -7391,7 +7719,7 @@
                         </a:rPr>
                         <a:t>Pró-labore mensal</a:t>
                       </a:r>
-                      <a:endParaRPr lang="en-US" sz="1050" dirty="0">
+                      <a:endParaRPr lang="en-US" sz="950" dirty="0">
                         <a:latin typeface="Arial" charset="0"/>
                         <a:ea typeface="Arial" charset="0"/>
                         <a:cs typeface="Arial" charset="0"/>
@@ -7449,7 +7777,7 @@
                         <a:buNone/>
                       </a:pPr>
                       <a:r>
-                        <a:rPr lang="en-US" sz="1050" b="1" dirty="0">
+                        <a:rPr lang="en-US" sz="950" b="1" dirty="0">
                           <a:solidFill>
                             <a:srgbClr val="FFFFFF"/>
                           </a:solidFill>
@@ -7457,9 +7785,9 @@
                           <a:ea typeface="Arial" pitchFamily="34" charset="-122"/>
                           <a:cs typeface="Arial" pitchFamily="34" charset="-120"/>
                         </a:rPr>
-                        <a:t>Janeiro a setembro</a:t>
+                        <a:t>Pago jan–ago</a:t>
                       </a:r>
-                      <a:endParaRPr lang="en-US" sz="1050" dirty="0">
+                      <a:endParaRPr lang="en-US" sz="950" dirty="0">
                         <a:latin typeface="Arial" charset="0"/>
                         <a:ea typeface="Arial" charset="0"/>
                         <a:cs typeface="Arial" charset="0"/>
@@ -7517,7 +7845,7 @@
                         <a:buNone/>
                       </a:pPr>
                       <a:r>
-                        <a:rPr lang="en-US" sz="1050" b="1" dirty="0">
+                        <a:rPr lang="en-US" sz="950" b="1" dirty="0">
                           <a:solidFill>
                             <a:srgbClr val="FFFFFF"/>
                           </a:solidFill>
@@ -7527,7 +7855,7 @@
                         </a:rPr>
                         <a:t>Retiradas extras</a:t>
                       </a:r>
-                      <a:endParaRPr lang="en-US" sz="1050" dirty="0">
+                      <a:endParaRPr lang="en-US" sz="950" dirty="0">
                         <a:latin typeface="Arial" charset="0"/>
                         <a:ea typeface="Arial" charset="0"/>
                         <a:cs typeface="Arial" charset="0"/>
@@ -7585,7 +7913,7 @@
                         <a:buNone/>
                       </a:pPr>
                       <a:r>
-                        <a:rPr lang="en-US" sz="1050" b="1" dirty="0">
+                        <a:rPr lang="en-US" sz="950" b="1" dirty="0">
                           <a:solidFill>
                             <a:srgbClr val="FFFFFF"/>
                           </a:solidFill>
@@ -7593,9 +7921,9 @@
                           <a:ea typeface="Arial" pitchFamily="34" charset="-122"/>
                           <a:cs typeface="Arial" pitchFamily="34" charset="-120"/>
                         </a:rPr>
-                        <a:t>Distribuição proposta (out.)</a:t>
+                        <a:t>Despesas pessoais pelo escritório</a:t>
                       </a:r>
-                      <a:endParaRPr lang="en-US" sz="1050" dirty="0">
+                      <a:endParaRPr lang="en-US" sz="950" dirty="0">
                         <a:latin typeface="Arial" charset="0"/>
                         <a:ea typeface="Arial" charset="0"/>
                         <a:cs typeface="Arial" charset="0"/>
@@ -7644,8 +7972,212 @@
                     </a:solidFill>
                   </a:tcPr>
                 </a:tc>
+                <a:tc>
+                  <a:txBody>
+                    <a:bodyPr/>
+                    <a:lstStyle/>
+                    <a:p>
+                      <a:pPr algn="r" indent="0" marL="0">
+                        <a:buNone/>
+                      </a:pPr>
+                      <a:r>
+                        <a:rPr lang="en-US" sz="950" b="1" dirty="0">
+                          <a:solidFill>
+                            <a:srgbClr val="FFFFFF"/>
+                          </a:solidFill>
+                          <a:latin typeface="Arial" pitchFamily="34" charset="0"/>
+                          <a:ea typeface="Arial" pitchFamily="34" charset="-122"/>
+                          <a:cs typeface="Arial" pitchFamily="34" charset="-120"/>
+                        </a:rPr>
+                        <a:t>Devoluções</a:t>
+                      </a:r>
+                      <a:endParaRPr lang="en-US" sz="950" dirty="0">
+                        <a:latin typeface="Arial" charset="0"/>
+                        <a:ea typeface="Arial" charset="0"/>
+                        <a:cs typeface="Arial" charset="0"/>
+                      </a:endParaRPr>
+                    </a:p>
+                  </a:txBody>
+                  <a:tcPr marL="54864" marR="54864" marT="54864" marB="54864" anchor="ctr">
+                    <a:lnL w="9525" cap="flat" cmpd="sng" algn="ctr">
+                      <a:solidFill>
+                        <a:srgbClr val="DCD2EC"/>
+                      </a:solidFill>
+                      <a:prstDash val="solid"/>
+                      <a:round/>
+                      <a:headEnd type="none" w="med" len="med"/>
+                      <a:tailEnd type="none" w="med" len="med"/>
+                    </a:lnL>
+                    <a:lnR w="9525" cap="flat" cmpd="sng" algn="ctr">
+                      <a:solidFill>
+                        <a:srgbClr val="DCD2EC"/>
+                      </a:solidFill>
+                      <a:prstDash val="solid"/>
+                      <a:round/>
+                      <a:headEnd type="none" w="med" len="med"/>
+                      <a:tailEnd type="none" w="med" len="med"/>
+                    </a:lnR>
+                    <a:lnT w="9525" cap="flat" cmpd="sng" algn="ctr">
+                      <a:solidFill>
+                        <a:srgbClr val="DCD2EC"/>
+                      </a:solidFill>
+                      <a:prstDash val="solid"/>
+                      <a:round/>
+                      <a:headEnd type="none" w="med" len="med"/>
+                      <a:tailEnd type="none" w="med" len="med"/>
+                    </a:lnT>
+                    <a:lnB w="9525" cap="flat" cmpd="sng" algn="ctr">
+                      <a:solidFill>
+                        <a:srgbClr val="DCD2EC"/>
+                      </a:solidFill>
+                      <a:prstDash val="solid"/>
+                      <a:round/>
+                      <a:headEnd type="none" w="med" len="med"/>
+                      <a:tailEnd type="none" w="med" len="med"/>
+                    </a:lnB>
+                    <a:solidFill>
+                      <a:srgbClr val="3B1F5E"/>
+                    </a:solidFill>
+                  </a:tcPr>
+                </a:tc>
+                <a:tc>
+                  <a:txBody>
+                    <a:bodyPr/>
+                    <a:lstStyle/>
+                    <a:p>
+                      <a:pPr algn="r" indent="0" marL="0">
+                        <a:buNone/>
+                      </a:pPr>
+                      <a:r>
+                        <a:rPr lang="en-US" sz="950" b="1" dirty="0">
+                          <a:solidFill>
+                            <a:srgbClr val="FFFFFF"/>
+                          </a:solidFill>
+                          <a:latin typeface="Arial" pitchFamily="34" charset="0"/>
+                          <a:ea typeface="Arial" pitchFamily="34" charset="-122"/>
+                          <a:cs typeface="Arial" pitchFamily="34" charset="-120"/>
+                        </a:rPr>
+                        <a:t>A acertar</a:t>
+                      </a:r>
+                      <a:endParaRPr lang="en-US" sz="950" dirty="0">
+                        <a:latin typeface="Arial" charset="0"/>
+                        <a:ea typeface="Arial" charset="0"/>
+                        <a:cs typeface="Arial" charset="0"/>
+                      </a:endParaRPr>
+                    </a:p>
+                  </a:txBody>
+                  <a:tcPr marL="54864" marR="54864" marT="54864" marB="54864" anchor="ctr">
+                    <a:lnL w="9525" cap="flat" cmpd="sng" algn="ctr">
+                      <a:solidFill>
+                        <a:srgbClr val="DCD2EC"/>
+                      </a:solidFill>
+                      <a:prstDash val="solid"/>
+                      <a:round/>
+                      <a:headEnd type="none" w="med" len="med"/>
+                      <a:tailEnd type="none" w="med" len="med"/>
+                    </a:lnL>
+                    <a:lnR w="9525" cap="flat" cmpd="sng" algn="ctr">
+                      <a:solidFill>
+                        <a:srgbClr val="DCD2EC"/>
+                      </a:solidFill>
+                      <a:prstDash val="solid"/>
+                      <a:round/>
+                      <a:headEnd type="none" w="med" len="med"/>
+                      <a:tailEnd type="none" w="med" len="med"/>
+                    </a:lnR>
+                    <a:lnT w="9525" cap="flat" cmpd="sng" algn="ctr">
+                      <a:solidFill>
+                        <a:srgbClr val="DCD2EC"/>
+                      </a:solidFill>
+                      <a:prstDash val="solid"/>
+                      <a:round/>
+                      <a:headEnd type="none" w="med" len="med"/>
+                      <a:tailEnd type="none" w="med" len="med"/>
+                    </a:lnT>
+                    <a:lnB w="9525" cap="flat" cmpd="sng" algn="ctr">
+                      <a:solidFill>
+                        <a:srgbClr val="DCD2EC"/>
+                      </a:solidFill>
+                      <a:prstDash val="solid"/>
+                      <a:round/>
+                      <a:headEnd type="none" w="med" len="med"/>
+                      <a:tailEnd type="none" w="med" len="med"/>
+                    </a:lnB>
+                    <a:solidFill>
+                      <a:srgbClr val="3B1F5E"/>
+                    </a:solidFill>
+                  </a:tcPr>
+                </a:tc>
+                <a:tc>
+                  <a:txBody>
+                    <a:bodyPr/>
+                    <a:lstStyle/>
+                    <a:p>
+                      <a:pPr algn="r" indent="0" marL="0">
+                        <a:buNone/>
+                      </a:pPr>
+                      <a:r>
+                        <a:rPr lang="en-US" sz="950" b="1" dirty="0">
+                          <a:solidFill>
+                            <a:srgbClr val="FFFFFF"/>
+                          </a:solidFill>
+                          <a:latin typeface="Arial" pitchFamily="34" charset="0"/>
+                          <a:ea typeface="Arial" pitchFamily="34" charset="-122"/>
+                          <a:cs typeface="Arial" pitchFamily="34" charset="-120"/>
+                        </a:rPr>
+                        <a:t>Distribuição recebida</a:t>
+                      </a:r>
+                      <a:endParaRPr lang="en-US" sz="950" dirty="0">
+                        <a:latin typeface="Arial" charset="0"/>
+                        <a:ea typeface="Arial" charset="0"/>
+                        <a:cs typeface="Arial" charset="0"/>
+                      </a:endParaRPr>
+                    </a:p>
+                  </a:txBody>
+                  <a:tcPr marL="54864" marR="54864" marT="54864" marB="54864" anchor="ctr">
+                    <a:lnL w="9525" cap="flat" cmpd="sng" algn="ctr">
+                      <a:solidFill>
+                        <a:srgbClr val="DCD2EC"/>
+                      </a:solidFill>
+                      <a:prstDash val="solid"/>
+                      <a:round/>
+                      <a:headEnd type="none" w="med" len="med"/>
+                      <a:tailEnd type="none" w="med" len="med"/>
+                    </a:lnL>
+                    <a:lnR w="9525" cap="flat" cmpd="sng" algn="ctr">
+                      <a:solidFill>
+                        <a:srgbClr val="DCD2EC"/>
+                      </a:solidFill>
+                      <a:prstDash val="solid"/>
+                      <a:round/>
+                      <a:headEnd type="none" w="med" len="med"/>
+                      <a:tailEnd type="none" w="med" len="med"/>
+                    </a:lnR>
+                    <a:lnT w="9525" cap="flat" cmpd="sng" algn="ctr">
+                      <a:solidFill>
+                        <a:srgbClr val="DCD2EC"/>
+                      </a:solidFill>
+                      <a:prstDash val="solid"/>
+                      <a:round/>
+                      <a:headEnd type="none" w="med" len="med"/>
+                      <a:tailEnd type="none" w="med" len="med"/>
+                    </a:lnT>
+                    <a:lnB w="9525" cap="flat" cmpd="sng" algn="ctr">
+                      <a:solidFill>
+                        <a:srgbClr val="DCD2EC"/>
+                      </a:solidFill>
+                      <a:prstDash val="solid"/>
+                      <a:round/>
+                      <a:headEnd type="none" w="med" len="med"/>
+                      <a:tailEnd type="none" w="med" len="med"/>
+                    </a:lnB>
+                    <a:solidFill>
+                      <a:srgbClr val="3B1F5E"/>
+                    </a:solidFill>
+                  </a:tcPr>
+                </a:tc>
               </a:tr>
-              <a:tr h="347472">
+              <a:tr h="329184">
                 <a:tc>
                   <a:txBody>
                     <a:bodyPr/>
@@ -7655,7 +8187,7 @@
                         <a:buNone/>
                       </a:pPr>
                       <a:r>
-                        <a:rPr lang="en-US" sz="1050" dirty="0">
+                        <a:rPr lang="en-US" sz="950" dirty="0">
                           <a:solidFill>
                             <a:srgbClr val="1F1235"/>
                           </a:solidFill>
@@ -7665,7 +8197,7 @@
                         </a:rPr>
                         <a:t>Marina Ferraz</a:t>
                       </a:r>
-                      <a:endParaRPr lang="en-US" sz="1050" dirty="0">
+                      <a:endParaRPr lang="en-US" sz="950" dirty="0">
                         <a:latin typeface="Arial" charset="0"/>
                         <a:ea typeface="Arial" charset="0"/>
                         <a:cs typeface="Arial" charset="0"/>
@@ -7723,7 +8255,7 @@
                         <a:buNone/>
                       </a:pPr>
                       <a:r>
-                        <a:rPr lang="en-US" sz="1050" dirty="0">
+                        <a:rPr lang="en-US" sz="950" dirty="0">
                           <a:solidFill>
                             <a:srgbClr val="1F1235"/>
                           </a:solidFill>
@@ -7733,7 +8265,7 @@
                         </a:rPr>
                         <a:t>R$ 6.000</a:t>
                       </a:r>
-                      <a:endParaRPr lang="en-US" sz="1050" dirty="0">
+                      <a:endParaRPr lang="en-US" sz="950" dirty="0">
                         <a:latin typeface="Arial" charset="0"/>
                         <a:ea typeface="Arial" charset="0"/>
                         <a:cs typeface="Arial" charset="0"/>
@@ -7791,7 +8323,7 @@
                         <a:buNone/>
                       </a:pPr>
                       <a:r>
-                        <a:rPr lang="en-US" sz="1050" dirty="0">
+                        <a:rPr lang="en-US" sz="950" dirty="0">
                           <a:solidFill>
                             <a:srgbClr val="1F1235"/>
                           </a:solidFill>
@@ -7799,9 +8331,9 @@
                           <a:ea typeface="Arial" pitchFamily="34" charset="-122"/>
                           <a:cs typeface="Arial" pitchFamily="34" charset="-120"/>
                         </a:rPr>
-                        <a:t>R$ 54.000</a:t>
+                        <a:t>R$ 48.000</a:t>
                       </a:r>
-                      <a:endParaRPr lang="en-US" sz="1050" dirty="0">
+                      <a:endParaRPr lang="en-US" sz="950" dirty="0">
                         <a:latin typeface="Arial" charset="0"/>
                         <a:ea typeface="Arial" charset="0"/>
                         <a:cs typeface="Arial" charset="0"/>
@@ -7859,7 +8391,7 @@
                         <a:buNone/>
                       </a:pPr>
                       <a:r>
-                        <a:rPr lang="en-US" sz="1050" dirty="0">
+                        <a:rPr lang="en-US" sz="950" dirty="0">
                           <a:solidFill>
                             <a:srgbClr val="1F1235"/>
                           </a:solidFill>
@@ -7867,9 +8399,9 @@
                           <a:ea typeface="Arial" pitchFamily="34" charset="-122"/>
                           <a:cs typeface="Arial" pitchFamily="34" charset="-120"/>
                         </a:rPr>
-                        <a:t>R$ 0</a:t>
+                        <a:t>R$ 2.000</a:t>
                       </a:r>
-                      <a:endParaRPr lang="en-US" sz="1050" dirty="0">
+                      <a:endParaRPr lang="en-US" sz="950" dirty="0">
                         <a:latin typeface="Arial" charset="0"/>
                         <a:ea typeface="Arial" charset="0"/>
                         <a:cs typeface="Arial" charset="0"/>
@@ -7927,7 +8459,7 @@
                         <a:buNone/>
                       </a:pPr>
                       <a:r>
-                        <a:rPr lang="en-US" sz="1050" dirty="0">
+                        <a:rPr lang="en-US" sz="950" dirty="0">
                           <a:solidFill>
                             <a:srgbClr val="1F1235"/>
                           </a:solidFill>
@@ -7935,9 +8467,9 @@
                           <a:ea typeface="Arial" pitchFamily="34" charset="-122"/>
                           <a:cs typeface="Arial" pitchFamily="34" charset="-120"/>
                         </a:rPr>
-                        <a:t>R$ 6.000</a:t>
+                        <a:t>R$ 1.440</a:t>
                       </a:r>
-                      <a:endParaRPr lang="en-US" sz="1050" dirty="0">
+                      <a:endParaRPr lang="en-US" sz="950" dirty="0">
                         <a:latin typeface="Arial" charset="0"/>
                         <a:ea typeface="Arial" charset="0"/>
                         <a:cs typeface="Arial" charset="0"/>
@@ -7986,8 +8518,212 @@
                     </a:solidFill>
                   </a:tcPr>
                 </a:tc>
+                <a:tc>
+                  <a:txBody>
+                    <a:bodyPr/>
+                    <a:lstStyle/>
+                    <a:p>
+                      <a:pPr algn="r" indent="0" marL="0">
+                        <a:buNone/>
+                      </a:pPr>
+                      <a:r>
+                        <a:rPr lang="en-US" sz="950" dirty="0">
+                          <a:solidFill>
+                            <a:srgbClr val="1F1235"/>
+                          </a:solidFill>
+                          <a:latin typeface="Arial" pitchFamily="34" charset="0"/>
+                          <a:ea typeface="Arial" pitchFamily="34" charset="-122"/>
+                          <a:cs typeface="Arial" pitchFamily="34" charset="-120"/>
+                        </a:rPr>
+                        <a:t>R$ 480</a:t>
+                      </a:r>
+                      <a:endParaRPr lang="en-US" sz="950" dirty="0">
+                        <a:latin typeface="Arial" charset="0"/>
+                        <a:ea typeface="Arial" charset="0"/>
+                        <a:cs typeface="Arial" charset="0"/>
+                      </a:endParaRPr>
+                    </a:p>
+                  </a:txBody>
+                  <a:tcPr marL="54864" marR="54864" marT="54864" marB="54864" anchor="ctr">
+                    <a:lnL w="9525" cap="flat" cmpd="sng" algn="ctr">
+                      <a:solidFill>
+                        <a:srgbClr val="DCD2EC"/>
+                      </a:solidFill>
+                      <a:prstDash val="solid"/>
+                      <a:round/>
+                      <a:headEnd type="none" w="med" len="med"/>
+                      <a:tailEnd type="none" w="med" len="med"/>
+                    </a:lnL>
+                    <a:lnR w="9525" cap="flat" cmpd="sng" algn="ctr">
+                      <a:solidFill>
+                        <a:srgbClr val="DCD2EC"/>
+                      </a:solidFill>
+                      <a:prstDash val="solid"/>
+                      <a:round/>
+                      <a:headEnd type="none" w="med" len="med"/>
+                      <a:tailEnd type="none" w="med" len="med"/>
+                    </a:lnR>
+                    <a:lnT w="9525" cap="flat" cmpd="sng" algn="ctr">
+                      <a:solidFill>
+                        <a:srgbClr val="DCD2EC"/>
+                      </a:solidFill>
+                      <a:prstDash val="solid"/>
+                      <a:round/>
+                      <a:headEnd type="none" w="med" len="med"/>
+                      <a:tailEnd type="none" w="med" len="med"/>
+                    </a:lnT>
+                    <a:lnB w="9525" cap="flat" cmpd="sng" algn="ctr">
+                      <a:solidFill>
+                        <a:srgbClr val="DCD2EC"/>
+                      </a:solidFill>
+                      <a:prstDash val="solid"/>
+                      <a:round/>
+                      <a:headEnd type="none" w="med" len="med"/>
+                      <a:tailEnd type="none" w="med" len="med"/>
+                    </a:lnB>
+                    <a:solidFill>
+                      <a:srgbClr val="F3EEFB"/>
+                    </a:solidFill>
+                  </a:tcPr>
+                </a:tc>
+                <a:tc>
+                  <a:txBody>
+                    <a:bodyPr/>
+                    <a:lstStyle/>
+                    <a:p>
+                      <a:pPr algn="r" indent="0" marL="0">
+                        <a:buNone/>
+                      </a:pPr>
+                      <a:r>
+                        <a:rPr lang="en-US" sz="950" dirty="0">
+                          <a:solidFill>
+                            <a:srgbClr val="1F1235"/>
+                          </a:solidFill>
+                          <a:latin typeface="Arial" pitchFamily="34" charset="0"/>
+                          <a:ea typeface="Arial" pitchFamily="34" charset="-122"/>
+                          <a:cs typeface="Arial" pitchFamily="34" charset="-120"/>
+                        </a:rPr>
+                        <a:t>R$ 2.960</a:t>
+                      </a:r>
+                      <a:endParaRPr lang="en-US" sz="950" dirty="0">
+                        <a:latin typeface="Arial" charset="0"/>
+                        <a:ea typeface="Arial" charset="0"/>
+                        <a:cs typeface="Arial" charset="0"/>
+                      </a:endParaRPr>
+                    </a:p>
+                  </a:txBody>
+                  <a:tcPr marL="54864" marR="54864" marT="54864" marB="54864" anchor="ctr">
+                    <a:lnL w="9525" cap="flat" cmpd="sng" algn="ctr">
+                      <a:solidFill>
+                        <a:srgbClr val="DCD2EC"/>
+                      </a:solidFill>
+                      <a:prstDash val="solid"/>
+                      <a:round/>
+                      <a:headEnd type="none" w="med" len="med"/>
+                      <a:tailEnd type="none" w="med" len="med"/>
+                    </a:lnL>
+                    <a:lnR w="9525" cap="flat" cmpd="sng" algn="ctr">
+                      <a:solidFill>
+                        <a:srgbClr val="DCD2EC"/>
+                      </a:solidFill>
+                      <a:prstDash val="solid"/>
+                      <a:round/>
+                      <a:headEnd type="none" w="med" len="med"/>
+                      <a:tailEnd type="none" w="med" len="med"/>
+                    </a:lnR>
+                    <a:lnT w="9525" cap="flat" cmpd="sng" algn="ctr">
+                      <a:solidFill>
+                        <a:srgbClr val="DCD2EC"/>
+                      </a:solidFill>
+                      <a:prstDash val="solid"/>
+                      <a:round/>
+                      <a:headEnd type="none" w="med" len="med"/>
+                      <a:tailEnd type="none" w="med" len="med"/>
+                    </a:lnT>
+                    <a:lnB w="9525" cap="flat" cmpd="sng" algn="ctr">
+                      <a:solidFill>
+                        <a:srgbClr val="DCD2EC"/>
+                      </a:solidFill>
+                      <a:prstDash val="solid"/>
+                      <a:round/>
+                      <a:headEnd type="none" w="med" len="med"/>
+                      <a:tailEnd type="none" w="med" len="med"/>
+                    </a:lnB>
+                    <a:solidFill>
+                      <a:srgbClr val="F3EEFB"/>
+                    </a:solidFill>
+                  </a:tcPr>
+                </a:tc>
+                <a:tc>
+                  <a:txBody>
+                    <a:bodyPr/>
+                    <a:lstStyle/>
+                    <a:p>
+                      <a:pPr algn="r" indent="0" marL="0">
+                        <a:buNone/>
+                      </a:pPr>
+                      <a:r>
+                        <a:rPr lang="en-US" sz="950" dirty="0">
+                          <a:solidFill>
+                            <a:srgbClr val="1F1235"/>
+                          </a:solidFill>
+                          <a:latin typeface="Arial" pitchFamily="34" charset="0"/>
+                          <a:ea typeface="Arial" pitchFamily="34" charset="-122"/>
+                          <a:cs typeface="Arial" pitchFamily="34" charset="-120"/>
+                        </a:rPr>
+                        <a:t>R$ 6.452</a:t>
+                      </a:r>
+                      <a:endParaRPr lang="en-US" sz="950" dirty="0">
+                        <a:latin typeface="Arial" charset="0"/>
+                        <a:ea typeface="Arial" charset="0"/>
+                        <a:cs typeface="Arial" charset="0"/>
+                      </a:endParaRPr>
+                    </a:p>
+                  </a:txBody>
+                  <a:tcPr marL="54864" marR="54864" marT="54864" marB="54864" anchor="ctr">
+                    <a:lnL w="9525" cap="flat" cmpd="sng" algn="ctr">
+                      <a:solidFill>
+                        <a:srgbClr val="DCD2EC"/>
+                      </a:solidFill>
+                      <a:prstDash val="solid"/>
+                      <a:round/>
+                      <a:headEnd type="none" w="med" len="med"/>
+                      <a:tailEnd type="none" w="med" len="med"/>
+                    </a:lnL>
+                    <a:lnR w="9525" cap="flat" cmpd="sng" algn="ctr">
+                      <a:solidFill>
+                        <a:srgbClr val="DCD2EC"/>
+                      </a:solidFill>
+                      <a:prstDash val="solid"/>
+                      <a:round/>
+                      <a:headEnd type="none" w="med" len="med"/>
+                      <a:tailEnd type="none" w="med" len="med"/>
+                    </a:lnR>
+                    <a:lnT w="9525" cap="flat" cmpd="sng" algn="ctr">
+                      <a:solidFill>
+                        <a:srgbClr val="DCD2EC"/>
+                      </a:solidFill>
+                      <a:prstDash val="solid"/>
+                      <a:round/>
+                      <a:headEnd type="none" w="med" len="med"/>
+                      <a:tailEnd type="none" w="med" len="med"/>
+                    </a:lnT>
+                    <a:lnB w="9525" cap="flat" cmpd="sng" algn="ctr">
+                      <a:solidFill>
+                        <a:srgbClr val="DCD2EC"/>
+                      </a:solidFill>
+                      <a:prstDash val="solid"/>
+                      <a:round/>
+                      <a:headEnd type="none" w="med" len="med"/>
+                      <a:tailEnd type="none" w="med" len="med"/>
+                    </a:lnB>
+                    <a:solidFill>
+                      <a:srgbClr val="F3EEFB"/>
+                    </a:solidFill>
+                  </a:tcPr>
+                </a:tc>
               </a:tr>
-              <a:tr h="347472">
+              <a:tr h="329184">
                 <a:tc>
                   <a:txBody>
                     <a:bodyPr/>
@@ -7997,7 +8733,7 @@
                         <a:buNone/>
                       </a:pPr>
                       <a:r>
-                        <a:rPr lang="en-US" sz="1050" dirty="0">
+                        <a:rPr lang="en-US" sz="950" dirty="0">
                           <a:solidFill>
                             <a:srgbClr val="1F1235"/>
                           </a:solidFill>
@@ -8007,7 +8743,7 @@
                         </a:rPr>
                         <a:t>Rafael Lima</a:t>
                       </a:r>
-                      <a:endParaRPr lang="en-US" sz="1050" dirty="0">
+                      <a:endParaRPr lang="en-US" sz="950" dirty="0">
                         <a:latin typeface="Arial" charset="0"/>
                         <a:ea typeface="Arial" charset="0"/>
                         <a:cs typeface="Arial" charset="0"/>
@@ -8065,7 +8801,7 @@
                         <a:buNone/>
                       </a:pPr>
                       <a:r>
-                        <a:rPr lang="en-US" sz="1050" dirty="0">
+                        <a:rPr lang="en-US" sz="950" dirty="0">
                           <a:solidFill>
                             <a:srgbClr val="1F1235"/>
                           </a:solidFill>
@@ -8075,7 +8811,7 @@
                         </a:rPr>
                         <a:t>R$ 6.000</a:t>
                       </a:r>
-                      <a:endParaRPr lang="en-US" sz="1050" dirty="0">
+                      <a:endParaRPr lang="en-US" sz="950" dirty="0">
                         <a:latin typeface="Arial" charset="0"/>
                         <a:ea typeface="Arial" charset="0"/>
                         <a:cs typeface="Arial" charset="0"/>
@@ -8133,7 +8869,7 @@
                         <a:buNone/>
                       </a:pPr>
                       <a:r>
-                        <a:rPr lang="en-US" sz="1050" dirty="0">
+                        <a:rPr lang="en-US" sz="950" dirty="0">
                           <a:solidFill>
                             <a:srgbClr val="1F1235"/>
                           </a:solidFill>
@@ -8141,9 +8877,9 @@
                           <a:ea typeface="Arial" pitchFamily="34" charset="-122"/>
                           <a:cs typeface="Arial" pitchFamily="34" charset="-120"/>
                         </a:rPr>
-                        <a:t>R$ 54.000</a:t>
+                        <a:t>R$ 48.000</a:t>
                       </a:r>
-                      <a:endParaRPr lang="en-US" sz="1050" dirty="0">
+                      <a:endParaRPr lang="en-US" sz="950" dirty="0">
                         <a:latin typeface="Arial" charset="0"/>
                         <a:ea typeface="Arial" charset="0"/>
                         <a:cs typeface="Arial" charset="0"/>
@@ -8201,7 +8937,7 @@
                         <a:buNone/>
                       </a:pPr>
                       <a:r>
-                        <a:rPr lang="en-US" sz="1050" dirty="0">
+                        <a:rPr lang="en-US" sz="950" dirty="0">
                           <a:solidFill>
                             <a:srgbClr val="1F1235"/>
                           </a:solidFill>
@@ -8209,9 +8945,9 @@
                           <a:ea typeface="Arial" pitchFamily="34" charset="-122"/>
                           <a:cs typeface="Arial" pitchFamily="34" charset="-120"/>
                         </a:rPr>
-                        <a:t>R$ 0</a:t>
+                        <a:t>R$ 1.500</a:t>
                       </a:r>
-                      <a:endParaRPr lang="en-US" sz="1050" dirty="0">
+                      <a:endParaRPr lang="en-US" sz="950" dirty="0">
                         <a:latin typeface="Arial" charset="0"/>
                         <a:ea typeface="Arial" charset="0"/>
                         <a:cs typeface="Arial" charset="0"/>
@@ -8269,7 +9005,7 @@
                         <a:buNone/>
                       </a:pPr>
                       <a:r>
-                        <a:rPr lang="en-US" sz="1050" dirty="0">
+                        <a:rPr lang="en-US" sz="950" dirty="0">
                           <a:solidFill>
                             <a:srgbClr val="1F1235"/>
                           </a:solidFill>
@@ -8277,9 +9013,9 @@
                           <a:ea typeface="Arial" pitchFamily="34" charset="-122"/>
                           <a:cs typeface="Arial" pitchFamily="34" charset="-120"/>
                         </a:rPr>
-                        <a:t>R$ 6.000</a:t>
+                        <a:t>R$ 600</a:t>
                       </a:r>
-                      <a:endParaRPr lang="en-US" sz="1050" dirty="0">
+                      <a:endParaRPr lang="en-US" sz="950" dirty="0">
                         <a:latin typeface="Arial" charset="0"/>
                         <a:ea typeface="Arial" charset="0"/>
                         <a:cs typeface="Arial" charset="0"/>
@@ -8328,8 +9064,212 @@
                     </a:solidFill>
                   </a:tcPr>
                 </a:tc>
+                <a:tc>
+                  <a:txBody>
+                    <a:bodyPr/>
+                    <a:lstStyle/>
+                    <a:p>
+                      <a:pPr algn="r" indent="0" marL="0">
+                        <a:buNone/>
+                      </a:pPr>
+                      <a:r>
+                        <a:rPr lang="en-US" sz="950" dirty="0">
+                          <a:solidFill>
+                            <a:srgbClr val="1F1235"/>
+                          </a:solidFill>
+                          <a:latin typeface="Arial" pitchFamily="34" charset="0"/>
+                          <a:ea typeface="Arial" pitchFamily="34" charset="-122"/>
+                          <a:cs typeface="Arial" pitchFamily="34" charset="-120"/>
+                        </a:rPr>
+                        <a:t>R$ 0</a:t>
+                      </a:r>
+                      <a:endParaRPr lang="en-US" sz="950" dirty="0">
+                        <a:latin typeface="Arial" charset="0"/>
+                        <a:ea typeface="Arial" charset="0"/>
+                        <a:cs typeface="Arial" charset="0"/>
+                      </a:endParaRPr>
+                    </a:p>
+                  </a:txBody>
+                  <a:tcPr marL="54864" marR="54864" marT="54864" marB="54864" anchor="ctr">
+                    <a:lnL w="9525" cap="flat" cmpd="sng" algn="ctr">
+                      <a:solidFill>
+                        <a:srgbClr val="DCD2EC"/>
+                      </a:solidFill>
+                      <a:prstDash val="solid"/>
+                      <a:round/>
+                      <a:headEnd type="none" w="med" len="med"/>
+                      <a:tailEnd type="none" w="med" len="med"/>
+                    </a:lnL>
+                    <a:lnR w="9525" cap="flat" cmpd="sng" algn="ctr">
+                      <a:solidFill>
+                        <a:srgbClr val="DCD2EC"/>
+                      </a:solidFill>
+                      <a:prstDash val="solid"/>
+                      <a:round/>
+                      <a:headEnd type="none" w="med" len="med"/>
+                      <a:tailEnd type="none" w="med" len="med"/>
+                    </a:lnR>
+                    <a:lnT w="9525" cap="flat" cmpd="sng" algn="ctr">
+                      <a:solidFill>
+                        <a:srgbClr val="DCD2EC"/>
+                      </a:solidFill>
+                      <a:prstDash val="solid"/>
+                      <a:round/>
+                      <a:headEnd type="none" w="med" len="med"/>
+                      <a:tailEnd type="none" w="med" len="med"/>
+                    </a:lnT>
+                    <a:lnB w="9525" cap="flat" cmpd="sng" algn="ctr">
+                      <a:solidFill>
+                        <a:srgbClr val="DCD2EC"/>
+                      </a:solidFill>
+                      <a:prstDash val="solid"/>
+                      <a:round/>
+                      <a:headEnd type="none" w="med" len="med"/>
+                      <a:tailEnd type="none" w="med" len="med"/>
+                    </a:lnB>
+                    <a:solidFill>
+                      <a:srgbClr val="FFFFFF"/>
+                    </a:solidFill>
+                  </a:tcPr>
+                </a:tc>
+                <a:tc>
+                  <a:txBody>
+                    <a:bodyPr/>
+                    <a:lstStyle/>
+                    <a:p>
+                      <a:pPr algn="r" indent="0" marL="0">
+                        <a:buNone/>
+                      </a:pPr>
+                      <a:r>
+                        <a:rPr lang="en-US" sz="950" dirty="0">
+                          <a:solidFill>
+                            <a:srgbClr val="1F1235"/>
+                          </a:solidFill>
+                          <a:latin typeface="Arial" pitchFamily="34" charset="0"/>
+                          <a:ea typeface="Arial" pitchFamily="34" charset="-122"/>
+                          <a:cs typeface="Arial" pitchFamily="34" charset="-120"/>
+                        </a:rPr>
+                        <a:t>R$ 2.100</a:t>
+                      </a:r>
+                      <a:endParaRPr lang="en-US" sz="950" dirty="0">
+                        <a:latin typeface="Arial" charset="0"/>
+                        <a:ea typeface="Arial" charset="0"/>
+                        <a:cs typeface="Arial" charset="0"/>
+                      </a:endParaRPr>
+                    </a:p>
+                  </a:txBody>
+                  <a:tcPr marL="54864" marR="54864" marT="54864" marB="54864" anchor="ctr">
+                    <a:lnL w="9525" cap="flat" cmpd="sng" algn="ctr">
+                      <a:solidFill>
+                        <a:srgbClr val="DCD2EC"/>
+                      </a:solidFill>
+                      <a:prstDash val="solid"/>
+                      <a:round/>
+                      <a:headEnd type="none" w="med" len="med"/>
+                      <a:tailEnd type="none" w="med" len="med"/>
+                    </a:lnL>
+                    <a:lnR w="9525" cap="flat" cmpd="sng" algn="ctr">
+                      <a:solidFill>
+                        <a:srgbClr val="DCD2EC"/>
+                      </a:solidFill>
+                      <a:prstDash val="solid"/>
+                      <a:round/>
+                      <a:headEnd type="none" w="med" len="med"/>
+                      <a:tailEnd type="none" w="med" len="med"/>
+                    </a:lnR>
+                    <a:lnT w="9525" cap="flat" cmpd="sng" algn="ctr">
+                      <a:solidFill>
+                        <a:srgbClr val="DCD2EC"/>
+                      </a:solidFill>
+                      <a:prstDash val="solid"/>
+                      <a:round/>
+                      <a:headEnd type="none" w="med" len="med"/>
+                      <a:tailEnd type="none" w="med" len="med"/>
+                    </a:lnT>
+                    <a:lnB w="9525" cap="flat" cmpd="sng" algn="ctr">
+                      <a:solidFill>
+                        <a:srgbClr val="DCD2EC"/>
+                      </a:solidFill>
+                      <a:prstDash val="solid"/>
+                      <a:round/>
+                      <a:headEnd type="none" w="med" len="med"/>
+                      <a:tailEnd type="none" w="med" len="med"/>
+                    </a:lnB>
+                    <a:solidFill>
+                      <a:srgbClr val="FFFFFF"/>
+                    </a:solidFill>
+                  </a:tcPr>
+                </a:tc>
+                <a:tc>
+                  <a:txBody>
+                    <a:bodyPr/>
+                    <a:lstStyle/>
+                    <a:p>
+                      <a:pPr algn="r" indent="0" marL="0">
+                        <a:buNone/>
+                      </a:pPr>
+                      <a:r>
+                        <a:rPr lang="en-US" sz="950" dirty="0">
+                          <a:solidFill>
+                            <a:srgbClr val="1F1235"/>
+                          </a:solidFill>
+                          <a:latin typeface="Arial" pitchFamily="34" charset="0"/>
+                          <a:ea typeface="Arial" pitchFamily="34" charset="-122"/>
+                          <a:cs typeface="Arial" pitchFamily="34" charset="-120"/>
+                        </a:rPr>
+                        <a:t>R$ 6.452</a:t>
+                      </a:r>
+                      <a:endParaRPr lang="en-US" sz="950" dirty="0">
+                        <a:latin typeface="Arial" charset="0"/>
+                        <a:ea typeface="Arial" charset="0"/>
+                        <a:cs typeface="Arial" charset="0"/>
+                      </a:endParaRPr>
+                    </a:p>
+                  </a:txBody>
+                  <a:tcPr marL="54864" marR="54864" marT="54864" marB="54864" anchor="ctr">
+                    <a:lnL w="9525" cap="flat" cmpd="sng" algn="ctr">
+                      <a:solidFill>
+                        <a:srgbClr val="DCD2EC"/>
+                      </a:solidFill>
+                      <a:prstDash val="solid"/>
+                      <a:round/>
+                      <a:headEnd type="none" w="med" len="med"/>
+                      <a:tailEnd type="none" w="med" len="med"/>
+                    </a:lnL>
+                    <a:lnR w="9525" cap="flat" cmpd="sng" algn="ctr">
+                      <a:solidFill>
+                        <a:srgbClr val="DCD2EC"/>
+                      </a:solidFill>
+                      <a:prstDash val="solid"/>
+                      <a:round/>
+                      <a:headEnd type="none" w="med" len="med"/>
+                      <a:tailEnd type="none" w="med" len="med"/>
+                    </a:lnR>
+                    <a:lnT w="9525" cap="flat" cmpd="sng" algn="ctr">
+                      <a:solidFill>
+                        <a:srgbClr val="DCD2EC"/>
+                      </a:solidFill>
+                      <a:prstDash val="solid"/>
+                      <a:round/>
+                      <a:headEnd type="none" w="med" len="med"/>
+                      <a:tailEnd type="none" w="med" len="med"/>
+                    </a:lnT>
+                    <a:lnB w="9525" cap="flat" cmpd="sng" algn="ctr">
+                      <a:solidFill>
+                        <a:srgbClr val="DCD2EC"/>
+                      </a:solidFill>
+                      <a:prstDash val="solid"/>
+                      <a:round/>
+                      <a:headEnd type="none" w="med" len="med"/>
+                      <a:tailEnd type="none" w="med" len="med"/>
+                    </a:lnB>
+                    <a:solidFill>
+                      <a:srgbClr val="FFFFFF"/>
+                    </a:solidFill>
+                  </a:tcPr>
+                </a:tc>
               </a:tr>
-              <a:tr h="347472">
+              <a:tr h="329184">
                 <a:tc>
                   <a:txBody>
                     <a:bodyPr/>
@@ -8339,7 +9279,7 @@
                         <a:buNone/>
                       </a:pPr>
                       <a:r>
-                        <a:rPr lang="en-US" sz="1050" dirty="0">
+                        <a:rPr lang="en-US" sz="950" b="1" dirty="0">
                           <a:solidFill>
                             <a:srgbClr val="1F1235"/>
                           </a:solidFill>
@@ -8347,9 +9287,9 @@
                           <a:ea typeface="Arial" pitchFamily="34" charset="-122"/>
                           <a:cs typeface="Arial" pitchFamily="34" charset="-120"/>
                         </a:rPr>
-                        <a:t>Júlia Prado (bolsa de estágio)</a:t>
+                        <a:t>Total</a:t>
                       </a:r>
-                      <a:endParaRPr lang="en-US" sz="1050" dirty="0">
+                      <a:endParaRPr lang="en-US" sz="950" dirty="0">
                         <a:latin typeface="Arial" charset="0"/>
                         <a:ea typeface="Arial" charset="0"/>
                         <a:cs typeface="Arial" charset="0"/>
@@ -8407,7 +9347,7 @@
                         <a:buNone/>
                       </a:pPr>
                       <a:r>
-                        <a:rPr lang="en-US" sz="1050" dirty="0">
+                        <a:rPr lang="en-US" sz="950" b="1" dirty="0">
                           <a:solidFill>
                             <a:srgbClr val="1F1235"/>
                           </a:solidFill>
@@ -8415,9 +9355,9 @@
                           <a:ea typeface="Arial" pitchFamily="34" charset="-122"/>
                           <a:cs typeface="Arial" pitchFamily="34" charset="-120"/>
                         </a:rPr>
-                        <a:t>R$ 1.400</a:t>
+                        <a:t>R$ 12.000</a:t>
                       </a:r>
-                      <a:endParaRPr lang="en-US" sz="1050" dirty="0">
+                      <a:endParaRPr lang="en-US" sz="950" dirty="0">
                         <a:latin typeface="Arial" charset="0"/>
                         <a:ea typeface="Arial" charset="0"/>
                         <a:cs typeface="Arial" charset="0"/>
@@ -8475,7 +9415,7 @@
                         <a:buNone/>
                       </a:pPr>
                       <a:r>
-                        <a:rPr lang="en-US" sz="1050" dirty="0">
+                        <a:rPr lang="en-US" sz="950" b="1" dirty="0">
                           <a:solidFill>
                             <a:srgbClr val="1F1235"/>
                           </a:solidFill>
@@ -8483,9 +9423,9 @@
                           <a:ea typeface="Arial" pitchFamily="34" charset="-122"/>
                           <a:cs typeface="Arial" pitchFamily="34" charset="-120"/>
                         </a:rPr>
-                        <a:t>R$ 12.600</a:t>
+                        <a:t>R$ 96.000</a:t>
                       </a:r>
-                      <a:endParaRPr lang="en-US" sz="1050" dirty="0">
+                      <a:endParaRPr lang="en-US" sz="950" dirty="0">
                         <a:latin typeface="Arial" charset="0"/>
                         <a:ea typeface="Arial" charset="0"/>
                         <a:cs typeface="Arial" charset="0"/>
@@ -8543,7 +9483,7 @@
                         <a:buNone/>
                       </a:pPr>
                       <a:r>
-                        <a:rPr lang="en-US" sz="1050" dirty="0">
+                        <a:rPr lang="en-US" sz="950" b="1" dirty="0">
                           <a:solidFill>
                             <a:srgbClr val="1F1235"/>
                           </a:solidFill>
@@ -8551,9 +9491,9 @@
                           <a:ea typeface="Arial" pitchFamily="34" charset="-122"/>
                           <a:cs typeface="Arial" pitchFamily="34" charset="-120"/>
                         </a:rPr>
-                        <a:t>—</a:t>
+                        <a:t>R$ 3.500</a:t>
                       </a:r>
-                      <a:endParaRPr lang="en-US" sz="1050" dirty="0">
+                      <a:endParaRPr lang="en-US" sz="950" dirty="0">
                         <a:latin typeface="Arial" charset="0"/>
                         <a:ea typeface="Arial" charset="0"/>
                         <a:cs typeface="Arial" charset="0"/>
@@ -8611,7 +9551,7 @@
                         <a:buNone/>
                       </a:pPr>
                       <a:r>
-                        <a:rPr lang="en-US" sz="1050" dirty="0">
+                        <a:rPr lang="en-US" sz="950" b="1" dirty="0">
                           <a:solidFill>
                             <a:srgbClr val="1F1235"/>
                           </a:solidFill>
@@ -8619,9 +9559,9 @@
                           <a:ea typeface="Arial" pitchFamily="34" charset="-122"/>
                           <a:cs typeface="Arial" pitchFamily="34" charset="-120"/>
                         </a:rPr>
-                        <a:t>—</a:t>
+                        <a:t>R$ 2.040</a:t>
                       </a:r>
-                      <a:endParaRPr lang="en-US" sz="1050" dirty="0">
+                      <a:endParaRPr lang="en-US" sz="950" dirty="0">
                         <a:latin typeface="Arial" charset="0"/>
                         <a:ea typeface="Arial" charset="0"/>
                         <a:cs typeface="Arial" charset="0"/>
@@ -8667,76 +9607,6 @@
                     </a:lnB>
                     <a:solidFill>
                       <a:srgbClr val="F3EEFB"/>
-                    </a:solidFill>
-                  </a:tcPr>
-                </a:tc>
-              </a:tr>
-              <a:tr h="347472">
-                <a:tc>
-                  <a:txBody>
-                    <a:bodyPr/>
-                    <a:lstStyle/>
-                    <a:p>
-                      <a:pPr algn="l" indent="0" marL="0">
-                        <a:buNone/>
-                      </a:pPr>
-                      <a:r>
-                        <a:rPr lang="en-US" sz="1050" b="1" dirty="0">
-                          <a:solidFill>
-                            <a:srgbClr val="1F1235"/>
-                          </a:solidFill>
-                          <a:latin typeface="Arial" pitchFamily="34" charset="0"/>
-                          <a:ea typeface="Arial" pitchFamily="34" charset="-122"/>
-                          <a:cs typeface="Arial" pitchFamily="34" charset="-120"/>
-                        </a:rPr>
-                        <a:t>Total</a:t>
-                      </a:r>
-                      <a:endParaRPr lang="en-US" sz="1050" dirty="0">
-                        <a:latin typeface="Arial" charset="0"/>
-                        <a:ea typeface="Arial" charset="0"/>
-                        <a:cs typeface="Arial" charset="0"/>
-                      </a:endParaRPr>
-                    </a:p>
-                  </a:txBody>
-                  <a:tcPr marL="54864" marR="54864" marT="54864" marB="54864" anchor="ctr">
-                    <a:lnL w="9525" cap="flat" cmpd="sng" algn="ctr">
-                      <a:solidFill>
-                        <a:srgbClr val="DCD2EC"/>
-                      </a:solidFill>
-                      <a:prstDash val="solid"/>
-                      <a:round/>
-                      <a:headEnd type="none" w="med" len="med"/>
-                      <a:tailEnd type="none" w="med" len="med"/>
-                    </a:lnL>
-                    <a:lnR w="9525" cap="flat" cmpd="sng" algn="ctr">
-                      <a:solidFill>
-                        <a:srgbClr val="DCD2EC"/>
-                      </a:solidFill>
-                      <a:prstDash val="solid"/>
-                      <a:round/>
-                      <a:headEnd type="none" w="med" len="med"/>
-                      <a:tailEnd type="none" w="med" len="med"/>
-                    </a:lnR>
-                    <a:lnT w="9525" cap="flat" cmpd="sng" algn="ctr">
-                      <a:solidFill>
-                        <a:srgbClr val="DCD2EC"/>
-                      </a:solidFill>
-                      <a:prstDash val="solid"/>
-                      <a:round/>
-                      <a:headEnd type="none" w="med" len="med"/>
-                      <a:tailEnd type="none" w="med" len="med"/>
-                    </a:lnT>
-                    <a:lnB w="9525" cap="flat" cmpd="sng" algn="ctr">
-                      <a:solidFill>
-                        <a:srgbClr val="DCD2EC"/>
-                      </a:solidFill>
-                      <a:prstDash val="solid"/>
-                      <a:round/>
-                      <a:headEnd type="none" w="med" len="med"/>
-                      <a:tailEnd type="none" w="med" len="med"/>
-                    </a:lnB>
-                    <a:solidFill>
-                      <a:srgbClr val="FFFFFF"/>
                     </a:solidFill>
                   </a:tcPr>
                 </a:tc>
@@ -8749,7 +9619,7 @@
                         <a:buNone/>
                       </a:pPr>
                       <a:r>
-                        <a:rPr lang="en-US" sz="1050" b="1" dirty="0">
+                        <a:rPr lang="en-US" sz="950" b="1" dirty="0">
                           <a:solidFill>
                             <a:srgbClr val="1F1235"/>
                           </a:solidFill>
@@ -8757,9 +9627,9 @@
                           <a:ea typeface="Arial" pitchFamily="34" charset="-122"/>
                           <a:cs typeface="Arial" pitchFamily="34" charset="-120"/>
                         </a:rPr>
-                        <a:t>R$ 13.400</a:t>
+                        <a:t>R$ 480</a:t>
                       </a:r>
-                      <a:endParaRPr lang="en-US" sz="1050" dirty="0">
+                      <a:endParaRPr lang="en-US" sz="950" dirty="0">
                         <a:latin typeface="Arial" charset="0"/>
                         <a:ea typeface="Arial" charset="0"/>
                         <a:cs typeface="Arial" charset="0"/>
@@ -8804,7 +9674,7 @@
                       <a:tailEnd type="none" w="med" len="med"/>
                     </a:lnB>
                     <a:solidFill>
-                      <a:srgbClr val="FFFFFF"/>
+                      <a:srgbClr val="F3EEFB"/>
                     </a:solidFill>
                   </a:tcPr>
                 </a:tc>
@@ -8817,7 +9687,7 @@
                         <a:buNone/>
                       </a:pPr>
                       <a:r>
-                        <a:rPr lang="en-US" sz="1050" b="1" dirty="0">
+                        <a:rPr lang="en-US" sz="950" b="1" dirty="0">
                           <a:solidFill>
                             <a:srgbClr val="1F1235"/>
                           </a:solidFill>
@@ -8825,9 +9695,9 @@
                           <a:ea typeface="Arial" pitchFamily="34" charset="-122"/>
                           <a:cs typeface="Arial" pitchFamily="34" charset="-120"/>
                         </a:rPr>
-                        <a:t>R$ 120.600</a:t>
+                        <a:t>R$ 5.060</a:t>
                       </a:r>
-                      <a:endParaRPr lang="en-US" sz="1050" dirty="0">
+                      <a:endParaRPr lang="en-US" sz="950" dirty="0">
                         <a:latin typeface="Arial" charset="0"/>
                         <a:ea typeface="Arial" charset="0"/>
                         <a:cs typeface="Arial" charset="0"/>
@@ -8872,7 +9742,7 @@
                       <a:tailEnd type="none" w="med" len="med"/>
                     </a:lnB>
                     <a:solidFill>
-                      <a:srgbClr val="FFFFFF"/>
+                      <a:srgbClr val="F3EEFB"/>
                     </a:solidFill>
                   </a:tcPr>
                 </a:tc>
@@ -8885,7 +9755,7 @@
                         <a:buNone/>
                       </a:pPr>
                       <a:r>
-                        <a:rPr lang="en-US" sz="1050" b="1" dirty="0">
+                        <a:rPr lang="en-US" sz="950" b="1" dirty="0">
                           <a:solidFill>
                             <a:srgbClr val="1F1235"/>
                           </a:solidFill>
@@ -8893,9 +9763,9 @@
                           <a:ea typeface="Arial" pitchFamily="34" charset="-122"/>
                           <a:cs typeface="Arial" pitchFamily="34" charset="-120"/>
                         </a:rPr>
-                        <a:t>R$ 0</a:t>
+                        <a:t>R$ 12.905</a:t>
                       </a:r>
-                      <a:endParaRPr lang="en-US" sz="1050" dirty="0">
+                      <a:endParaRPr lang="en-US" sz="950" dirty="0">
                         <a:latin typeface="Arial" charset="0"/>
                         <a:ea typeface="Arial" charset="0"/>
                         <a:cs typeface="Arial" charset="0"/>
@@ -8940,75 +9810,7 @@
                       <a:tailEnd type="none" w="med" len="med"/>
                     </a:lnB>
                     <a:solidFill>
-                      <a:srgbClr val="FFFFFF"/>
-                    </a:solidFill>
-                  </a:tcPr>
-                </a:tc>
-                <a:tc>
-                  <a:txBody>
-                    <a:bodyPr/>
-                    <a:lstStyle/>
-                    <a:p>
-                      <a:pPr algn="r" indent="0" marL="0">
-                        <a:buNone/>
-                      </a:pPr>
-                      <a:r>
-                        <a:rPr lang="en-US" sz="1050" b="1" dirty="0">
-                          <a:solidFill>
-                            <a:srgbClr val="1F1235"/>
-                          </a:solidFill>
-                          <a:latin typeface="Arial" pitchFamily="34" charset="0"/>
-                          <a:ea typeface="Arial" pitchFamily="34" charset="-122"/>
-                          <a:cs typeface="Arial" pitchFamily="34" charset="-120"/>
-                        </a:rPr>
-                        <a:t>R$ 12.000</a:t>
-                      </a:r>
-                      <a:endParaRPr lang="en-US" sz="1050" dirty="0">
-                        <a:latin typeface="Arial" charset="0"/>
-                        <a:ea typeface="Arial" charset="0"/>
-                        <a:cs typeface="Arial" charset="0"/>
-                      </a:endParaRPr>
-                    </a:p>
-                  </a:txBody>
-                  <a:tcPr marL="54864" marR="54864" marT="54864" marB="54864" anchor="ctr">
-                    <a:lnL w="9525" cap="flat" cmpd="sng" algn="ctr">
-                      <a:solidFill>
-                        <a:srgbClr val="DCD2EC"/>
-                      </a:solidFill>
-                      <a:prstDash val="solid"/>
-                      <a:round/>
-                      <a:headEnd type="none" w="med" len="med"/>
-                      <a:tailEnd type="none" w="med" len="med"/>
-                    </a:lnL>
-                    <a:lnR w="9525" cap="flat" cmpd="sng" algn="ctr">
-                      <a:solidFill>
-                        <a:srgbClr val="DCD2EC"/>
-                      </a:solidFill>
-                      <a:prstDash val="solid"/>
-                      <a:round/>
-                      <a:headEnd type="none" w="med" len="med"/>
-                      <a:tailEnd type="none" w="med" len="med"/>
-                    </a:lnR>
-                    <a:lnT w="9525" cap="flat" cmpd="sng" algn="ctr">
-                      <a:solidFill>
-                        <a:srgbClr val="DCD2EC"/>
-                      </a:solidFill>
-                      <a:prstDash val="solid"/>
-                      <a:round/>
-                      <a:headEnd type="none" w="med" len="med"/>
-                      <a:tailEnd type="none" w="med" len="med"/>
-                    </a:lnT>
-                    <a:lnB w="9525" cap="flat" cmpd="sng" algn="ctr">
-                      <a:solidFill>
-                        <a:srgbClr val="DCD2EC"/>
-                      </a:solidFill>
-                      <a:prstDash val="solid"/>
-                      <a:round/>
-                      <a:headEnd type="none" w="med" len="med"/>
-                      <a:tailEnd type="none" w="med" len="med"/>
-                    </a:lnB>
-                    <a:solidFill>
-                      <a:srgbClr val="FFFFFF"/>
+                      <a:srgbClr val="F3EEFB"/>
                     </a:solidFill>
                   </a:tcPr>
                 </a:tc>
@@ -9025,8 +9827,8 @@
         </p:nvSpPr>
         <p:spPr>
           <a:xfrm>
-            <a:off x="457200" y="3429000"/>
-            <a:ext cx="8229600" cy="1188720"/>
+            <a:off x="457200" y="3063240"/>
+            <a:ext cx="8229600" cy="1554480"/>
           </a:xfrm>
           <a:prstGeom prst="rect">
             <a:avLst/>
@@ -9045,7 +9847,7 @@
               <a:buNone/>
             </a:pPr>
             <a:r>
-              <a:rPr lang="en-US" sz="1100" b="1" dirty="0">
+              <a:rPr lang="en-US" sz="1000" b="1" dirty="0">
                 <a:solidFill>
                   <a:srgbClr val="3B1F5E"/>
                 </a:solidFill>
@@ -9055,7 +9857,7 @@
               </a:rPr>
               <a:t>Regras da casa</a:t>
             </a:r>
-            <a:endParaRPr lang="en-US" sz="1100" dirty="0"/>
+            <a:endParaRPr lang="en-US" sz="1000" dirty="0"/>
           </a:p>
           <a:p>
             <a:pPr marL="342900" indent="-342900">
@@ -9066,7 +9868,7 @@
               <a:buChar char="•"/>
             </a:pPr>
             <a:r>
-              <a:rPr lang="en-US" sz="1100" dirty="0">
+              <a:rPr lang="en-US" sz="1000" dirty="0">
                 <a:solidFill>
                   <a:srgbClr val="1F1235"/>
                 </a:solidFill>
@@ -9074,9 +9876,9 @@
                 <a:ea typeface="Arial" pitchFamily="34" charset="-122"/>
                 <a:cs typeface="Arial" pitchFamily="34" charset="-120"/>
               </a:rPr>
-              <a:t>Nenhuma despesa pessoal no cartão ou na conta do escritório; o que escapou foi lançado como retirada extra (zero em 2026).</a:t>
+              <a:t>Pró-labore combinado R$ 12.000 por mês (2 × R$ 6.000). A bolsa da estagiária (R$ 1.400) é custo fixo, não pró-labore. O que escapou para a conta do escritório virou "a acertar": R$ 5.060 no ano, a descontar da próxima distribuição.</a:t>
             </a:r>
-            <a:endParaRPr lang="en-US" sz="1100" dirty="0"/>
+            <a:endParaRPr lang="en-US" sz="1000" dirty="0"/>
           </a:p>
           <a:p>
             <a:pPr indent="0" marL="0">
@@ -9086,7 +9888,7 @@
               <a:buNone/>
             </a:pPr>
             <a:r>
-              <a:rPr lang="en-US" sz="1100" b="1" dirty="0">
+              <a:rPr lang="en-US" sz="1000" b="1" dirty="0">
                 <a:solidFill>
                   <a:srgbClr val="3B1F5E"/>
                 </a:solidFill>
@@ -9094,9 +9896,9 @@
                 <a:ea typeface="Arial" pitchFamily="34" charset="-122"/>
                 <a:cs typeface="Arial" pitchFamily="34" charset="-120"/>
               </a:rPr>
-              <a:t>Proposta dos sócios</a:t>
+              <a:t>Distribuição de lucro</a:t>
             </a:r>
-            <a:endParaRPr lang="en-US" sz="1100" dirty="0"/>
+            <a:endParaRPr lang="en-US" sz="1000" dirty="0"/>
           </a:p>
           <a:p>
             <a:pPr marL="342900" indent="-342900">
@@ -9107,7 +9909,7 @@
               <a:buChar char="•"/>
             </a:pPr>
             <a:r>
-              <a:rPr lang="en-US" sz="1100" dirty="0">
+              <a:rPr lang="en-US" sz="1000" dirty="0">
                 <a:solidFill>
                   <a:srgbClr val="1F1235"/>
                 </a:solidFill>
@@ -9115,156 +9917,11 @@
                 <a:ea typeface="Arial" pitchFamily="34" charset="-122"/>
                 <a:cs typeface="Arial" pitchFamily="34" charset="-120"/>
               </a:rPr>
-              <a:t>Sobrou R$ 40,7 mil de janeiro a setembro. Distribuir R$ 12 mil em outubro e manter o restante em reserva: depende da resposta à dúvida 2.</a:t>
+              <a:t>Regra: 50 % do resultado do trimestre fechado, paga dia 10 do mês seguinte: 1º trimestre R$ 5.311 (abril), 2º trimestre R$ 7.594 (julho). 3º trimestre em andamento: R$ 1.839 após pró-labore até 11/09.</a:t>
             </a:r>
-            <a:endParaRPr lang="en-US" sz="1100" dirty="0"/>
+            <a:endParaRPr lang="en-US" sz="1000" dirty="0"/>
           </a:p>
         </p:txBody>
-      </p:sp>
-      <p:sp>
-        <p:nvSpPr>
-          <p:cNvPr id="6" name="Text 3"/>
-          <p:cNvSpPr txBox="1"/>
-          <p:nvPr/>
-        </p:nvSpPr>
-        <p:spPr>
-          <a:xfrm>
-            <a:off x="457200" y="4791456"/>
-            <a:ext cx="6858000" cy="201168"/>
-          </a:xfrm>
-          <a:prstGeom prst="rect">
-            <a:avLst/>
-          </a:prstGeom>
-          <a:noFill/>
-          <a:ln/>
-        </p:spPr>
-        <p:txBody>
-          <a:bodyPr wrap="square" lIns="0" tIns="0" rIns="0" bIns="0" rtlCol="0" anchor="ctr"/>
-          <a:lstStyle/>
-          <a:p>
-            <a:pPr indent="0" marL="0">
-              <a:buNone/>
-            </a:pPr>
-            <a:r>
-              <a:rPr lang="en-US" sz="700" dirty="0">
-                <a:solidFill>
-                  <a:srgbClr val="B89BE0"/>
-                </a:solidFill>
-                <a:latin typeface="Arial" pitchFamily="34" charset="0"/>
-                <a:ea typeface="Arial" pitchFamily="34" charset="-122"/>
-                <a:cs typeface="Arial" pitchFamily="34" charset="-120"/>
-              </a:rPr>
-              <a:t>Kit de Gestão para Advogados · modelo v1.0 · set/2026</a:t>
-            </a:r>
-            <a:endParaRPr lang="en-US" sz="700" dirty="0"/>
-          </a:p>
-        </p:txBody>
-      </p:sp>
-      <p:sp>
-        <p:nvSpPr>
-          <p:cNvPr id="7" name="Shape 4"/>
-          <p:cNvSpPr/>
-          <p:nvPr/>
-        </p:nvSpPr>
-        <p:spPr>
-          <a:xfrm>
-            <a:off x="8229600" y="4818888"/>
-            <a:ext cx="211226" cy="70409"/>
-          </a:xfrm>
-          <a:prstGeom prst="roundRect">
-            <a:avLst>
-              <a:gd name="adj" fmla="val 42857"/>
-            </a:avLst>
-          </a:prstGeom>
-          <a:solidFill>
-            <a:srgbClr val="7A5AA8"/>
-          </a:solidFill>
-          <a:ln w="12700">
-            <a:solidFill>
-              <a:srgbClr val="7A5AA8"/>
-            </a:solidFill>
-            <a:prstDash val="solid"/>
-          </a:ln>
-        </p:spPr>
-      </p:sp>
-      <p:sp>
-        <p:nvSpPr>
-          <p:cNvPr id="8" name="Shape 5"/>
-          <p:cNvSpPr/>
-          <p:nvPr/>
-        </p:nvSpPr>
-        <p:spPr>
-          <a:xfrm>
-            <a:off x="8279892" y="4728362"/>
-            <a:ext cx="211226" cy="70409"/>
-          </a:xfrm>
-          <a:prstGeom prst="roundRect">
-            <a:avLst>
-              <a:gd name="adj" fmla="val 42857"/>
-            </a:avLst>
-          </a:prstGeom>
-          <a:solidFill>
-            <a:srgbClr val="3B1F5E"/>
-          </a:solidFill>
-          <a:ln w="12700">
-            <a:solidFill>
-              <a:srgbClr val="3B1F5E"/>
-            </a:solidFill>
-            <a:prstDash val="solid"/>
-          </a:ln>
-        </p:spPr>
-      </p:sp>
-      <p:sp>
-        <p:nvSpPr>
-          <p:cNvPr id="9" name="Shape 6"/>
-          <p:cNvSpPr/>
-          <p:nvPr/>
-        </p:nvSpPr>
-        <p:spPr>
-          <a:xfrm>
-            <a:off x="8330184" y="4637837"/>
-            <a:ext cx="211226" cy="70409"/>
-          </a:xfrm>
-          <a:prstGeom prst="roundRect">
-            <a:avLst>
-              <a:gd name="adj" fmla="val 42857"/>
-            </a:avLst>
-          </a:prstGeom>
-          <a:solidFill>
-            <a:srgbClr val="3B1F5E"/>
-          </a:solidFill>
-          <a:ln w="12700">
-            <a:solidFill>
-              <a:srgbClr val="3B1F5E"/>
-            </a:solidFill>
-            <a:prstDash val="solid"/>
-          </a:ln>
-        </p:spPr>
-      </p:sp>
-      <p:sp>
-        <p:nvSpPr>
-          <p:cNvPr id="10" name="Shape 7"/>
-          <p:cNvSpPr/>
-          <p:nvPr/>
-        </p:nvSpPr>
-        <p:spPr>
-          <a:xfrm>
-            <a:off x="8541410" y="4839005"/>
-            <a:ext cx="65380" cy="65380"/>
-          </a:xfrm>
-          <a:prstGeom prst="ellipse">
-            <a:avLst/>
-          </a:prstGeom>
-          <a:solidFill>
-            <a:srgbClr val="FFC83D"/>
-          </a:solidFill>
-          <a:ln w="12700">
-            <a:solidFill>
-              <a:srgbClr val="FFC83D"/>
-            </a:solidFill>
-            <a:prstDash val="solid"/>
-          </a:ln>
-        </p:spPr>
       </p:sp>
     </p:spTree>
   </p:cSld>
@@ -9277,13 +9934,6 @@
 <file path=ppt/slides/slide7.xml><?xml version="1.0" encoding="utf-8"?>
 <p:sld xmlns:a="http://schemas.openxmlformats.org/drawingml/2006/main" xmlns:r="http://schemas.openxmlformats.org/officeDocument/2006/relationships" xmlns:p="http://schemas.openxmlformats.org/presentationml/2006/main">
   <p:cSld name="Slide 7">
-    <p:bg>
-      <p:bgPr>
-        <a:solidFill>
-          <a:srgbClr val="FFFFFF"/>
-        </a:solidFill>
-      </p:bgPr>
-    </p:bg>
     <p:spTree>
       <p:nvGrpSpPr>
         <p:cNvPr id="1" name=""/>
@@ -9416,7 +10066,7 @@
                 <a:ea typeface="Arial" pitchFamily="34" charset="-122"/>
                 <a:cs typeface="Arial" pitchFamily="34" charset="-120"/>
               </a:rPr>
-              <a:t>Alíquota efetiva de setembro e enquadramento: o faturamento dos últimos 12 meses muda alguma coisa?</a:t>
+              <a:t>Alíquota efetiva de agosto e enquadramento: o faturamento dos últimos 12 meses muda alguma coisa?</a:t>
             </a:r>
             <a:endParaRPr lang="en-US" sz="1200" dirty="0"/>
           </a:p>
@@ -9438,7 +10088,7 @@
                 <a:ea typeface="Arial" pitchFamily="34" charset="-122"/>
                 <a:cs typeface="Arial" pitchFamily="34" charset="-120"/>
               </a:rPr>
-              <a:t>Distribuição de R$ 12 mil em outubro (R$ 6 mil por sócio): o que precisa estar apurado antes e como registrar?</a:t>
+              <a:t>Distribuição de lucro do 3º trimestre em outubro: o que precisa estar apurado antes e como registrar o "a acertar" de R$ 5.060?</a:t>
             </a:r>
             <a:endParaRPr lang="en-US" sz="1200" dirty="0"/>
           </a:p>
@@ -9460,7 +10110,7 @@
                 <a:ea typeface="Arial" pitchFamily="34" charset="-122"/>
                 <a:cs typeface="Arial" pitchFamily="34" charset="-120"/>
               </a:rPr>
-              <a:t>Honorários de êxito: nota e imposto no recebimento ou em outro momento? Como lançar os R$ 36 mil sem data?</a:t>
+              <a:t>Honorários de êxito: nota e imposto no recebimento ou em outro momento? Como tratar os R$ 30 mil sem data?</a:t>
             </a:r>
             <a:endParaRPr lang="en-US" sz="1200" dirty="0"/>
           </a:p>
@@ -9548,7 +10198,7 @@
                 <a:ea typeface="Arial" pitchFamily="34" charset="-122"/>
                 <a:cs typeface="Arial" pitchFamily="34" charset="-120"/>
               </a:rPr>
-              <a:t>13º dos sócios: pró-labore extra em dezembro ou distribuição? Qual pesa menos?</a:t>
+              <a:t>Reserva de fim de ano dos sócios: pró-labore extra em dezembro ou distribuição? Qual formato pesa menos?</a:t>
             </a:r>
             <a:endParaRPr lang="en-US" sz="1200" dirty="0"/>
           </a:p>
@@ -9576,151 +10226,6 @@
           </a:p>
         </p:txBody>
       </p:sp>
-      <p:sp>
-        <p:nvSpPr>
-          <p:cNvPr id="5" name="Text 3"/>
-          <p:cNvSpPr txBox="1"/>
-          <p:nvPr/>
-        </p:nvSpPr>
-        <p:spPr>
-          <a:xfrm>
-            <a:off x="457200" y="4791456"/>
-            <a:ext cx="6858000" cy="201168"/>
-          </a:xfrm>
-          <a:prstGeom prst="rect">
-            <a:avLst/>
-          </a:prstGeom>
-          <a:noFill/>
-          <a:ln/>
-        </p:spPr>
-        <p:txBody>
-          <a:bodyPr wrap="square" lIns="0" tIns="0" rIns="0" bIns="0" rtlCol="0" anchor="ctr"/>
-          <a:lstStyle/>
-          <a:p>
-            <a:pPr indent="0" marL="0">
-              <a:buNone/>
-            </a:pPr>
-            <a:r>
-              <a:rPr lang="en-US" sz="700" dirty="0">
-                <a:solidFill>
-                  <a:srgbClr val="B89BE0"/>
-                </a:solidFill>
-                <a:latin typeface="Arial" pitchFamily="34" charset="0"/>
-                <a:ea typeface="Arial" pitchFamily="34" charset="-122"/>
-                <a:cs typeface="Arial" pitchFamily="34" charset="-120"/>
-              </a:rPr>
-              <a:t>Kit de Gestão para Advogados · modelo v1.0 · set/2026</a:t>
-            </a:r>
-            <a:endParaRPr lang="en-US" sz="700" dirty="0"/>
-          </a:p>
-        </p:txBody>
-      </p:sp>
-      <p:sp>
-        <p:nvSpPr>
-          <p:cNvPr id="6" name="Shape 4"/>
-          <p:cNvSpPr/>
-          <p:nvPr/>
-        </p:nvSpPr>
-        <p:spPr>
-          <a:xfrm>
-            <a:off x="8229600" y="4818888"/>
-            <a:ext cx="211226" cy="70409"/>
-          </a:xfrm>
-          <a:prstGeom prst="roundRect">
-            <a:avLst>
-              <a:gd name="adj" fmla="val 42857"/>
-            </a:avLst>
-          </a:prstGeom>
-          <a:solidFill>
-            <a:srgbClr val="7A5AA8"/>
-          </a:solidFill>
-          <a:ln w="12700">
-            <a:solidFill>
-              <a:srgbClr val="7A5AA8"/>
-            </a:solidFill>
-            <a:prstDash val="solid"/>
-          </a:ln>
-        </p:spPr>
-      </p:sp>
-      <p:sp>
-        <p:nvSpPr>
-          <p:cNvPr id="7" name="Shape 5"/>
-          <p:cNvSpPr/>
-          <p:nvPr/>
-        </p:nvSpPr>
-        <p:spPr>
-          <a:xfrm>
-            <a:off x="8279892" y="4728362"/>
-            <a:ext cx="211226" cy="70409"/>
-          </a:xfrm>
-          <a:prstGeom prst="roundRect">
-            <a:avLst>
-              <a:gd name="adj" fmla="val 42857"/>
-            </a:avLst>
-          </a:prstGeom>
-          <a:solidFill>
-            <a:srgbClr val="3B1F5E"/>
-          </a:solidFill>
-          <a:ln w="12700">
-            <a:solidFill>
-              <a:srgbClr val="3B1F5E"/>
-            </a:solidFill>
-            <a:prstDash val="solid"/>
-          </a:ln>
-        </p:spPr>
-      </p:sp>
-      <p:sp>
-        <p:nvSpPr>
-          <p:cNvPr id="8" name="Shape 6"/>
-          <p:cNvSpPr/>
-          <p:nvPr/>
-        </p:nvSpPr>
-        <p:spPr>
-          <a:xfrm>
-            <a:off x="8330184" y="4637837"/>
-            <a:ext cx="211226" cy="70409"/>
-          </a:xfrm>
-          <a:prstGeom prst="roundRect">
-            <a:avLst>
-              <a:gd name="adj" fmla="val 42857"/>
-            </a:avLst>
-          </a:prstGeom>
-          <a:solidFill>
-            <a:srgbClr val="3B1F5E"/>
-          </a:solidFill>
-          <a:ln w="12700">
-            <a:solidFill>
-              <a:srgbClr val="3B1F5E"/>
-            </a:solidFill>
-            <a:prstDash val="solid"/>
-          </a:ln>
-        </p:spPr>
-      </p:sp>
-      <p:sp>
-        <p:nvSpPr>
-          <p:cNvPr id="9" name="Shape 7"/>
-          <p:cNvSpPr/>
-          <p:nvPr/>
-        </p:nvSpPr>
-        <p:spPr>
-          <a:xfrm>
-            <a:off x="8541410" y="4839005"/>
-            <a:ext cx="65380" cy="65380"/>
-          </a:xfrm>
-          <a:prstGeom prst="ellipse">
-            <a:avLst/>
-          </a:prstGeom>
-          <a:solidFill>
-            <a:srgbClr val="FFC83D"/>
-          </a:solidFill>
-          <a:ln w="12700">
-            <a:solidFill>
-              <a:srgbClr val="FFC83D"/>
-            </a:solidFill>
-            <a:prstDash val="solid"/>
-          </a:ln>
-        </p:spPr>
-      </p:sp>
     </p:spTree>
   </p:cSld>
   <p:clrMapOvr>
@@ -9732,13 +10237,6 @@
 <file path=ppt/slides/slide8.xml><?xml version="1.0" encoding="utf-8"?>
 <p:sld xmlns:a="http://schemas.openxmlformats.org/drawingml/2006/main" xmlns:r="http://schemas.openxmlformats.org/officeDocument/2006/relationships" xmlns:p="http://schemas.openxmlformats.org/presentationml/2006/main">
   <p:cSld name="Slide 8">
-    <p:bg>
-      <p:bgPr>
-        <a:solidFill>
-          <a:srgbClr val="3B1F5E"/>
-        </a:solidFill>
-      </p:bgPr>
-    </p:bg>
     <p:spTree>
       <p:nvGrpSpPr>
         <p:cNvPr id="1" name=""/>
@@ -9803,7 +10301,7 @@
         <p:spPr>
           <a:xfrm>
             <a:off x="457200" y="1554480"/>
-            <a:ext cx="8229600" cy="2743200"/>
+            <a:ext cx="7772400" cy="2651760"/>
           </a:xfrm>
           <a:prstGeom prst="rect">
             <a:avLst/>
@@ -9817,13 +10315,13 @@
           <a:p>
             <a:pPr marL="342900" indent="-342900">
               <a:spcAft>
-                <a:spcPts val="1000"/>
+                <a:spcPts val="800"/>
               </a:spcAft>
               <a:buSzPct val="100000"/>
               <a:buChar char="•"/>
             </a:pPr>
             <a:r>
-              <a:rPr lang="en-US" sz="1600" dirty="0">
+              <a:rPr lang="en-US" sz="1300" dirty="0">
                 <a:solidFill>
                   <a:srgbClr val="FFFFFF"/>
                 </a:solidFill>
@@ -9831,20 +10329,20 @@
                 <a:ea typeface="Arial" pitchFamily="34" charset="-122"/>
                 <a:cs typeface="Arial" pitchFamily="34" charset="-120"/>
               </a:rPr>
-              <a:t>09 · Caixa do escritório: aba Lançamentos filtrada em setembro e aba Painel.</a:t>
+              <a:t>09 · Caixa do escritório: aba Painel com Config = Agosto (entradas e saídas por categoria) e as notas fiscais do mês.</a:t>
             </a:r>
-            <a:endParaRPr lang="en-US" sz="1600" dirty="0"/>
+            <a:endParaRPr lang="en-US" sz="1300" dirty="0"/>
           </a:p>
           <a:p>
             <a:pPr marL="342900" indent="-342900">
               <a:spcAft>
-                <a:spcPts val="1000"/>
+                <a:spcPts val="800"/>
               </a:spcAft>
               <a:buSzPct val="100000"/>
               <a:buChar char="•"/>
             </a:pPr>
             <a:r>
-              <a:rPr lang="en-US" sz="1600" dirty="0">
+              <a:rPr lang="en-US" sz="1300" dirty="0">
                 <a:solidFill>
                   <a:srgbClr val="FFFFFF"/>
                 </a:solidFill>
@@ -9854,18 +10352,18 @@
               </a:rPr>
               <a:t>10 · Provisão de impostos, 13º e férias: aba Painel.</a:t>
             </a:r>
-            <a:endParaRPr lang="en-US" sz="1600" dirty="0"/>
+            <a:endParaRPr lang="en-US" sz="1300" dirty="0"/>
           </a:p>
           <a:p>
             <a:pPr marL="342900" indent="-342900">
               <a:spcAft>
-                <a:spcPts val="1000"/>
+                <a:spcPts val="800"/>
               </a:spcAft>
               <a:buSzPct val="100000"/>
               <a:buChar char="•"/>
             </a:pPr>
             <a:r>
-              <a:rPr lang="en-US" sz="1600" dirty="0">
+              <a:rPr lang="en-US" sz="1300" dirty="0">
                 <a:solidFill>
                   <a:srgbClr val="FFFFFF"/>
                 </a:solidFill>
@@ -9875,18 +10373,18 @@
               </a:rPr>
               <a:t>11 · Pró-labore e separação pessoa física × escritório: aba Painel.</a:t>
             </a:r>
-            <a:endParaRPr lang="en-US" sz="1600" dirty="0"/>
+            <a:endParaRPr lang="en-US" sz="1300" dirty="0"/>
           </a:p>
           <a:p>
             <a:pPr marL="342900" indent="-342900">
               <a:spcAft>
-                <a:spcPts val="1000"/>
+                <a:spcPts val="800"/>
               </a:spcAft>
               <a:buSzPct val="100000"/>
               <a:buChar char="•"/>
             </a:pPr>
             <a:r>
-              <a:rPr lang="en-US" sz="1600" dirty="0">
+              <a:rPr lang="en-US" sz="1300" dirty="0">
                 <a:solidFill>
                   <a:srgbClr val="FFFFFF"/>
                 </a:solidFill>
@@ -9894,20 +10392,20 @@
                 <a:ea typeface="Arial" pitchFamily="34" charset="-122"/>
                 <a:cs typeface="Arial" pitchFamily="34" charset="-120"/>
               </a:rPr>
-              <a:t>13 · Carteira de clientes e casos e 14 · Parcelas e inadimplência: abas Painel e Vencidos.</a:t>
+              <a:t>13 · Carteira e 14 · Parcelas: só os totais dos cartões dos Painéis (contratado, recebido, a receber; vencido por faixa), copiados para o slide 5. Sem nome de cliente e sem número de processo.</a:t>
             </a:r>
-            <a:endParaRPr lang="en-US" sz="1600" dirty="0"/>
+            <a:endParaRPr lang="en-US" sz="1300" dirty="0"/>
           </a:p>
           <a:p>
             <a:pPr marL="342900" indent="-342900">
               <a:spcAft>
-                <a:spcPts val="1000"/>
+                <a:spcPts val="800"/>
               </a:spcAft>
               <a:buSzPct val="100000"/>
               <a:buChar char="•"/>
             </a:pPr>
             <a:r>
-              <a:rPr lang="en-US" sz="1600" dirty="0">
+              <a:rPr lang="en-US" sz="1300" dirty="0">
                 <a:solidFill>
                   <a:srgbClr val="FFFFFF"/>
                 </a:solidFill>
@@ -9915,20 +10413,20 @@
                 <a:ea typeface="Arial" pitchFamily="34" charset="-122"/>
                 <a:cs typeface="Arial" pitchFamily="34" charset="-120"/>
               </a:rPr>
-              <a:t>18 · Resultado mensal simplificado e 20 · Resumo do mês (texto gerado pelo prompt "Preparar a reunião com o contador").</a:t>
+              <a:t>18 · Resultado mensal (agosto) e 20 · Resumo do mês (bloco único, gerado com o prompt "Caixa 04").</a:t>
             </a:r>
-            <a:endParaRPr lang="en-US" sz="1600" dirty="0"/>
+            <a:endParaRPr lang="en-US" sz="1300" dirty="0"/>
           </a:p>
           <a:p>
             <a:pPr marL="342900" indent="-342900">
               <a:spcAft>
-                <a:spcPts val="1000"/>
+                <a:spcPts val="800"/>
               </a:spcAft>
               <a:buSzPct val="100000"/>
               <a:buChar char="•"/>
             </a:pPr>
             <a:r>
-              <a:rPr lang="en-US" sz="1600" dirty="0">
+              <a:rPr lang="en-US" sz="1300" dirty="0">
                 <a:solidFill>
                   <a:srgbClr val="FFFFFF"/>
                 </a:solidFill>
@@ -9936,9 +10434,9 @@
                 <a:ea typeface="Arial" pitchFamily="34" charset="-122"/>
                 <a:cs typeface="Arial" pitchFamily="34" charset="-120"/>
               </a:rPr>
-              <a:t>Fora do kit: extratos bancários de setembro e guias pagas.</a:t>
+              <a:t>Fora do kit: extratos bancários de agosto e guias pagas.</a:t>
             </a:r>
-            <a:endParaRPr lang="en-US" sz="1600" dirty="0"/>
+            <a:endParaRPr lang="en-US" sz="1300" dirty="0"/>
           </a:p>
         </p:txBody>
       </p:sp>
@@ -9950,153 +10448,8 @@
         </p:nvSpPr>
         <p:spPr>
           <a:xfrm>
-            <a:off x="457200" y="4791456"/>
-            <a:ext cx="6858000" cy="201168"/>
-          </a:xfrm>
-          <a:prstGeom prst="rect">
-            <a:avLst/>
-          </a:prstGeom>
-          <a:noFill/>
-          <a:ln/>
-        </p:spPr>
-        <p:txBody>
-          <a:bodyPr wrap="square" lIns="0" tIns="0" rIns="0" bIns="0" rtlCol="0" anchor="ctr"/>
-          <a:lstStyle/>
-          <a:p>
-            <a:pPr indent="0" marL="0">
-              <a:buNone/>
-            </a:pPr>
-            <a:r>
-              <a:rPr lang="en-US" sz="700" dirty="0">
-                <a:solidFill>
-                  <a:srgbClr val="7A5AA8"/>
-                </a:solidFill>
-                <a:latin typeface="Arial" pitchFamily="34" charset="0"/>
-                <a:ea typeface="Arial" pitchFamily="34" charset="-122"/>
-                <a:cs typeface="Arial" pitchFamily="34" charset="-120"/>
-              </a:rPr>
-              <a:t>Kit de Gestão para Advogados · modelo v1.0 · set/2026</a:t>
-            </a:r>
-            <a:endParaRPr lang="en-US" sz="700" dirty="0"/>
-          </a:p>
-        </p:txBody>
-      </p:sp>
-      <p:sp>
-        <p:nvSpPr>
-          <p:cNvPr id="5" name="Shape 3"/>
-          <p:cNvSpPr/>
-          <p:nvPr/>
-        </p:nvSpPr>
-        <p:spPr>
-          <a:xfrm>
-            <a:off x="8229600" y="4818888"/>
-            <a:ext cx="211226" cy="70409"/>
-          </a:xfrm>
-          <a:prstGeom prst="roundRect">
-            <a:avLst>
-              <a:gd name="adj" fmla="val 42857"/>
-            </a:avLst>
-          </a:prstGeom>
-          <a:solidFill>
-            <a:srgbClr val="B89BE0"/>
-          </a:solidFill>
-          <a:ln w="12700">
-            <a:solidFill>
-              <a:srgbClr val="B89BE0"/>
-            </a:solidFill>
-            <a:prstDash val="solid"/>
-          </a:ln>
-        </p:spPr>
-      </p:sp>
-      <p:sp>
-        <p:nvSpPr>
-          <p:cNvPr id="6" name="Shape 4"/>
-          <p:cNvSpPr/>
-          <p:nvPr/>
-        </p:nvSpPr>
-        <p:spPr>
-          <a:xfrm>
-            <a:off x="8279892" y="4728362"/>
-            <a:ext cx="211226" cy="70409"/>
-          </a:xfrm>
-          <a:prstGeom prst="roundRect">
-            <a:avLst>
-              <a:gd name="adj" fmla="val 42857"/>
-            </a:avLst>
-          </a:prstGeom>
-          <a:solidFill>
-            <a:srgbClr val="FFFFFF"/>
-          </a:solidFill>
-          <a:ln w="12700">
-            <a:solidFill>
-              <a:srgbClr val="FFFFFF"/>
-            </a:solidFill>
-            <a:prstDash val="solid"/>
-          </a:ln>
-        </p:spPr>
-      </p:sp>
-      <p:sp>
-        <p:nvSpPr>
-          <p:cNvPr id="7" name="Shape 5"/>
-          <p:cNvSpPr/>
-          <p:nvPr/>
-        </p:nvSpPr>
-        <p:spPr>
-          <a:xfrm>
-            <a:off x="8330184" y="4637837"/>
-            <a:ext cx="211226" cy="70409"/>
-          </a:xfrm>
-          <a:prstGeom prst="roundRect">
-            <a:avLst>
-              <a:gd name="adj" fmla="val 42857"/>
-            </a:avLst>
-          </a:prstGeom>
-          <a:solidFill>
-            <a:srgbClr val="FFFFFF"/>
-          </a:solidFill>
-          <a:ln w="12700">
-            <a:solidFill>
-              <a:srgbClr val="FFFFFF"/>
-            </a:solidFill>
-            <a:prstDash val="solid"/>
-          </a:ln>
-        </p:spPr>
-      </p:sp>
-      <p:sp>
-        <p:nvSpPr>
-          <p:cNvPr id="8" name="Shape 6"/>
-          <p:cNvSpPr/>
-          <p:nvPr/>
-        </p:nvSpPr>
-        <p:spPr>
-          <a:xfrm>
-            <a:off x="8541410" y="4839005"/>
-            <a:ext cx="65380" cy="65380"/>
-          </a:xfrm>
-          <a:prstGeom prst="ellipse">
-            <a:avLst/>
-          </a:prstGeom>
-          <a:solidFill>
-            <a:srgbClr val="FFC83D"/>
-          </a:solidFill>
-          <a:ln w="12700">
-            <a:solidFill>
-              <a:srgbClr val="FFC83D"/>
-            </a:solidFill>
-            <a:prstDash val="solid"/>
-          </a:ln>
-        </p:spPr>
-      </p:sp>
-      <p:sp>
-        <p:nvSpPr>
-          <p:cNvPr id="9" name="Text 7"/>
-          <p:cNvSpPr txBox="1"/>
-          <p:nvPr/>
-        </p:nvSpPr>
-        <p:spPr>
-          <a:xfrm>
-            <a:off x="457200" y="4206240"/>
-            <a:ext cx="8229600" cy="365760"/>
+            <a:off x="457200" y="4343400"/>
+            <a:ext cx="7772400" cy="457200"/>
           </a:xfrm>
           <a:prstGeom prst="rect">
             <a:avLst/>
@@ -10120,7 +10473,7 @@
                 <a:ea typeface="Arial" pitchFamily="34" charset="-122"/>
                 <a:cs typeface="Arial" pitchFamily="34" charset="-120"/>
               </a:rPr>
-              <a:t>Tudo em .xlsx, com as fórmulas; o contador não precisa alterar nada. Próxima reunião: 5 de novembro de 2026.</a:t>
+              <a:t>Tudo em .xlsx, com as fórmulas; o contador não precisa alterar nada. Próxima reunião: 5 de outubro de 2026, com o fechamento de setembro.</a:t>
             </a:r>
             <a:endParaRPr lang="en-US" sz="1100" dirty="0"/>
           </a:p>
